--- a/presentations/Exxsol_D40_Supply_Chain_Risk_Committee.pptx
+++ b/presentations/Exxsol_D40_Supply_Chain_Risk_Committee.pptx
@@ -3149,49 +3149,30 @@
           </a:p>
         </p:txBody>
       </p:sp>
-      <p:sp>
-        <p:nvSpPr>
-          <p:cNvPr id="3" name="Rectangle 2"/>
-          <p:cNvSpPr/>
-          <p:nvPr/>
-        </p:nvSpPr>
-        <p:spPr>
-          <a:xfrm>
-            <a:off x="0" y="5120640"/>
-            <a:ext cx="9144000" cy="73152"/>
-          </a:xfrm>
-          <a:prstGeom prst="rect">
-            <a:avLst/>
-          </a:prstGeom>
-          <a:solidFill>
-            <a:srgbClr val="007A87"/>
-          </a:solidFill>
-          <a:ln>
-            <a:noFill/>
-          </a:ln>
-        </p:spPr>
-        <p:style>
-          <a:lnRef idx="1">
-            <a:schemeClr val="accent1"/>
-          </a:lnRef>
-          <a:fillRef idx="3">
-            <a:schemeClr val="accent1"/>
-          </a:fillRef>
-          <a:effectRef idx="2">
-            <a:schemeClr val="accent1"/>
-          </a:effectRef>
-          <a:fontRef idx="minor">
-            <a:schemeClr val="lt1"/>
-          </a:fontRef>
-        </p:style>
-        <p:txBody>
-          <a:bodyPr rtlCol="0" anchor="ctr"/>
-          <a:lstStyle/>
-          <a:p>
-            <a:pPr algn="ctr"/>
-          </a:p>
-        </p:txBody>
-      </p:sp>
+      <p:pic>
+        <p:nvPicPr>
+          <p:cNvPr id="3" name="Picture 2" descr="01_title.png"/>
+          <p:cNvPicPr>
+            <a:picLocks noChangeAspect="1"/>
+          </p:cNvPicPr>
+          <p:nvPr/>
+        </p:nvPicPr>
+        <p:blipFill>
+          <a:blip r:embed="rId2"/>
+          <a:stretch>
+            <a:fillRect/>
+          </a:stretch>
+        </p:blipFill>
+        <p:spPr>
+          <a:xfrm>
+            <a:off x="4754880" y="0"/>
+            <a:ext cx="4389120" cy="6858000"/>
+          </a:xfrm>
+          <a:prstGeom prst="rect">
+            <a:avLst/>
+          </a:prstGeom>
+        </p:spPr>
+      </p:pic>
       <p:sp>
         <p:nvSpPr>
           <p:cNvPr id="4" name="TextBox 3"/>
@@ -3200,8 +3181,8 @@
         </p:nvSpPr>
         <p:spPr>
           <a:xfrm>
-            <a:off x="731520" y="1645920"/>
-            <a:ext cx="7680960" cy="1463040"/>
+            <a:off x="548640" y="1463040"/>
+            <a:ext cx="4206240" cy="4114800"/>
           </a:xfrm>
           <a:prstGeom prst="rect">
             <a:avLst/>
@@ -3214,51 +3195,60 @@
           </a:bodyPr>
           <a:lstStyle/>
           <a:p>
-            <a:r>
-              <a:rPr sz="4000" b="1">
+            <a:pPr>
+              <a:spcAft>
+                <a:spcPts val="1000"/>
+              </a:spcAft>
+            </a:pPr>
+            <a:r>
+              <a:rPr sz="3800" b="1">
                 <a:solidFill>
                   <a:srgbClr val="FFFFFF"/>
                 </a:solidFill>
                 <a:latin typeface="Calibri"/>
               </a:rPr>
-              <a:t>Exxsol D40 Supply Chain Risk</a:t>
-            </a:r>
-          </a:p>
-          <a:p>
-            <a:r>
-              <a:rPr sz="2200" b="0">
+              <a:t>Exxsol D40
+Supply Chain Risk</a:t>
+            </a:r>
+          </a:p>
+          <a:p>
+            <a:pPr>
+              <a:spcAft>
+                <a:spcPts val="1000"/>
+              </a:spcAft>
+            </a:pPr>
+            <a:r>
+              <a:rPr sz="2000" b="0">
                 <a:solidFill>
                   <a:srgbClr val="CBE5F0"/>
                 </a:solidFill>
                 <a:latin typeface="Calibri"/>
               </a:rPr>
-              <a:t>Quality Assurance, Traceability &amp; Adulteration Controls</a:t>
-            </a:r>
-          </a:p>
-        </p:txBody>
-      </p:sp>
-      <p:sp>
-        <p:nvSpPr>
-          <p:cNvPr id="5" name="TextBox 4"/>
-          <p:cNvSpPr txBox="1"/>
-          <p:nvPr/>
-        </p:nvSpPr>
-        <p:spPr>
-          <a:xfrm>
-            <a:off x="731520" y="3840480"/>
-            <a:ext cx="7498079" cy="1097280"/>
-          </a:xfrm>
-          <a:prstGeom prst="rect">
-            <a:avLst/>
-          </a:prstGeom>
-          <a:noFill/>
-        </p:spPr>
-        <p:txBody>
-          <a:bodyPr wrap="none">
-            <a:spAutoFit/>
-          </a:bodyPr>
-          <a:lstStyle/>
-          <a:p>
+              <a:t>Quality • Traceability • Anti-Adulteration</a:t>
+            </a:r>
+          </a:p>
+          <a:p>
+            <a:pPr>
+              <a:spcAft>
+                <a:spcPts val="1000"/>
+              </a:spcAft>
+            </a:pPr>
+            <a:r>
+              <a:rPr sz="1800" b="0">
+                <a:solidFill>
+                  <a:srgbClr val="E2E8F0"/>
+                </a:solidFill>
+                <a:latin typeface="Calibri"/>
+              </a:rPr>
+              <a:t>Risk Committee Briefing</a:t>
+            </a:r>
+          </a:p>
+          <a:p>
+            <a:pPr>
+              <a:spcAft>
+                <a:spcPts val="1000"/>
+              </a:spcAft>
+            </a:pPr>
             <a:r>
               <a:rPr sz="1600" b="0">
                 <a:solidFill>
@@ -3266,21 +3256,15 @@
                 </a:solidFill>
                 <a:latin typeface="Calibri"/>
               </a:rPr>
-              <a:t>Risk Committee Briefing</a:t>
-            </a:r>
-          </a:p>
-          <a:p>
-            <a:r>
-              <a:rPr sz="1600" b="0">
-                <a:solidFill>
-                  <a:srgbClr val="E2E8F0"/>
-                </a:solidFill>
-                <a:latin typeface="Calibri"/>
-              </a:rPr>
-              <a:t>Industrial Solvent Procurement — Powder Metallurgy Cleaning Application</a:t>
-            </a:r>
-          </a:p>
-          <a:p>
+              <a:t>Powder Metallurgy Cleaning</a:t>
+            </a:r>
+          </a:p>
+          <a:p>
+            <a:pPr>
+              <a:spcAft>
+                <a:spcPts val="1000"/>
+              </a:spcAft>
+            </a:pPr>
             <a:r>
               <a:rPr sz="1600" b="0">
                 <a:solidFill>
@@ -3320,7 +3304,7 @@
         <p:spPr>
           <a:xfrm>
             <a:off x="0" y="0"/>
-            <a:ext cx="9144000" cy="1051560"/>
+            <a:ext cx="9144000" cy="1097280"/>
           </a:xfrm>
           <a:prstGeom prst="rect">
             <a:avLst/>
@@ -3362,8 +3346,8 @@
         </p:nvSpPr>
         <p:spPr>
           <a:xfrm>
-            <a:off x="502920" y="201168"/>
-            <a:ext cx="8046720" cy="502920"/>
+            <a:off x="411480" y="164592"/>
+            <a:ext cx="8321040" cy="566928"/>
           </a:xfrm>
           <a:prstGeom prst="rect">
             <a:avLst/>
@@ -3377,13 +3361,13 @@
           <a:lstStyle/>
           <a:p>
             <a:r>
-              <a:rPr sz="2800" b="1">
+              <a:rPr sz="3400" b="1">
                 <a:solidFill>
                   <a:srgbClr val="FFFFFF"/>
                 </a:solidFill>
                 <a:latin typeface="Calibri"/>
               </a:rPr>
-              <a:t>Adulteration Threat Model</a:t>
+              <a:t>Adulteration Threat</a:t>
             </a:r>
           </a:p>
         </p:txBody>
@@ -3396,8 +3380,8 @@
         </p:nvSpPr>
         <p:spPr>
           <a:xfrm>
-            <a:off x="502920" y="658368"/>
-            <a:ext cx="8046720" cy="320040"/>
+            <a:off x="411480" y="658368"/>
+            <a:ext cx="8321040" cy="347472"/>
           </a:xfrm>
           <a:prstGeom prst="rect">
             <a:avLst/>
@@ -3411,27 +3395,51 @@
           <a:lstStyle/>
           <a:p>
             <a:r>
-              <a:rPr sz="1400" b="0">
+              <a:rPr sz="1800" b="0">
                 <a:solidFill>
                   <a:srgbClr val="CBE5F0"/>
                 </a:solidFill>
                 <a:latin typeface="Calibri"/>
               </a:rPr>
-              <a:t>How Unscrupulous Traders Reduce Cost Per Drum</a:t>
-            </a:r>
-          </a:p>
-        </p:txBody>
-      </p:sp>
-      <p:sp>
-        <p:nvSpPr>
-          <p:cNvPr id="5" name="TextBox 4"/>
+              <a:t>How Fraud Happens</a:t>
+            </a:r>
+          </a:p>
+        </p:txBody>
+      </p:sp>
+      <p:pic>
+        <p:nvPicPr>
+          <p:cNvPr id="5" name="Picture 4" descr="10_adulteration.png"/>
+          <p:cNvPicPr>
+            <a:picLocks noChangeAspect="1"/>
+          </p:cNvPicPr>
+          <p:nvPr/>
+        </p:nvPicPr>
+        <p:blipFill>
+          <a:blip r:embed="rId2"/>
+          <a:stretch>
+            <a:fillRect/>
+          </a:stretch>
+        </p:blipFill>
+        <p:spPr>
+          <a:xfrm>
+            <a:off x="5806440" y="1234440"/>
+            <a:ext cx="3063240" cy="4892040"/>
+          </a:xfrm>
+          <a:prstGeom prst="rect">
+            <a:avLst/>
+          </a:prstGeom>
+        </p:spPr>
+      </p:pic>
+      <p:sp>
+        <p:nvSpPr>
+          <p:cNvPr id="6" name="TextBox 5"/>
           <p:cNvSpPr txBox="1"/>
           <p:nvPr/>
         </p:nvSpPr>
         <p:spPr>
           <a:xfrm>
-            <a:off x="594360" y="1280160"/>
-            <a:ext cx="7955279" cy="5029200"/>
+            <a:off x="411480" y="1234440"/>
+            <a:ext cx="5166360" cy="5120640"/>
           </a:xfrm>
           <a:prstGeom prst="rect">
             <a:avLst/>
@@ -3446,167 +3454,91 @@
           <a:p>
             <a:pPr>
               <a:spcBef>
-                <a:spcPts val="200"/>
+                <a:spcPts val="400"/>
               </a:spcBef>
               <a:spcAft>
-                <a:spcPts val="885"/>
+                <a:spcPts val="1400"/>
               </a:spcAft>
             </a:pPr>
             <a:r>
-              <a:rPr sz="1400" b="0">
+              <a:rPr sz="2400" b="0">
                 <a:solidFill>
                   <a:srgbClr val="334155"/>
                 </a:solidFill>
                 <a:latin typeface="Calibri"/>
               </a:rPr>
-              <a:t>Motivation: preserve margin under cost pressure by diluting genuine D40 with significantly cheaper solvents.</a:t>
+              <a:t>• Traders mix MC &amp; methanol to cut cost</a:t>
             </a:r>
           </a:p>
           <a:p>
             <a:pPr>
               <a:spcBef>
-                <a:spcPts val="200"/>
+                <a:spcPts val="400"/>
               </a:spcBef>
               <a:spcAft>
-                <a:spcPts val="885"/>
+                <a:spcPts val="1400"/>
               </a:spcAft>
             </a:pPr>
             <a:r>
-              <a:rPr sz="1400" b="0">
+              <a:rPr sz="2400" b="0">
                 <a:solidFill>
                   <a:srgbClr val="334155"/>
                 </a:solidFill>
                 <a:latin typeface="Calibri"/>
               </a:rPr>
-              <a:t>Common adulterants:</a:t>
-            </a:r>
-          </a:p>
-          <a:p>
-            <a:pPr lvl="1">
+              <a:t>• Reuse real drums &amp; fake CoA</a:t>
+            </a:r>
+          </a:p>
+          <a:p>
+            <a:pPr>
               <a:spcBef>
-                <a:spcPts val="200"/>
+                <a:spcPts val="400"/>
               </a:spcBef>
               <a:spcAft>
-                <a:spcPts val="885"/>
+                <a:spcPts val="1400"/>
               </a:spcAft>
             </a:pPr>
             <a:r>
-              <a:rPr sz="1200" b="0">
+              <a:rPr sz="2400" b="0">
                 <a:solidFill>
                   <a:srgbClr val="334155"/>
                 </a:solidFill>
                 <a:latin typeface="Calibri"/>
               </a:rPr>
-              <a:t>Methylene chloride (MC) — B.P. ~40 °C; sweet/chloroform-like odor; very low cost.</a:t>
-            </a:r>
-          </a:p>
-          <a:p>
-            <a:pPr lvl="1">
+              <a:t>• Looks clear — hard to spot</a:t>
+            </a:r>
+          </a:p>
+          <a:p>
+            <a:pPr>
               <a:spcBef>
-                <a:spcPts val="200"/>
+                <a:spcPts val="400"/>
               </a:spcBef>
               <a:spcAft>
-                <a:spcPts val="885"/>
+                <a:spcPts val="1400"/>
               </a:spcAft>
             </a:pPr>
             <a:r>
-              <a:rPr sz="1200" b="0">
+              <a:rPr sz="2400" b="0">
                 <a:solidFill>
                   <a:srgbClr val="334155"/>
                 </a:solidFill>
                 <a:latin typeface="Calibri"/>
               </a:rPr>
-              <a:t>Methanol — B.P. ~65 °C; flash point ~12 °C; readily miscible with hydrocarbons.</a:t>
-            </a:r>
-          </a:p>
-          <a:p>
-            <a:pPr lvl="1">
-              <a:spcBef>
-                <a:spcPts val="200"/>
-              </a:spcBef>
-              <a:spcAft>
-                <a:spcPts val="885"/>
-              </a:spcAft>
-            </a:pPr>
-            <a:r>
-              <a:rPr sz="1200" b="0">
-                <a:solidFill>
-                  <a:srgbClr val="334155"/>
-                </a:solidFill>
-                <a:latin typeface="Calibri"/>
-              </a:rPr>
-              <a:t>White spirit / kerosene — widens boiling range; degrades precision-cleaning performance.</a:t>
-            </a:r>
-          </a:p>
-          <a:p>
-            <a:pPr>
-              <a:spcBef>
-                <a:spcPts val="200"/>
-              </a:spcBef>
-              <a:spcAft>
-                <a:spcPts val="885"/>
-              </a:spcAft>
-            </a:pPr>
-            <a:r>
-              <a:rPr sz="1400" b="0">
-                <a:solidFill>
-                  <a:srgbClr val="334155"/>
-                </a:solidFill>
-                <a:latin typeface="Calibri"/>
-              </a:rPr>
-              <a:t>Concealment methods: reuse authentic Exxsol drums and labels; provide falsified or recycled CoA; mask odor with additives.</a:t>
-            </a:r>
-          </a:p>
-          <a:p>
-            <a:pPr>
-              <a:spcBef>
-                <a:spcPts val="200"/>
-              </a:spcBef>
-              <a:spcAft>
-                <a:spcPts val="885"/>
-              </a:spcAft>
-            </a:pPr>
-            <a:r>
-              <a:rPr sz="1400" b="0">
-                <a:solidFill>
-                  <a:srgbClr val="334155"/>
-                </a:solidFill>
-                <a:latin typeface="Calibri"/>
-              </a:rPr>
-              <a:t>Detection difficulty: homogeneous mixtures may appear clear and colorless — visual inspection alone is insufficient.</a:t>
-            </a:r>
-          </a:p>
-          <a:p>
-            <a:pPr>
-              <a:spcBef>
-                <a:spcPts val="200"/>
-              </a:spcBef>
-              <a:spcAft>
-                <a:spcPts val="885"/>
-              </a:spcAft>
-            </a:pPr>
-            <a:r>
-              <a:rPr sz="1400" b="0">
-                <a:solidFill>
-                  <a:srgbClr val="334155"/>
-                </a:solidFill>
-                <a:latin typeface="Calibri"/>
-              </a:rPr>
-              <a:t>Regulatory status: product adulteration is fraudulent, may breach chemical safety law, and invalidates SDS-based risk assessments.</a:t>
-            </a:r>
-          </a:p>
-        </p:txBody>
-      </p:sp>
-      <p:sp>
-        <p:nvSpPr>
-          <p:cNvPr id="6" name="TextBox 5"/>
+              <a:t>• Illegal &amp; invalidates SDS</a:t>
+            </a:r>
+          </a:p>
+        </p:txBody>
+      </p:sp>
+      <p:sp>
+        <p:nvSpPr>
+          <p:cNvPr id="7" name="TextBox 6"/>
           <p:cNvSpPr txBox="1"/>
           <p:nvPr/>
         </p:nvSpPr>
         <p:spPr>
           <a:xfrm>
-            <a:off x="457200" y="6446520"/>
-            <a:ext cx="8229600" cy="274320"/>
+            <a:off x="365760" y="6473952"/>
+            <a:ext cx="8412480" cy="256032"/>
           </a:xfrm>
           <a:prstGeom prst="rect">
             <a:avLst/>
@@ -3621,13 +3553,13 @@
           <a:p>
             <a:pPr algn="r"/>
             <a:r>
-              <a:rPr sz="900" b="0">
+              <a:rPr sz="1000" b="0">
                 <a:solidFill>
                   <a:srgbClr val="64748B"/>
                 </a:solidFill>
                 <a:latin typeface="Calibri"/>
               </a:rPr>
-              <a:t>Confidential — Risk Committee | Exxsol D40 Supply Chain Integrity</a:t>
+              <a:t>Confidential — Risk Committee | Exxsol D40</a:t>
             </a:r>
           </a:p>
         </p:txBody>
@@ -3659,7 +3591,7 @@
         <p:spPr>
           <a:xfrm>
             <a:off x="0" y="0"/>
-            <a:ext cx="9144000" cy="1051560"/>
+            <a:ext cx="9144000" cy="1097280"/>
           </a:xfrm>
           <a:prstGeom prst="rect">
             <a:avLst/>
@@ -3701,8 +3633,8 @@
         </p:nvSpPr>
         <p:spPr>
           <a:xfrm>
-            <a:off x="502920" y="201168"/>
-            <a:ext cx="8046720" cy="502920"/>
+            <a:off x="411480" y="164592"/>
+            <a:ext cx="8321040" cy="566928"/>
           </a:xfrm>
           <a:prstGeom prst="rect">
             <a:avLst/>
@@ -3716,28 +3648,52 @@
           <a:lstStyle/>
           <a:p>
             <a:r>
-              <a:rPr sz="2800" b="1">
+              <a:rPr sz="3400" b="1">
                 <a:solidFill>
                   <a:srgbClr val="FFFFFF"/>
                 </a:solidFill>
                 <a:latin typeface="Calibri"/>
               </a:rPr>
-              <a:t>Impact of Adulteration on Critical Properties</a:t>
-            </a:r>
-          </a:p>
-        </p:txBody>
-      </p:sp>
+              <a:t>Impact of Fraud</a:t>
+            </a:r>
+          </a:p>
+        </p:txBody>
+      </p:sp>
+      <p:pic>
+        <p:nvPicPr>
+          <p:cNvPr id="4" name="Picture 3" descr="11_impact.png"/>
+          <p:cNvPicPr>
+            <a:picLocks noChangeAspect="1"/>
+          </p:cNvPicPr>
+          <p:nvPr/>
+        </p:nvPicPr>
+        <p:blipFill>
+          <a:blip r:embed="rId2"/>
+          <a:stretch>
+            <a:fillRect/>
+          </a:stretch>
+        </p:blipFill>
+        <p:spPr>
+          <a:xfrm>
+            <a:off x="5806440" y="1234440"/>
+            <a:ext cx="3063240" cy="4892040"/>
+          </a:xfrm>
+          <a:prstGeom prst="rect">
+            <a:avLst/>
+          </a:prstGeom>
+        </p:spPr>
+      </p:pic>
       <p:graphicFrame>
         <p:nvGraphicFramePr>
-          <p:cNvPr id="4" name="Table 3"/>
+          <p:cNvPr id="5" name="Table 4"/>
           <p:cNvGraphicFramePr>
             <a:graphicFrameLocks noGrp="1"/>
           </p:cNvGraphicFramePr>
           <p:nvPr/>
         </p:nvGraphicFramePr>
         <p:xfrm>
-          <a:off x="502920" y="1417320"/>
-          <a:ext cx="7315200" cy="2962656"/>
+          <a:off x="411480" y="1234440"/>
+          <a:ext cx="5166360" cy="1920240"/>
         </p:xfrm>
         <a:graphic>
           <a:graphicData uri="http://schemas.openxmlformats.org/drawingml/2006/table">
@@ -3747,19 +3703,17 @@
               </a:tblPr>
               <a:tblGrid>
                 <a:gridCol w="1371600"/>
-                <a:gridCol w="1554480"/>
-                <a:gridCol w="2103120"/>
-                <a:gridCol w="2286000"/>
+                <a:gridCol w="1828800"/>
+                <a:gridCol w="1965960"/>
               </a:tblGrid>
-              <a:tr h="423236">
+              <a:tr h="384048">
                 <a:tc>
                   <a:txBody>
                     <a:bodyPr/>
                     <a:lstStyle/>
                     <a:p>
-                      <a:pPr algn="ctr"/>
                       <a:r>
-                        <a:rPr sz="1100" b="1">
+                        <a:rPr sz="1300" b="1">
                           <a:solidFill>
                             <a:srgbClr val="FFFFFF"/>
                           </a:solidFill>
@@ -3780,15 +3734,14 @@
                     <a:bodyPr/>
                     <a:lstStyle/>
                     <a:p>
-                      <a:pPr algn="ctr"/>
                       <a:r>
-                        <a:rPr sz="1100" b="1">
+                        <a:rPr sz="1300" b="1">
                           <a:solidFill>
                             <a:srgbClr val="FFFFFF"/>
                           </a:solidFill>
                           <a:latin typeface="Calibri"/>
                         </a:rPr>
-                        <a:t>Genuine D40</a:t>
+                        <a:t>Genuine</a:t>
                       </a:r>
                     </a:p>
                   </a:txBody>
@@ -3803,38 +3756,14 @@
                     <a:bodyPr/>
                     <a:lstStyle/>
                     <a:p>
-                      <a:pPr algn="ctr"/>
                       <a:r>
-                        <a:rPr sz="1100" b="1">
+                        <a:rPr sz="1300" b="1">
                           <a:solidFill>
                             <a:srgbClr val="FFFFFF"/>
                           </a:solidFill>
                           <a:latin typeface="Calibri"/>
                         </a:rPr>
-                        <a:t>After MC / Methanol Adulteration</a:t>
-                      </a:r>
-                    </a:p>
-                  </a:txBody>
-                  <a:tcPr>
-                    <a:solidFill>
-                      <a:srgbClr val="002B5C"/>
-                    </a:solidFill>
-                  </a:tcPr>
-                </a:tc>
-                <a:tc>
-                  <a:txBody>
-                    <a:bodyPr/>
-                    <a:lstStyle/>
-                    <a:p>
-                      <a:pPr algn="ctr"/>
-                      <a:r>
-                        <a:rPr sz="1100" b="1">
-                          <a:solidFill>
-                            <a:srgbClr val="FFFFFF"/>
-                          </a:solidFill>
-                          <a:latin typeface="Calibri"/>
-                        </a:rPr>
-                        <a:t>Business Impact</a:t>
+                        <a:t>Adulterated</a:t>
                       </a:r>
                     </a:p>
                   </a:txBody>
@@ -3845,21 +3774,20 @@
                   </a:tcPr>
                 </a:tc>
               </a:tr>
-              <a:tr h="423236">
+              <a:tr h="384048">
                 <a:tc>
                   <a:txBody>
                     <a:bodyPr/>
                     <a:lstStyle/>
                     <a:p>
-                      <a:pPr algn="ctr"/>
                       <a:r>
-                        <a:rPr sz="1000" b="0">
+                        <a:rPr sz="1200" b="0">
                           <a:solidFill>
                             <a:srgbClr val="334155"/>
                           </a:solidFill>
                           <a:latin typeface="Calibri"/>
                         </a:rPr>
-                        <a:t>Distillation range</a:t>
+                        <a:t>Distillation</a:t>
                       </a:r>
                     </a:p>
                   </a:txBody>
@@ -3870,15 +3798,14 @@
                     <a:bodyPr/>
                     <a:lstStyle/>
                     <a:p>
-                      <a:pPr algn="l"/>
                       <a:r>
-                        <a:rPr sz="1000" b="0">
+                        <a:rPr sz="1200" b="0">
                           <a:solidFill>
                             <a:srgbClr val="334155"/>
                           </a:solidFill>
                           <a:latin typeface="Calibri"/>
                         </a:rPr>
-                        <a:t>163–187 °C (narrow)</a:t>
+                        <a:t>163–187 °C</a:t>
                       </a:r>
                     </a:p>
                   </a:txBody>
@@ -3889,49 +3816,28 @@
                     <a:bodyPr/>
                     <a:lstStyle/>
                     <a:p>
-                      <a:pPr algn="l"/>
                       <a:r>
-                        <a:rPr sz="1000" b="0">
+                        <a:rPr sz="1200" b="0">
                           <a:solidFill>
                             <a:srgbClr val="334155"/>
                           </a:solidFill>
                           <a:latin typeface="Calibri"/>
                         </a:rPr>
-                        <a:t>Evaporation starts ~40 °C; range widens</a:t>
-                      </a:r>
-                    </a:p>
-                  </a:txBody>
-                  <a:tcPr/>
-                </a:tc>
-                <a:tc>
-                  <a:txBody>
-                    <a:bodyPr/>
-                    <a:lstStyle/>
-                    <a:p>
-                      <a:pPr algn="l"/>
-                      <a:r>
-                        <a:rPr sz="1000" b="0">
-                          <a:solidFill>
-                            <a:srgbClr val="334155"/>
-                          </a:solidFill>
-                          <a:latin typeface="Calibri"/>
-                        </a:rPr>
-                        <a:t>Inconsistent drying; pore residue</a:t>
+                        <a:t>Starts ~40 °C</a:t>
                       </a:r>
                     </a:p>
                   </a:txBody>
                   <a:tcPr/>
                 </a:tc>
               </a:tr>
-              <a:tr h="423236">
+              <a:tr h="384048">
                 <a:tc>
                   <a:txBody>
                     <a:bodyPr/>
                     <a:lstStyle/>
                     <a:p>
-                      <a:pPr algn="ctr"/>
                       <a:r>
-                        <a:rPr sz="1000" b="0">
+                        <a:rPr sz="1200" b="0">
                           <a:solidFill>
                             <a:srgbClr val="334155"/>
                           </a:solidFill>
@@ -3952,9 +3858,8 @@
                     <a:bodyPr/>
                     <a:lstStyle/>
                     <a:p>
-                      <a:pPr algn="l"/>
                       <a:r>
-                        <a:rPr sz="1000" b="0">
+                        <a:rPr sz="1200" b="0">
                           <a:solidFill>
                             <a:srgbClr val="334155"/>
                           </a:solidFill>
@@ -3975,15 +3880,94 @@
                     <a:bodyPr/>
                     <a:lstStyle/>
                     <a:p>
-                      <a:pPr algn="l"/>
                       <a:r>
-                        <a:rPr sz="1000" b="0">
+                        <a:rPr sz="1200" b="0">
                           <a:solidFill>
                             <a:srgbClr val="334155"/>
                           </a:solidFill>
                           <a:latin typeface="Calibri"/>
                         </a:rPr>
-                        <a:t>Effectively lowered (methanol ~12 °C)</a:t>
+                        <a:t>Much lower</a:t>
+                      </a:r>
+                    </a:p>
+                  </a:txBody>
+                  <a:tcPr>
+                    <a:solidFill>
+                      <a:srgbClr val="F1F5F9"/>
+                    </a:solidFill>
+                  </a:tcPr>
+                </a:tc>
+              </a:tr>
+              <a:tr h="384048">
+                <a:tc>
+                  <a:txBody>
+                    <a:bodyPr/>
+                    <a:lstStyle/>
+                    <a:p>
+                      <a:r>
+                        <a:rPr sz="1200" b="0">
+                          <a:solidFill>
+                            <a:srgbClr val="334155"/>
+                          </a:solidFill>
+                          <a:latin typeface="Calibri"/>
+                        </a:rPr>
+                        <a:t>Cleaning</a:t>
+                      </a:r>
+                    </a:p>
+                  </a:txBody>
+                  <a:tcPr/>
+                </a:tc>
+                <a:tc>
+                  <a:txBody>
+                    <a:bodyPr/>
+                    <a:lstStyle/>
+                    <a:p>
+                      <a:r>
+                        <a:rPr sz="1200" b="0">
+                          <a:solidFill>
+                            <a:srgbClr val="334155"/>
+                          </a:solidFill>
+                          <a:latin typeface="Calibri"/>
+                        </a:rPr>
+                        <a:t>Controlled</a:t>
+                      </a:r>
+                    </a:p>
+                  </a:txBody>
+                  <a:tcPr/>
+                </a:tc>
+                <a:tc>
+                  <a:txBody>
+                    <a:bodyPr/>
+                    <a:lstStyle/>
+                    <a:p>
+                      <a:r>
+                        <a:rPr sz="1200" b="0">
+                          <a:solidFill>
+                            <a:srgbClr val="334155"/>
+                          </a:solidFill>
+                          <a:latin typeface="Calibri"/>
+                        </a:rPr>
+                        <a:t>Fails</a:t>
+                      </a:r>
+                    </a:p>
+                  </a:txBody>
+                  <a:tcPr/>
+                </a:tc>
+              </a:tr>
+              <a:tr h="384048">
+                <a:tc>
+                  <a:txBody>
+                    <a:bodyPr/>
+                    <a:lstStyle/>
+                    <a:p>
+                      <a:r>
+                        <a:rPr sz="1200" b="0">
+                          <a:solidFill>
+                            <a:srgbClr val="334155"/>
+                          </a:solidFill>
+                          <a:latin typeface="Calibri"/>
+                        </a:rPr>
+                        <a:t>Downstream</a:t>
                       </a:r>
                     </a:p>
                   </a:txBody>
@@ -3998,118 +3982,14 @@
                     <a:bodyPr/>
                     <a:lstStyle/>
                     <a:p>
-                      <a:pPr algn="l"/>
                       <a:r>
-                        <a:rPr sz="1000" b="0">
+                        <a:rPr sz="1200" b="0">
                           <a:solidFill>
                             <a:srgbClr val="334155"/>
                           </a:solidFill>
                           <a:latin typeface="Calibri"/>
                         </a:rPr>
-                        <a:t>Elevated fire/explosion risk</a:t>
-                      </a:r>
-                    </a:p>
-                  </a:txBody>
-                  <a:tcPr>
-                    <a:solidFill>
-                      <a:srgbClr val="F1F5F9"/>
-                    </a:solidFill>
-                  </a:tcPr>
-                </a:tc>
-              </a:tr>
-              <a:tr h="423236">
-                <a:tc>
-                  <a:txBody>
-                    <a:bodyPr/>
-                    <a:lstStyle/>
-                    <a:p>
-                      <a:pPr algn="ctr"/>
-                      <a:r>
-                        <a:rPr sz="1000" b="0">
-                          <a:solidFill>
-                            <a:srgbClr val="334155"/>
-                          </a:solidFill>
-                          <a:latin typeface="Calibri"/>
-                        </a:rPr>
-                        <a:t>Aromatic / HSE profile</a:t>
-                      </a:r>
-                    </a:p>
-                  </a:txBody>
-                  <a:tcPr/>
-                </a:tc>
-                <a:tc>
-                  <a:txBody>
-                    <a:bodyPr/>
-                    <a:lstStyle/>
-                    <a:p>
-                      <a:pPr algn="l"/>
-                      <a:r>
-                        <a:rPr sz="1000" b="0">
-                          <a:solidFill>
-                            <a:srgbClr val="334155"/>
-                          </a:solidFill>
-                          <a:latin typeface="Calibri"/>
-                        </a:rPr>
-                        <a:t>Certified low-aromatic</a:t>
-                      </a:r>
-                    </a:p>
-                  </a:txBody>
-                  <a:tcPr/>
-                </a:tc>
-                <a:tc>
-                  <a:txBody>
-                    <a:bodyPr/>
-                    <a:lstStyle/>
-                    <a:p>
-                      <a:pPr algn="l"/>
-                      <a:r>
-                        <a:rPr sz="1000" b="0">
-                          <a:solidFill>
-                            <a:srgbClr val="334155"/>
-                          </a:solidFill>
-                          <a:latin typeface="Calibri"/>
-                        </a:rPr>
-                        <a:t>Profile invalidated</a:t>
-                      </a:r>
-                    </a:p>
-                  </a:txBody>
-                  <a:tcPr/>
-                </a:tc>
-                <a:tc>
-                  <a:txBody>
-                    <a:bodyPr/>
-                    <a:lstStyle/>
-                    <a:p>
-                      <a:pPr algn="l"/>
-                      <a:r>
-                        <a:rPr sz="1000" b="0">
-                          <a:solidFill>
-                            <a:srgbClr val="334155"/>
-                          </a:solidFill>
-                          <a:latin typeface="Calibri"/>
-                        </a:rPr>
-                        <a:t>Worker exposure; compliance breach</a:t>
-                      </a:r>
-                    </a:p>
-                  </a:txBody>
-                  <a:tcPr/>
-                </a:tc>
-              </a:tr>
-              <a:tr h="423236">
-                <a:tc>
-                  <a:txBody>
-                    <a:bodyPr/>
-                    <a:lstStyle/>
-                    <a:p>
-                      <a:pPr algn="ctr"/>
-                      <a:r>
-                        <a:rPr sz="1000" b="0">
-                          <a:solidFill>
-                            <a:srgbClr val="334155"/>
-                          </a:solidFill>
-                          <a:latin typeface="Calibri"/>
-                        </a:rPr>
-                        <a:t>Solvency (KB)</a:t>
+                        <a:t>Clean surface</a:t>
                       </a:r>
                     </a:p>
                   </a:txBody>
@@ -4124,233 +4004,14 @@
                     <a:bodyPr/>
                     <a:lstStyle/>
                     <a:p>
-                      <a:pPr algn="l"/>
                       <a:r>
-                        <a:rPr sz="1000" b="0">
+                        <a:rPr sz="1200" b="0">
                           <a:solidFill>
                             <a:srgbClr val="334155"/>
                           </a:solidFill>
                           <a:latin typeface="Calibri"/>
                         </a:rPr>
-                        <a:t>~31 (controlled)</a:t>
-                      </a:r>
-                    </a:p>
-                  </a:txBody>
-                  <a:tcPr>
-                    <a:solidFill>
-                      <a:srgbClr val="F1F5F9"/>
-                    </a:solidFill>
-                  </a:tcPr>
-                </a:tc>
-                <a:tc>
-                  <a:txBody>
-                    <a:bodyPr/>
-                    <a:lstStyle/>
-                    <a:p>
-                      <a:pPr algn="l"/>
-                      <a:r>
-                        <a:rPr sz="1000" b="0">
-                          <a:solidFill>
-                            <a:srgbClr val="334155"/>
-                          </a:solidFill>
-                          <a:latin typeface="Calibri"/>
-                        </a:rPr>
-                        <a:t>Unpredictable</a:t>
-                      </a:r>
-                    </a:p>
-                  </a:txBody>
-                  <a:tcPr>
-                    <a:solidFill>
-                      <a:srgbClr val="F1F5F9"/>
-                    </a:solidFill>
-                  </a:tcPr>
-                </a:tc>
-                <a:tc>
-                  <a:txBody>
-                    <a:bodyPr/>
-                    <a:lstStyle/>
-                    <a:p>
-                      <a:pPr algn="l"/>
-                      <a:r>
-                        <a:rPr sz="1000" b="0">
-                          <a:solidFill>
-                            <a:srgbClr val="334155"/>
-                          </a:solidFill>
-                          <a:latin typeface="Calibri"/>
-                        </a:rPr>
-                        <a:t>Cleaning failure or part damage</a:t>
-                      </a:r>
-                    </a:p>
-                  </a:txBody>
-                  <a:tcPr>
-                    <a:solidFill>
-                      <a:srgbClr val="F1F5F9"/>
-                    </a:solidFill>
-                  </a:tcPr>
-                </a:tc>
-              </a:tr>
-              <a:tr h="423236">
-                <a:tc>
-                  <a:txBody>
-                    <a:bodyPr/>
-                    <a:lstStyle/>
-                    <a:p>
-                      <a:pPr algn="ctr"/>
-                      <a:r>
-                        <a:rPr sz="1000" b="0">
-                          <a:solidFill>
-                            <a:srgbClr val="334155"/>
-                          </a:solidFill>
-                          <a:latin typeface="Calibri"/>
-                        </a:rPr>
-                        <a:t>Viscosity / wetting</a:t>
-                      </a:r>
-                    </a:p>
-                  </a:txBody>
-                  <a:tcPr/>
-                </a:tc>
-                <a:tc>
-                  <a:txBody>
-                    <a:bodyPr/>
-                    <a:lstStyle/>
-                    <a:p>
-                      <a:pPr algn="l"/>
-                      <a:r>
-                        <a:rPr sz="1000" b="0">
-                          <a:solidFill>
-                            <a:srgbClr val="334155"/>
-                          </a:solidFill>
-                          <a:latin typeface="Calibri"/>
-                        </a:rPr>
-                        <a:t>~1.28 mm²/s</a:t>
-                      </a:r>
-                    </a:p>
-                  </a:txBody>
-                  <a:tcPr/>
-                </a:tc>
-                <a:tc>
-                  <a:txBody>
-                    <a:bodyPr/>
-                    <a:lstStyle/>
-                    <a:p>
-                      <a:pPr algn="l"/>
-                      <a:r>
-                        <a:rPr sz="1000" b="0">
-                          <a:solidFill>
-                            <a:srgbClr val="334155"/>
-                          </a:solidFill>
-                          <a:latin typeface="Calibri"/>
-                        </a:rPr>
-                        <a:t>Reduced</a:t>
-                      </a:r>
-                    </a:p>
-                  </a:txBody>
-                  <a:tcPr/>
-                </a:tc>
-                <a:tc>
-                  <a:txBody>
-                    <a:bodyPr/>
-                    <a:lstStyle/>
-                    <a:p>
-                      <a:pPr algn="l"/>
-                      <a:r>
-                        <a:rPr sz="1000" b="0">
-                          <a:solidFill>
-                            <a:srgbClr val="334155"/>
-                          </a:solidFill>
-                          <a:latin typeface="Calibri"/>
-                        </a:rPr>
-                        <a:t>Poor pore penetration in PM parts</a:t>
-                      </a:r>
-                    </a:p>
-                  </a:txBody>
-                  <a:tcPr/>
-                </a:tc>
-              </a:tr>
-              <a:tr h="423240">
-                <a:tc>
-                  <a:txBody>
-                    <a:bodyPr/>
-                    <a:lstStyle/>
-                    <a:p>
-                      <a:pPr algn="ctr"/>
-                      <a:r>
-                        <a:rPr sz="1000" b="0">
-                          <a:solidFill>
-                            <a:srgbClr val="334155"/>
-                          </a:solidFill>
-                          <a:latin typeface="Calibri"/>
-                        </a:rPr>
-                        <a:t>Downstream processes</a:t>
-                      </a:r>
-                    </a:p>
-                  </a:txBody>
-                  <a:tcPr>
-                    <a:solidFill>
-                      <a:srgbClr val="F1F5F9"/>
-                    </a:solidFill>
-                  </a:tcPr>
-                </a:tc>
-                <a:tc>
-                  <a:txBody>
-                    <a:bodyPr/>
-                    <a:lstStyle/>
-                    <a:p>
-                      <a:pPr algn="l"/>
-                      <a:r>
-                        <a:rPr sz="1000" b="0">
-                          <a:solidFill>
-                            <a:srgbClr val="334155"/>
-                          </a:solidFill>
-                          <a:latin typeface="Calibri"/>
-                        </a:rPr>
-                        <a:t>Clean, active surface</a:t>
-                      </a:r>
-                    </a:p>
-                  </a:txBody>
-                  <a:tcPr>
-                    <a:solidFill>
-                      <a:srgbClr val="F1F5F9"/>
-                    </a:solidFill>
-                  </a:tcPr>
-                </a:tc>
-                <a:tc>
-                  <a:txBody>
-                    <a:bodyPr/>
-                    <a:lstStyle/>
-                    <a:p>
-                      <a:pPr algn="l"/>
-                      <a:r>
-                        <a:rPr sz="1000" b="0">
-                          <a:solidFill>
-                            <a:srgbClr val="334155"/>
-                          </a:solidFill>
-                          <a:latin typeface="Calibri"/>
-                        </a:rPr>
-                        <a:t>Contaminated surface</a:t>
-                      </a:r>
-                    </a:p>
-                  </a:txBody>
-                  <a:tcPr>
-                    <a:solidFill>
-                      <a:srgbClr val="F1F5F9"/>
-                    </a:solidFill>
-                  </a:tcPr>
-                </a:tc>
-                <a:tc>
-                  <a:txBody>
-                    <a:bodyPr/>
-                    <a:lstStyle/>
-                    <a:p>
-                      <a:pPr algn="l"/>
-                      <a:r>
-                        <a:rPr sz="1000" b="0">
-                          <a:solidFill>
-                            <a:srgbClr val="334155"/>
-                          </a:solidFill>
-                          <a:latin typeface="Calibri"/>
-                        </a:rPr>
-                        <a:t>Plating/coating adhesion failure</a:t>
+                        <a:t>Coating peel</a:t>
                       </a:r>
                     </a:p>
                   </a:txBody>
@@ -4367,14 +4028,14 @@
       </p:graphicFrame>
       <p:sp>
         <p:nvSpPr>
-          <p:cNvPr id="5" name="TextBox 4"/>
+          <p:cNvPr id="6" name="TextBox 5"/>
           <p:cNvSpPr txBox="1"/>
           <p:nvPr/>
         </p:nvSpPr>
         <p:spPr>
           <a:xfrm>
-            <a:off x="457200" y="6446520"/>
-            <a:ext cx="8229600" cy="274320"/>
+            <a:off x="365760" y="6473952"/>
+            <a:ext cx="8412480" cy="256032"/>
           </a:xfrm>
           <a:prstGeom prst="rect">
             <a:avLst/>
@@ -4389,13 +4050,13 @@
           <a:p>
             <a:pPr algn="r"/>
             <a:r>
-              <a:rPr sz="900" b="0">
+              <a:rPr sz="1000" b="0">
                 <a:solidFill>
                   <a:srgbClr val="64748B"/>
                 </a:solidFill>
                 <a:latin typeface="Calibri"/>
               </a:rPr>
-              <a:t>Confidential — Risk Committee | Exxsol D40 Supply Chain Integrity</a:t>
+              <a:t>Confidential — Risk Committee | Exxsol D40</a:t>
             </a:r>
           </a:p>
         </p:txBody>
@@ -4427,7 +4088,7 @@
         <p:spPr>
           <a:xfrm>
             <a:off x="0" y="0"/>
-            <a:ext cx="9144000" cy="1051560"/>
+            <a:ext cx="9144000" cy="1097280"/>
           </a:xfrm>
           <a:prstGeom prst="rect">
             <a:avLst/>
@@ -4469,8 +4130,8 @@
         </p:nvSpPr>
         <p:spPr>
           <a:xfrm>
-            <a:off x="502920" y="201168"/>
-            <a:ext cx="8046720" cy="502920"/>
+            <a:off x="411480" y="164592"/>
+            <a:ext cx="8321040" cy="566928"/>
           </a:xfrm>
           <a:prstGeom prst="rect">
             <a:avLst/>
@@ -4484,27 +4145,51 @@
           <a:lstStyle/>
           <a:p>
             <a:r>
-              <a:rPr sz="2800" b="1">
+              <a:rPr sz="3400" b="1">
                 <a:solidFill>
                   <a:srgbClr val="FFFFFF"/>
                 </a:solidFill>
                 <a:latin typeface="Calibri"/>
               </a:rPr>
-              <a:t>Enterprise Risk Exposure</a:t>
-            </a:r>
-          </a:p>
-        </p:txBody>
-      </p:sp>
-      <p:sp>
-        <p:nvSpPr>
-          <p:cNvPr id="4" name="Rounded Rectangle 3"/>
+              <a:t>Enterprise Risk</a:t>
+            </a:r>
+          </a:p>
+        </p:txBody>
+      </p:sp>
+      <p:pic>
+        <p:nvPicPr>
+          <p:cNvPr id="4" name="Picture 3" descr="12_enterprise.png"/>
+          <p:cNvPicPr>
+            <a:picLocks noChangeAspect="1"/>
+          </p:cNvPicPr>
+          <p:nvPr/>
+        </p:nvPicPr>
+        <p:blipFill>
+          <a:blip r:embed="rId2"/>
+          <a:stretch>
+            <a:fillRect/>
+          </a:stretch>
+        </p:blipFill>
+        <p:spPr>
+          <a:xfrm>
+            <a:off x="5806440" y="1234440"/>
+            <a:ext cx="3063240" cy="4892040"/>
+          </a:xfrm>
+          <a:prstGeom prst="rect">
+            <a:avLst/>
+          </a:prstGeom>
+        </p:spPr>
+      </p:pic>
+      <p:sp>
+        <p:nvSpPr>
+          <p:cNvPr id="5" name="Rounded Rectangle 4"/>
           <p:cNvSpPr/>
           <p:nvPr/>
         </p:nvSpPr>
         <p:spPr>
           <a:xfrm>
-            <a:off x="548640" y="1371600"/>
-            <a:ext cx="8046720" cy="868680"/>
+            <a:off x="411480" y="1325880"/>
+            <a:ext cx="5166360" cy="960120"/>
           </a:xfrm>
           <a:prstGeom prst="roundRect">
             <a:avLst/>
@@ -4512,7 +4197,7 @@
           <a:solidFill>
             <a:srgbClr val="F1F5F9"/>
           </a:solidFill>
-          <a:ln w="25400">
+          <a:ln w="38100">
             <a:solidFill>
               <a:srgbClr val="B91C1C"/>
             </a:solidFill>
@@ -4533,41 +4218,41 @@
           </a:fontRef>
         </p:style>
         <p:txBody>
-          <a:bodyPr rtlCol="0" anchor="ctr" wrap="square" lIns="137160"/>
+          <a:bodyPr rtlCol="0" anchor="ctr"/>
           <a:lstStyle/>
           <a:p>
             <a:pPr algn="ctr"/>
             <a:r>
-              <a:rPr sz="1400" b="1">
+              <a:rPr sz="2200" b="1">
                 <a:solidFill>
                   <a:srgbClr val="B91C1C"/>
                 </a:solidFill>
                 <a:latin typeface="Calibri"/>
               </a:rPr>
-              <a:t>Safety &amp; Regulatory: </a:t>
-            </a:r>
-            <a:r>
-              <a:rPr sz="1300" b="0">
+              <a:t>Safety: </a:t>
+            </a:r>
+            <a:r>
+              <a:rPr sz="2000" b="0">
                 <a:solidFill>
                   <a:srgbClr val="334155"/>
                 </a:solidFill>
                 <a:latin typeface="Calibri"/>
               </a:rPr>
-              <a:t>Undeclared flammable components (methanol) can violate ATEX/fire codes, invalidate SDS, and increase incident severity.</a:t>
-            </a:r>
-          </a:p>
-        </p:txBody>
-      </p:sp>
-      <p:sp>
-        <p:nvSpPr>
-          <p:cNvPr id="5" name="Rounded Rectangle 4"/>
+              <a:t>Fire &amp; SDS breach</a:t>
+            </a:r>
+          </a:p>
+        </p:txBody>
+      </p:sp>
+      <p:sp>
+        <p:nvSpPr>
+          <p:cNvPr id="6" name="Rounded Rectangle 5"/>
           <p:cNvSpPr/>
           <p:nvPr/>
         </p:nvSpPr>
         <p:spPr>
           <a:xfrm>
-            <a:off x="548640" y="2331720"/>
-            <a:ext cx="8046720" cy="868680"/>
+            <a:off x="411480" y="2423160"/>
+            <a:ext cx="5166360" cy="960120"/>
           </a:xfrm>
           <a:prstGeom prst="roundRect">
             <a:avLst/>
@@ -4575,7 +4260,7 @@
           <a:solidFill>
             <a:srgbClr val="F1F5F9"/>
           </a:solidFill>
-          <a:ln w="25400">
+          <a:ln w="38100">
             <a:solidFill>
               <a:srgbClr val="B45309"/>
             </a:solidFill>
@@ -4596,41 +4281,41 @@
           </a:fontRef>
         </p:style>
         <p:txBody>
-          <a:bodyPr rtlCol="0" anchor="ctr" wrap="square" lIns="137160"/>
+          <a:bodyPr rtlCol="0" anchor="ctr"/>
           <a:lstStyle/>
           <a:p>
             <a:pPr algn="ctr"/>
             <a:r>
-              <a:rPr sz="1400" b="1">
+              <a:rPr sz="2200" b="1">
                 <a:solidFill>
                   <a:srgbClr val="B45309"/>
                 </a:solidFill>
                 <a:latin typeface="Calibri"/>
               </a:rPr>
-              <a:t>Product Quality: </a:t>
-            </a:r>
-            <a:r>
-              <a:rPr sz="1300" b="0">
+              <a:t>Quality: </a:t>
+            </a:r>
+            <a:r>
+              <a:rPr sz="2000" b="0">
                 <a:solidFill>
                   <a:srgbClr val="334155"/>
                 </a:solidFill>
                 <a:latin typeface="Calibri"/>
               </a:rPr>
-              <a:t>Residue in sintered pores → plating peel-off, coating voids, customer complaints, and warranty claims.</a:t>
-            </a:r>
-          </a:p>
-        </p:txBody>
-      </p:sp>
-      <p:sp>
-        <p:nvSpPr>
-          <p:cNvPr id="6" name="Rounded Rectangle 5"/>
+              <a:t>Plating &amp; coating fail</a:t>
+            </a:r>
+          </a:p>
+        </p:txBody>
+      </p:sp>
+      <p:sp>
+        <p:nvSpPr>
+          <p:cNvPr id="7" name="Rounded Rectangle 6"/>
           <p:cNvSpPr/>
           <p:nvPr/>
         </p:nvSpPr>
         <p:spPr>
           <a:xfrm>
-            <a:off x="548640" y="3291839"/>
-            <a:ext cx="8046720" cy="868680"/>
+            <a:off x="411480" y="3520439"/>
+            <a:ext cx="5166360" cy="960120"/>
           </a:xfrm>
           <a:prstGeom prst="roundRect">
             <a:avLst/>
@@ -4638,7 +4323,7 @@
           <a:solidFill>
             <a:srgbClr val="F1F5F9"/>
           </a:solidFill>
-          <a:ln w="25400">
+          <a:ln w="38100">
             <a:solidFill>
               <a:srgbClr val="B45309"/>
             </a:solidFill>
@@ -4659,41 +4344,41 @@
           </a:fontRef>
         </p:style>
         <p:txBody>
-          <a:bodyPr rtlCol="0" anchor="ctr" wrap="square" lIns="137160"/>
+          <a:bodyPr rtlCol="0" anchor="ctr"/>
           <a:lstStyle/>
           <a:p>
             <a:pPr algn="ctr"/>
             <a:r>
-              <a:rPr sz="1400" b="1">
+              <a:rPr sz="2200" b="1">
                 <a:solidFill>
                   <a:srgbClr val="B45309"/>
                 </a:solidFill>
                 <a:latin typeface="Calibri"/>
               </a:rPr>
-              <a:t>Operational: </a:t>
-            </a:r>
-            <a:r>
-              <a:rPr sz="1300" b="0">
+              <a:t>Operations: </a:t>
+            </a:r>
+            <a:r>
+              <a:rPr sz="2000" b="0">
                 <a:solidFill>
                   <a:srgbClr val="334155"/>
                 </a:solidFill>
                 <a:latin typeface="Calibri"/>
               </a:rPr>
-              <a:t>Unstable distillation → variable cycle times, increased scrap, and unplanned line stoppages.</a:t>
-            </a:r>
-          </a:p>
-        </p:txBody>
-      </p:sp>
-      <p:sp>
-        <p:nvSpPr>
-          <p:cNvPr id="7" name="Rounded Rectangle 6"/>
+              <a:t>Scrap &amp; downtime</a:t>
+            </a:r>
+          </a:p>
+        </p:txBody>
+      </p:sp>
+      <p:sp>
+        <p:nvSpPr>
+          <p:cNvPr id="8" name="Rounded Rectangle 7"/>
           <p:cNvSpPr/>
           <p:nvPr/>
         </p:nvSpPr>
         <p:spPr>
           <a:xfrm>
-            <a:off x="548640" y="4251959"/>
-            <a:ext cx="8046720" cy="868680"/>
+            <a:off x="411480" y="4617720"/>
+            <a:ext cx="5166360" cy="960120"/>
           </a:xfrm>
           <a:prstGeom prst="roundRect">
             <a:avLst/>
@@ -4701,7 +4386,7 @@
           <a:solidFill>
             <a:srgbClr val="F1F5F9"/>
           </a:solidFill>
-          <a:ln w="25400">
+          <a:ln w="38100">
             <a:solidFill>
               <a:srgbClr val="002B5C"/>
             </a:solidFill>
@@ -4722,90 +4407,27 @@
           </a:fontRef>
         </p:style>
         <p:txBody>
-          <a:bodyPr rtlCol="0" anchor="ctr" wrap="square" lIns="137160"/>
+          <a:bodyPr rtlCol="0" anchor="ctr"/>
           <a:lstStyle/>
           <a:p>
             <a:pPr algn="ctr"/>
             <a:r>
-              <a:rPr sz="1400" b="1">
+              <a:rPr sz="2200" b="1">
                 <a:solidFill>
                   <a:srgbClr val="002B5C"/>
                 </a:solidFill>
                 <a:latin typeface="Calibri"/>
               </a:rPr>
-              <a:t>Financial: </a:t>
-            </a:r>
-            <a:r>
-              <a:rPr sz="1300" b="0">
+              <a:t>Reputation: </a:t>
+            </a:r>
+            <a:r>
+              <a:rPr sz="2000" b="0">
                 <a:solidFill>
                   <a:srgbClr val="334155"/>
                 </a:solidFill>
                 <a:latin typeface="Calibri"/>
               </a:rPr>
-              <a:t>False economy: savings on solvent cost vs. scrap, rework, downtime, and liability exposure.</a:t>
-            </a:r>
-          </a:p>
-        </p:txBody>
-      </p:sp>
-      <p:sp>
-        <p:nvSpPr>
-          <p:cNvPr id="8" name="Rounded Rectangle 7"/>
-          <p:cNvSpPr/>
-          <p:nvPr/>
-        </p:nvSpPr>
-        <p:spPr>
-          <a:xfrm>
-            <a:off x="548640" y="5212079"/>
-            <a:ext cx="8046720" cy="868680"/>
-          </a:xfrm>
-          <a:prstGeom prst="roundRect">
-            <a:avLst/>
-          </a:prstGeom>
-          <a:solidFill>
-            <a:srgbClr val="F1F5F9"/>
-          </a:solidFill>
-          <a:ln w="25400">
-            <a:solidFill>
-              <a:srgbClr val="002B5C"/>
-            </a:solidFill>
-          </a:ln>
-        </p:spPr>
-        <p:style>
-          <a:lnRef idx="1">
-            <a:schemeClr val="accent1"/>
-          </a:lnRef>
-          <a:fillRef idx="3">
-            <a:schemeClr val="accent1"/>
-          </a:fillRef>
-          <a:effectRef idx="2">
-            <a:schemeClr val="accent1"/>
-          </a:effectRef>
-          <a:fontRef idx="minor">
-            <a:schemeClr val="lt1"/>
-          </a:fontRef>
-        </p:style>
-        <p:txBody>
-          <a:bodyPr rtlCol="0" anchor="ctr" wrap="square" lIns="137160"/>
-          <a:lstStyle/>
-          <a:p>
-            <a:pPr algn="ctr"/>
-            <a:r>
-              <a:rPr sz="1400" b="1">
-                <a:solidFill>
-                  <a:srgbClr val="002B5C"/>
-                </a:solidFill>
-                <a:latin typeface="Calibri"/>
-              </a:rPr>
-              <a:t>Reputational: </a:t>
-            </a:r>
-            <a:r>
-              <a:rPr sz="1300" b="0">
-                <a:solidFill>
-                  <a:srgbClr val="334155"/>
-                </a:solidFill>
-                <a:latin typeface="Calibri"/>
-              </a:rPr>
-              <a:t>Supply chain integrity failure with automotive/industrial customers relying on PPAP-level material control.</a:t>
+              <a:t>Customer stop-ship</a:t>
             </a:r>
           </a:p>
         </p:txBody>
@@ -4818,8 +4440,8 @@
         </p:nvSpPr>
         <p:spPr>
           <a:xfrm>
-            <a:off x="457200" y="6446520"/>
-            <a:ext cx="8229600" cy="274320"/>
+            <a:off x="365760" y="6473952"/>
+            <a:ext cx="8412480" cy="256032"/>
           </a:xfrm>
           <a:prstGeom prst="rect">
             <a:avLst/>
@@ -4834,13 +4456,13 @@
           <a:p>
             <a:pPr algn="r"/>
             <a:r>
-              <a:rPr sz="900" b="0">
+              <a:rPr sz="1000" b="0">
                 <a:solidFill>
                   <a:srgbClr val="64748B"/>
                 </a:solidFill>
                 <a:latin typeface="Calibri"/>
               </a:rPr>
-              <a:t>Confidential — Risk Committee | Exxsol D40 Supply Chain Integrity</a:t>
+              <a:t>Confidential — Risk Committee | Exxsol D40</a:t>
             </a:r>
           </a:p>
         </p:txBody>
@@ -4872,7 +4494,7 @@
         <p:spPr>
           <a:xfrm>
             <a:off x="0" y="0"/>
-            <a:ext cx="9144000" cy="1051560"/>
+            <a:ext cx="9144000" cy="1097280"/>
           </a:xfrm>
           <a:prstGeom prst="rect">
             <a:avLst/>
@@ -4914,8 +4536,8 @@
         </p:nvSpPr>
         <p:spPr>
           <a:xfrm>
-            <a:off x="502920" y="201168"/>
-            <a:ext cx="8046720" cy="502920"/>
+            <a:off x="411480" y="164592"/>
+            <a:ext cx="8321040" cy="566928"/>
           </a:xfrm>
           <a:prstGeom prst="rect">
             <a:avLst/>
@@ -4929,13 +4551,13 @@
           <a:lstStyle/>
           <a:p>
             <a:r>
-              <a:rPr sz="2800" b="1">
+              <a:rPr sz="3400" b="1">
                 <a:solidFill>
                   <a:srgbClr val="FFFFFF"/>
                 </a:solidFill>
                 <a:latin typeface="Calibri"/>
               </a:rPr>
-              <a:t>Distributor Quality Control Framework</a:t>
+              <a:t>Distributor QC</a:t>
             </a:r>
           </a:p>
         </p:txBody>
@@ -4948,8 +4570,66 @@
         </p:nvSpPr>
         <p:spPr>
           <a:xfrm>
-            <a:off x="594360" y="1234440"/>
-            <a:ext cx="7955279" cy="5029200"/>
+            <a:off x="411480" y="658368"/>
+            <a:ext cx="8321040" cy="347472"/>
+          </a:xfrm>
+          <a:prstGeom prst="rect">
+            <a:avLst/>
+          </a:prstGeom>
+          <a:noFill/>
+        </p:spPr>
+        <p:txBody>
+          <a:bodyPr wrap="none">
+            <a:spAutoFit/>
+          </a:bodyPr>
+          <a:lstStyle/>
+          <a:p>
+            <a:r>
+              <a:rPr sz="1800" b="0">
+                <a:solidFill>
+                  <a:srgbClr val="CBE5F0"/>
+                </a:solidFill>
+                <a:latin typeface="Calibri"/>
+              </a:rPr>
+              <a:t>Three Lines of Defense</a:t>
+            </a:r>
+          </a:p>
+        </p:txBody>
+      </p:sp>
+      <p:pic>
+        <p:nvPicPr>
+          <p:cNvPr id="5" name="Picture 4" descr="13_qc.png"/>
+          <p:cNvPicPr>
+            <a:picLocks noChangeAspect="1"/>
+          </p:cNvPicPr>
+          <p:nvPr/>
+        </p:nvPicPr>
+        <p:blipFill>
+          <a:blip r:embed="rId2"/>
+          <a:stretch>
+            <a:fillRect/>
+          </a:stretch>
+        </p:blipFill>
+        <p:spPr>
+          <a:xfrm>
+            <a:off x="5806440" y="1234440"/>
+            <a:ext cx="3063240" cy="4892040"/>
+          </a:xfrm>
+          <a:prstGeom prst="rect">
+            <a:avLst/>
+          </a:prstGeom>
+        </p:spPr>
+      </p:pic>
+      <p:sp>
+        <p:nvSpPr>
+          <p:cNvPr id="6" name="TextBox 5"/>
+          <p:cNvSpPr txBox="1"/>
+          <p:nvPr/>
+        </p:nvSpPr>
+        <p:spPr>
+          <a:xfrm>
+            <a:off x="411480" y="1234440"/>
+            <a:ext cx="5166360" cy="5120640"/>
           </a:xfrm>
           <a:prstGeom prst="rect">
             <a:avLst/>
@@ -4964,224 +4644,91 @@
           <a:p>
             <a:pPr>
               <a:spcBef>
-                <a:spcPts val="200"/>
+                <a:spcPts val="400"/>
               </a:spcBef>
               <a:spcAft>
-                <a:spcPts val="822"/>
+                <a:spcPts val="1400"/>
               </a:spcAft>
             </a:pPr>
             <a:r>
-              <a:rPr sz="1300" b="0">
+              <a:rPr sz="2400" b="0">
                 <a:solidFill>
                   <a:srgbClr val="334155"/>
                 </a:solidFill>
                 <a:latin typeface="Calibri"/>
               </a:rPr>
-              <a:t>Tier 1 — Authorized sourcing only:</a:t>
-            </a:r>
-          </a:p>
-          <a:p>
-            <a:pPr lvl="1">
+              <a:t>• Buy only authorized distributors</a:t>
+            </a:r>
+          </a:p>
+          <a:p>
+            <a:pPr>
               <a:spcBef>
-                <a:spcPts val="200"/>
+                <a:spcPts val="400"/>
               </a:spcBef>
               <a:spcAft>
-                <a:spcPts val="822"/>
+                <a:spcPts val="1400"/>
               </a:spcAft>
             </a:pPr>
             <a:r>
-              <a:rPr sz="1100" b="0">
+              <a:rPr sz="2400" b="0">
                 <a:solidFill>
                   <a:srgbClr val="334155"/>
                 </a:solidFill>
                 <a:latin typeface="Calibri"/>
               </a:rPr>
-              <a:t>Purchase exclusively through ExxonMobil-verified authorized distributors.</a:t>
-            </a:r>
-          </a:p>
-          <a:p>
-            <a:pPr lvl="1">
+              <a:t>• Batch CoA before receipt</a:t>
+            </a:r>
+          </a:p>
+          <a:p>
+            <a:pPr>
               <a:spcBef>
-                <a:spcPts val="200"/>
+                <a:spcPts val="400"/>
               </a:spcBef>
               <a:spcAft>
-                <a:spcPts val="822"/>
+                <a:spcPts val="1400"/>
               </a:spcAft>
             </a:pPr>
             <a:r>
-              <a:rPr sz="1100" b="0">
+              <a:rPr sz="2400" b="0">
                 <a:solidFill>
                   <a:srgbClr val="334155"/>
                 </a:solidFill>
                 <a:latin typeface="Calibri"/>
               </a:rPr>
-              <a:t>Maintain current authorization letters and annual re-confirmation with manufacturer.</a:t>
-            </a:r>
-          </a:p>
-          <a:p>
-            <a:pPr lvl="1">
+              <a:t>• Check IBP, flash, aromatics</a:t>
+            </a:r>
+          </a:p>
+          <a:p>
+            <a:pPr>
               <a:spcBef>
-                <a:spcPts val="200"/>
+                <a:spcPts val="400"/>
               </a:spcBef>
               <a:spcAft>
-                <a:spcPts val="822"/>
+                <a:spcPts val="1400"/>
               </a:spcAft>
             </a:pPr>
             <a:r>
-              <a:rPr sz="1100" b="0">
+              <a:rPr sz="2400" b="0">
                 <a:solidFill>
                   <a:srgbClr val="334155"/>
                 </a:solidFill>
                 <a:latin typeface="Calibri"/>
               </a:rPr>
-              <a:t>Reject “look-alike” products: generic Isoparaffin D40 ≠ Exxsol D40.</a:t>
-            </a:r>
-          </a:p>
-          <a:p>
-            <a:pPr>
-              <a:spcBef>
-                <a:spcPts val="200"/>
-              </a:spcBef>
-              <a:spcAft>
-                <a:spcPts val="822"/>
-              </a:spcAft>
-            </a:pPr>
-            <a:r>
-              <a:rPr sz="1300" b="0">
-                <a:solidFill>
-                  <a:srgbClr val="334155"/>
-                </a:solidFill>
-                <a:latin typeface="Calibri"/>
-              </a:rPr>
-              <a:t>Tier 2 — Batch documentation:</a:t>
-            </a:r>
-          </a:p>
-          <a:p>
-            <a:pPr lvl="1">
-              <a:spcBef>
-                <a:spcPts val="200"/>
-              </a:spcBef>
-              <a:spcAft>
-                <a:spcPts val="822"/>
-              </a:spcAft>
-            </a:pPr>
-            <a:r>
-              <a:rPr sz="1100" b="0">
-                <a:solidFill>
-                  <a:srgbClr val="334155"/>
-                </a:solidFill>
-                <a:latin typeface="Calibri"/>
-              </a:rPr>
-              <a:t>Mandatory batch-specific Certificate of Analysis (CoA) before goods receipt.</a:t>
-            </a:r>
-          </a:p>
-          <a:p>
-            <a:pPr lvl="1">
-              <a:spcBef>
-                <a:spcPts val="200"/>
-              </a:spcBef>
-              <a:spcAft>
-                <a:spcPts val="822"/>
-              </a:spcAft>
-            </a:pPr>
-            <a:r>
-              <a:rPr sz="1100" b="0">
-                <a:solidFill>
-                  <a:srgbClr val="334155"/>
-                </a:solidFill>
-                <a:latin typeface="Calibri"/>
-              </a:rPr>
-              <a:t>CoA must confirm: distillation IBP/DP, flash point, density, aromatic content, and product identity.</a:t>
-            </a:r>
-          </a:p>
-          <a:p>
-            <a:pPr lvl="1">
-              <a:spcBef>
-                <a:spcPts val="200"/>
-              </a:spcBef>
-              <a:spcAft>
-                <a:spcPts val="822"/>
-              </a:spcAft>
-            </a:pPr>
-            <a:r>
-              <a:rPr sz="1100" b="0">
-                <a:solidFill>
-                  <a:srgbClr val="334155"/>
-                </a:solidFill>
-                <a:latin typeface="Calibri"/>
-              </a:rPr>
-              <a:t>SDS revision and product code must match purchase order and approved supplier record.</a:t>
-            </a:r>
-          </a:p>
-          <a:p>
-            <a:pPr>
-              <a:spcBef>
-                <a:spcPts val="200"/>
-              </a:spcBef>
-              <a:spcAft>
-                <a:spcPts val="822"/>
-              </a:spcAft>
-            </a:pPr>
-            <a:r>
-              <a:rPr sz="1300" b="0">
-                <a:solidFill>
-                  <a:srgbClr val="334155"/>
-                </a:solidFill>
-                <a:latin typeface="Calibri"/>
-              </a:rPr>
-              <a:t>Tier 3 — Physical integrity:</a:t>
-            </a:r>
-          </a:p>
-          <a:p>
-            <a:pPr lvl="1">
-              <a:spcBef>
-                <a:spcPts val="200"/>
-              </a:spcBef>
-              <a:spcAft>
-                <a:spcPts val="822"/>
-              </a:spcAft>
-            </a:pPr>
-            <a:r>
-              <a:rPr sz="1100" b="0">
-                <a:solidFill>
-                  <a:srgbClr val="334155"/>
-                </a:solidFill>
-                <a:latin typeface="Calibri"/>
-              </a:rPr>
-              <a:t>Tamper-evident seals; drum condition inspection; label hologram/batch cross-check where available.</a:t>
-            </a:r>
-          </a:p>
-          <a:p>
-            <a:pPr lvl="1">
-              <a:spcBef>
-                <a:spcPts val="200"/>
-              </a:spcBef>
-              <a:spcAft>
-                <a:spcPts val="822"/>
-              </a:spcAft>
-            </a:pPr>
-            <a:r>
-              <a:rPr sz="1100" b="0">
-                <a:solidFill>
-                  <a:srgbClr val="334155"/>
-                </a:solidFill>
-                <a:latin typeface="Calibri"/>
-              </a:rPr>
-              <a:t>Photographic evidence at receipt for critical production lines.</a:t>
-            </a:r>
-          </a:p>
-        </p:txBody>
-      </p:sp>
-      <p:sp>
-        <p:nvSpPr>
-          <p:cNvPr id="5" name="TextBox 4"/>
+              <a:t>• Inspect seals &amp; drum labels</a:t>
+            </a:r>
+          </a:p>
+        </p:txBody>
+      </p:sp>
+      <p:sp>
+        <p:nvSpPr>
+          <p:cNvPr id="7" name="TextBox 6"/>
           <p:cNvSpPr txBox="1"/>
           <p:nvPr/>
         </p:nvSpPr>
         <p:spPr>
           <a:xfrm>
-            <a:off x="457200" y="6446520"/>
-            <a:ext cx="8229600" cy="274320"/>
+            <a:off x="365760" y="6473952"/>
+            <a:ext cx="8412480" cy="256032"/>
           </a:xfrm>
           <a:prstGeom prst="rect">
             <a:avLst/>
@@ -5196,13 +4743,13 @@
           <a:p>
             <a:pPr algn="r"/>
             <a:r>
-              <a:rPr sz="900" b="0">
+              <a:rPr sz="1000" b="0">
                 <a:solidFill>
                   <a:srgbClr val="64748B"/>
                 </a:solidFill>
                 <a:latin typeface="Calibri"/>
               </a:rPr>
-              <a:t>Confidential — Risk Committee | Exxsol D40 Supply Chain Integrity</a:t>
+              <a:t>Confidential — Risk Committee | Exxsol D40</a:t>
             </a:r>
           </a:p>
         </p:txBody>
@@ -5234,7 +4781,7 @@
         <p:spPr>
           <a:xfrm>
             <a:off x="0" y="0"/>
-            <a:ext cx="9144000" cy="1051560"/>
+            <a:ext cx="9144000" cy="1097280"/>
           </a:xfrm>
           <a:prstGeom prst="rect">
             <a:avLst/>
@@ -5276,8 +4823,8 @@
         </p:nvSpPr>
         <p:spPr>
           <a:xfrm>
-            <a:off x="502920" y="201168"/>
-            <a:ext cx="8046720" cy="502920"/>
+            <a:off x="411480" y="164592"/>
+            <a:ext cx="8321040" cy="566928"/>
           </a:xfrm>
           <a:prstGeom prst="rect">
             <a:avLst/>
@@ -5291,13 +4838,13 @@
           <a:lstStyle/>
           <a:p>
             <a:r>
-              <a:rPr sz="2800" b="1">
+              <a:rPr sz="3400" b="1">
                 <a:solidFill>
                   <a:srgbClr val="FFFFFF"/>
                 </a:solidFill>
                 <a:latin typeface="Calibri"/>
               </a:rPr>
-              <a:t>Traceability &amp; Chain of Custody</a:t>
+              <a:t>Traceability</a:t>
             </a:r>
           </a:p>
         </p:txBody>
@@ -5310,8 +4857,66 @@
         </p:nvSpPr>
         <p:spPr>
           <a:xfrm>
-            <a:off x="594360" y="1280160"/>
-            <a:ext cx="7955279" cy="5029200"/>
+            <a:off x="411480" y="658368"/>
+            <a:ext cx="8321040" cy="347472"/>
+          </a:xfrm>
+          <a:prstGeom prst="rect">
+            <a:avLst/>
+          </a:prstGeom>
+          <a:noFill/>
+        </p:spPr>
+        <p:txBody>
+          <a:bodyPr wrap="none">
+            <a:spAutoFit/>
+          </a:bodyPr>
+          <a:lstStyle/>
+          <a:p>
+            <a:r>
+              <a:rPr sz="1800" b="0">
+                <a:solidFill>
+                  <a:srgbClr val="CBE5F0"/>
+                </a:solidFill>
+                <a:latin typeface="Calibri"/>
+              </a:rPr>
+              <a:t>Chain of Custody</a:t>
+            </a:r>
+          </a:p>
+        </p:txBody>
+      </p:sp>
+      <p:pic>
+        <p:nvPicPr>
+          <p:cNvPr id="5" name="Picture 4" descr="14_trace.png"/>
+          <p:cNvPicPr>
+            <a:picLocks noChangeAspect="1"/>
+          </p:cNvPicPr>
+          <p:nvPr/>
+        </p:nvPicPr>
+        <p:blipFill>
+          <a:blip r:embed="rId2"/>
+          <a:stretch>
+            <a:fillRect/>
+          </a:stretch>
+        </p:blipFill>
+        <p:spPr>
+          <a:xfrm>
+            <a:off x="5806440" y="1234440"/>
+            <a:ext cx="3063240" cy="4892040"/>
+          </a:xfrm>
+          <a:prstGeom prst="rect">
+            <a:avLst/>
+          </a:prstGeom>
+        </p:spPr>
+      </p:pic>
+      <p:sp>
+        <p:nvSpPr>
+          <p:cNvPr id="6" name="TextBox 5"/>
+          <p:cNvSpPr txBox="1"/>
+          <p:nvPr/>
+        </p:nvSpPr>
+        <p:spPr>
+          <a:xfrm>
+            <a:off x="411480" y="1234440"/>
+            <a:ext cx="5166360" cy="5120640"/>
           </a:xfrm>
           <a:prstGeom prst="rect">
             <a:avLst/>
@@ -5326,240 +4931,91 @@
           <a:p>
             <a:pPr>
               <a:spcBef>
-                <a:spcPts val="200"/>
+                <a:spcPts val="400"/>
               </a:spcBef>
               <a:spcAft>
-                <a:spcPts val="885"/>
+                <a:spcPts val="1400"/>
               </a:spcAft>
             </a:pPr>
             <a:r>
-              <a:rPr sz="1400" b="0">
+              <a:rPr sz="2400" b="0">
                 <a:solidFill>
                   <a:srgbClr val="334155"/>
                 </a:solidFill>
                 <a:latin typeface="Calibri"/>
               </a:rPr>
-              <a:t>End-to-end lot tracking: manufacturer batch → distributor invoice → inbound GRN → storage location → dispensing to line.</a:t>
+              <a:t>• Track lot: maker → line → part</a:t>
             </a:r>
           </a:p>
           <a:p>
             <a:pPr>
               <a:spcBef>
-                <a:spcPts val="200"/>
+                <a:spcPts val="400"/>
               </a:spcBef>
               <a:spcAft>
-                <a:spcPts val="885"/>
+                <a:spcPts val="1400"/>
               </a:spcAft>
             </a:pPr>
             <a:r>
-              <a:rPr sz="1400" b="0">
+              <a:rPr sz="2400" b="0">
                 <a:solidFill>
                   <a:srgbClr val="334155"/>
                 </a:solidFill>
                 <a:latin typeface="Calibri"/>
               </a:rPr>
-              <a:t>System requirements:</a:t>
-            </a:r>
-          </a:p>
-          <a:p>
-            <a:pPr lvl="1">
+              <a:t>• Barcode drum to CoA in ERP</a:t>
+            </a:r>
+          </a:p>
+          <a:p>
+            <a:pPr>
               <a:spcBef>
-                <a:spcPts val="200"/>
+                <a:spcPts val="400"/>
               </a:spcBef>
               <a:spcAft>
-                <a:spcPts val="885"/>
+                <a:spcPts val="1400"/>
               </a:spcAft>
             </a:pPr>
             <a:r>
-              <a:rPr sz="1200" b="0">
+              <a:rPr sz="2400" b="0">
                 <a:solidFill>
                   <a:srgbClr val="334155"/>
                 </a:solidFill>
                 <a:latin typeface="Calibri"/>
               </a:rPr>
-              <a:t>ERP/material master locked to approved supplier part numbers only.</a:t>
-            </a:r>
-          </a:p>
-          <a:p>
-            <a:pPr lvl="1">
+              <a:t>• Annual distributor audit</a:t>
+            </a:r>
+          </a:p>
+          <a:p>
+            <a:pPr>
               <a:spcBef>
-                <a:spcPts val="200"/>
+                <a:spcPts val="400"/>
               </a:spcBef>
               <a:spcAft>
-                <a:spcPts val="885"/>
+                <a:spcPts val="1400"/>
               </a:spcAft>
             </a:pPr>
             <a:r>
-              <a:rPr sz="1200" b="0">
+              <a:rPr sz="2400" b="0">
                 <a:solidFill>
                   <a:srgbClr val="334155"/>
                 </a:solidFill>
                 <a:latin typeface="Calibri"/>
               </a:rPr>
-              <a:t>Barcode/QR on drum linked to CoA PDF and receiving inspection record.</a:t>
-            </a:r>
-          </a:p>
-          <a:p>
-            <a:pPr lvl="1">
-              <a:spcBef>
-                <a:spcPts val="200"/>
-              </a:spcBef>
-              <a:spcAft>
-                <a:spcPts val="885"/>
-              </a:spcAft>
-            </a:pPr>
-            <a:r>
-              <a:rPr sz="1200" b="0">
-                <a:solidFill>
-                  <a:srgbClr val="334155"/>
-                </a:solidFill>
-                <a:latin typeface="Calibri"/>
-              </a:rPr>
-              <a:t>FIFO/FEFO dispensing with lot genealogy traceable to finished part serial/batch.</a:t>
-            </a:r>
-          </a:p>
-          <a:p>
-            <a:pPr>
-              <a:spcBef>
-                <a:spcPts val="200"/>
-              </a:spcBef>
-              <a:spcAft>
-                <a:spcPts val="885"/>
-              </a:spcAft>
-            </a:pPr>
-            <a:r>
-              <a:rPr sz="1400" b="0">
-                <a:solidFill>
-                  <a:srgbClr val="334155"/>
-                </a:solidFill>
-                <a:latin typeface="Calibri"/>
-              </a:rPr>
-              <a:t>Supplier audit program:</a:t>
-            </a:r>
-          </a:p>
-          <a:p>
-            <a:pPr lvl="1">
-              <a:spcBef>
-                <a:spcPts val="200"/>
-              </a:spcBef>
-              <a:spcAft>
-                <a:spcPts val="885"/>
-              </a:spcAft>
-            </a:pPr>
-            <a:r>
-              <a:rPr sz="1200" b="0">
-                <a:solidFill>
-                  <a:srgbClr val="334155"/>
-                </a:solidFill>
-                <a:latin typeface="Calibri"/>
-              </a:rPr>
-              <a:t>Annual distributor quality audit (storage, handling, sub-distribution controls).</a:t>
-            </a:r>
-          </a:p>
-          <a:p>
-            <a:pPr lvl="1">
-              <a:spcBef>
-                <a:spcPts val="200"/>
-              </a:spcBef>
-              <a:spcAft>
-                <a:spcPts val="885"/>
-              </a:spcAft>
-            </a:pPr>
-            <a:r>
-              <a:rPr sz="1200" b="0">
-                <a:solidFill>
-                  <a:srgbClr val="334155"/>
-                </a:solidFill>
-                <a:latin typeface="Calibri"/>
-              </a:rPr>
-              <a:t>Right-to-audit clause in contracts; penalty clauses for documentation falsification.</a:t>
-            </a:r>
-          </a:p>
-          <a:p>
-            <a:pPr>
-              <a:spcBef>
-                <a:spcPts val="200"/>
-              </a:spcBef>
-              <a:spcAft>
-                <a:spcPts val="885"/>
-              </a:spcAft>
-            </a:pPr>
-            <a:r>
-              <a:rPr sz="1400" b="0">
-                <a:solidFill>
-                  <a:srgbClr val="334155"/>
-                </a:solidFill>
-                <a:latin typeface="Calibri"/>
-              </a:rPr>
-              <a:t>Incident response: quarantine protocol for suspect lots; notify manufacturer; retain retain samples per batch.</a:t>
-            </a:r>
-          </a:p>
-        </p:txBody>
-      </p:sp>
-      <p:sp>
-        <p:nvSpPr>
-          <p:cNvPr id="5" name="Rounded Rectangle 4"/>
-          <p:cNvSpPr/>
-          <p:nvPr/>
-        </p:nvSpPr>
-        <p:spPr>
-          <a:xfrm>
-            <a:off x="594360" y="5486400"/>
-            <a:ext cx="7955279" cy="548640"/>
-          </a:xfrm>
-          <a:prstGeom prst="roundRect">
-            <a:avLst/>
-          </a:prstGeom>
-          <a:solidFill>
-            <a:srgbClr val="E0F2FE"/>
-          </a:solidFill>
-          <a:ln w="15875">
-            <a:solidFill>
-              <a:srgbClr val="007A87"/>
-            </a:solidFill>
-          </a:ln>
-        </p:spPr>
-        <p:style>
-          <a:lnRef idx="1">
-            <a:schemeClr val="accent1"/>
-          </a:lnRef>
-          <a:fillRef idx="3">
-            <a:schemeClr val="accent1"/>
-          </a:fillRef>
-          <a:effectRef idx="2">
-            <a:schemeClr val="accent1"/>
-          </a:effectRef>
-          <a:fontRef idx="minor">
-            <a:schemeClr val="lt1"/>
-          </a:fontRef>
-        </p:style>
-        <p:txBody>
-          <a:bodyPr rtlCol="0" anchor="ctr" wrap="square" lIns="137160" rIns="137160" tIns="91440"/>
-          <a:lstStyle/>
-          <a:p>
-            <a:pPr algn="ctr"/>
-            <a:r>
-              <a:rPr sz="1400" b="1">
-                <a:solidFill>
-                  <a:srgbClr val="002B5C"/>
-                </a:solidFill>
-                <a:latin typeface="Calibri"/>
-              </a:rPr>
-              <a:t>Traceability converts a chemical purchase into an auditable control — essential for IATF/PPAP material evidence.</a:t>
-            </a:r>
-          </a:p>
-        </p:txBody>
-      </p:sp>
-      <p:sp>
-        <p:nvSpPr>
-          <p:cNvPr id="6" name="TextBox 5"/>
+              <a:t>• Quarantine suspect lots fast</a:t>
+            </a:r>
+          </a:p>
+        </p:txBody>
+      </p:sp>
+      <p:sp>
+        <p:nvSpPr>
+          <p:cNvPr id="7" name="TextBox 6"/>
           <p:cNvSpPr txBox="1"/>
           <p:nvPr/>
         </p:nvSpPr>
         <p:spPr>
           <a:xfrm>
-            <a:off x="457200" y="6446520"/>
-            <a:ext cx="8229600" cy="274320"/>
+            <a:off x="365760" y="6473952"/>
+            <a:ext cx="8412480" cy="256032"/>
           </a:xfrm>
           <a:prstGeom prst="rect">
             <a:avLst/>
@@ -5574,13 +5030,13 @@
           <a:p>
             <a:pPr algn="r"/>
             <a:r>
-              <a:rPr sz="900" b="0">
+              <a:rPr sz="1000" b="0">
                 <a:solidFill>
                   <a:srgbClr val="64748B"/>
                 </a:solidFill>
                 <a:latin typeface="Calibri"/>
               </a:rPr>
-              <a:t>Confidential — Risk Committee | Exxsol D40 Supply Chain Integrity</a:t>
+              <a:t>Confidential — Risk Committee | Exxsol D40</a:t>
             </a:r>
           </a:p>
         </p:txBody>
@@ -5612,7 +5068,7 @@
         <p:spPr>
           <a:xfrm>
             <a:off x="0" y="0"/>
-            <a:ext cx="9144000" cy="1051560"/>
+            <a:ext cx="9144000" cy="1097280"/>
           </a:xfrm>
           <a:prstGeom prst="rect">
             <a:avLst/>
@@ -5654,8 +5110,8 @@
         </p:nvSpPr>
         <p:spPr>
           <a:xfrm>
-            <a:off x="502920" y="201168"/>
-            <a:ext cx="8046720" cy="502920"/>
+            <a:off x="411480" y="164592"/>
+            <a:ext cx="8321040" cy="566928"/>
           </a:xfrm>
           <a:prstGeom prst="rect">
             <a:avLst/>
@@ -5669,28 +5125,52 @@
           <a:lstStyle/>
           <a:p>
             <a:r>
-              <a:rPr sz="2800" b="1">
+              <a:rPr sz="3400" b="1">
                 <a:solidFill>
                   <a:srgbClr val="FFFFFF"/>
                 </a:solidFill>
                 <a:latin typeface="Calibri"/>
               </a:rPr>
-              <a:t>Detection &amp; Verification Controls</a:t>
-            </a:r>
-          </a:p>
-        </p:txBody>
-      </p:sp>
+              <a:t>Detection Controls</a:t>
+            </a:r>
+          </a:p>
+        </p:txBody>
+      </p:sp>
+      <p:pic>
+        <p:nvPicPr>
+          <p:cNvPr id="4" name="Picture 3" descr="15_detection.png"/>
+          <p:cNvPicPr>
+            <a:picLocks noChangeAspect="1"/>
+          </p:cNvPicPr>
+          <p:nvPr/>
+        </p:nvPicPr>
+        <p:blipFill>
+          <a:blip r:embed="rId2"/>
+          <a:stretch>
+            <a:fillRect/>
+          </a:stretch>
+        </p:blipFill>
+        <p:spPr>
+          <a:xfrm>
+            <a:off x="5806440" y="1234440"/>
+            <a:ext cx="3063240" cy="4892040"/>
+          </a:xfrm>
+          <a:prstGeom prst="rect">
+            <a:avLst/>
+          </a:prstGeom>
+        </p:spPr>
+      </p:pic>
       <p:graphicFrame>
         <p:nvGraphicFramePr>
-          <p:cNvPr id="4" name="Table 3"/>
+          <p:cNvPr id="5" name="Table 4"/>
           <p:cNvGraphicFramePr>
             <a:graphicFrameLocks noGrp="1"/>
           </p:cNvGraphicFramePr>
           <p:nvPr/>
         </p:nvGraphicFramePr>
         <p:xfrm>
-          <a:off x="502920" y="1417320"/>
-          <a:ext cx="8229600" cy="2962656"/>
+          <a:off x="411480" y="1234440"/>
+          <a:ext cx="5166360" cy="1920240"/>
         </p:xfrm>
         <a:graphic>
           <a:graphicData uri="http://schemas.openxmlformats.org/drawingml/2006/table">
@@ -5700,19 +5180,17 @@
               </a:tblPr>
               <a:tblGrid>
                 <a:gridCol w="1645920"/>
-                <a:gridCol w="2560320"/>
-                <a:gridCol w="1463040"/>
-                <a:gridCol w="2560320"/>
+                <a:gridCol w="1371600"/>
+                <a:gridCol w="2148840"/>
               </a:tblGrid>
-              <a:tr h="423236">
+              <a:tr h="384048">
                 <a:tc>
                   <a:txBody>
                     <a:bodyPr/>
                     <a:lstStyle/>
                     <a:p>
-                      <a:pPr algn="ctr"/>
                       <a:r>
-                        <a:rPr sz="1100" b="1">
+                        <a:rPr sz="1300" b="1">
                           <a:solidFill>
                             <a:srgbClr val="FFFFFF"/>
                           </a:solidFill>
@@ -5733,15 +5211,14 @@
                     <a:bodyPr/>
                     <a:lstStyle/>
                     <a:p>
-                      <a:pPr algn="ctr"/>
                       <a:r>
-                        <a:rPr sz="1100" b="1">
+                        <a:rPr sz="1300" b="1">
                           <a:solidFill>
                             <a:srgbClr val="FFFFFF"/>
                           </a:solidFill>
                           <a:latin typeface="Calibri"/>
                         </a:rPr>
-                        <a:t>Method</a:t>
+                        <a:t>When</a:t>
                       </a:r>
                     </a:p>
                   </a:txBody>
@@ -5756,38 +5233,14 @@
                     <a:bodyPr/>
                     <a:lstStyle/>
                     <a:p>
-                      <a:pPr algn="ctr"/>
                       <a:r>
-                        <a:rPr sz="1100" b="1">
+                        <a:rPr sz="1300" b="1">
                           <a:solidFill>
                             <a:srgbClr val="FFFFFF"/>
                           </a:solidFill>
                           <a:latin typeface="Calibri"/>
                         </a:rPr>
-                        <a:t>Frequency</a:t>
-                      </a:r>
-                    </a:p>
-                  </a:txBody>
-                  <a:tcPr>
-                    <a:solidFill>
-                      <a:srgbClr val="002B5C"/>
-                    </a:solidFill>
-                  </a:tcPr>
-                </a:tc>
-                <a:tc>
-                  <a:txBody>
-                    <a:bodyPr/>
-                    <a:lstStyle/>
-                    <a:p>
-                      <a:pPr algn="ctr"/>
-                      <a:r>
-                        <a:rPr sz="1100" b="1">
-                          <a:solidFill>
-                            <a:srgbClr val="FFFFFF"/>
-                          </a:solidFill>
-                          <a:latin typeface="Calibri"/>
-                        </a:rPr>
-                        <a:t>Purpose</a:t>
+                        <a:t>Goal</a:t>
                       </a:r>
                     </a:p>
                   </a:txBody>
@@ -5798,21 +5251,20 @@
                   </a:tcPr>
                 </a:tc>
               </a:tr>
-              <a:tr h="423236">
+              <a:tr h="384048">
                 <a:tc>
                   <a:txBody>
                     <a:bodyPr/>
                     <a:lstStyle/>
                     <a:p>
-                      <a:pPr algn="ctr"/>
                       <a:r>
-                        <a:rPr sz="1000" b="0">
+                        <a:rPr sz="1200" b="0">
                           <a:solidFill>
                             <a:srgbClr val="334155"/>
                           </a:solidFill>
                           <a:latin typeface="Calibri"/>
                         </a:rPr>
-                        <a:t>Incoming CoA review</a:t>
+                        <a:t>CoA review</a:t>
                       </a:r>
                     </a:p>
                   </a:txBody>
@@ -5823,28 +5275,8 @@
                     <a:bodyPr/>
                     <a:lstStyle/>
                     <a:p>
-                      <a:pPr algn="l"/>
                       <a:r>
-                        <a:rPr sz="1000" b="0">
-                          <a:solidFill>
-                            <a:srgbClr val="334155"/>
-                          </a:solidFill>
-                          <a:latin typeface="Calibri"/>
-                        </a:rPr>
-                        <a:t>Spec match vs. ExxonMobil datasheet</a:t>
-                      </a:r>
-                    </a:p>
-                  </a:txBody>
-                  <a:tcPr/>
-                </a:tc>
-                <a:tc>
-                  <a:txBody>
-                    <a:bodyPr/>
-                    <a:lstStyle/>
-                    <a:p>
-                      <a:pPr algn="l"/>
-                      <a:r>
-                        <a:rPr sz="1000" b="0">
+                        <a:rPr sz="1200" b="0">
                           <a:solidFill>
                             <a:srgbClr val="334155"/>
                           </a:solidFill>
@@ -5861,36 +5293,34 @@
                     <a:bodyPr/>
                     <a:lstStyle/>
                     <a:p>
-                      <a:pPr algn="l"/>
                       <a:r>
-                        <a:rPr sz="1000" b="0">
+                        <a:rPr sz="1200" b="0">
                           <a:solidFill>
                             <a:srgbClr val="334155"/>
                           </a:solidFill>
                           <a:latin typeface="Calibri"/>
                         </a:rPr>
-                        <a:t>First line of defense</a:t>
+                        <a:t>Spec match</a:t>
                       </a:r>
                     </a:p>
                   </a:txBody>
                   <a:tcPr/>
                 </a:tc>
               </a:tr>
-              <a:tr h="423236">
+              <a:tr h="384048">
                 <a:tc>
                   <a:txBody>
                     <a:bodyPr/>
                     <a:lstStyle/>
                     <a:p>
-                      <a:pPr algn="ctr"/>
                       <a:r>
-                        <a:rPr sz="1000" b="0">
+                        <a:rPr sz="1200" b="0">
                           <a:solidFill>
                             <a:srgbClr val="334155"/>
                           </a:solidFill>
                           <a:latin typeface="Calibri"/>
                         </a:rPr>
-                        <a:t>On-site screening</a:t>
+                        <a:t>On-site screen</a:t>
                       </a:r>
                     </a:p>
                   </a:txBody>
@@ -5905,15 +5335,14 @@
                     <a:bodyPr/>
                     <a:lstStyle/>
                     <a:p>
-                      <a:pPr algn="l"/>
                       <a:r>
-                        <a:rPr sz="1000" b="0">
+                        <a:rPr sz="1200" b="0">
                           <a:solidFill>
                             <a:srgbClr val="334155"/>
                           </a:solidFill>
                           <a:latin typeface="Calibri"/>
                         </a:rPr>
-                        <a:t>Density, flash point, refractive index</a:t>
+                        <a:t>Each lot</a:t>
                       </a:r>
                     </a:p>
                   </a:txBody>
@@ -5928,38 +5357,14 @@
                     <a:bodyPr/>
                     <a:lstStyle/>
                     <a:p>
-                      <a:pPr algn="l"/>
                       <a:r>
-                        <a:rPr sz="1000" b="0">
+                        <a:rPr sz="1200" b="0">
                           <a:solidFill>
                             <a:srgbClr val="334155"/>
                           </a:solidFill>
                           <a:latin typeface="Calibri"/>
                         </a:rPr>
-                        <a:t>Risk-based / each lot</a:t>
-                      </a:r>
-                    </a:p>
-                  </a:txBody>
-                  <a:tcPr>
-                    <a:solidFill>
-                      <a:srgbClr val="F1F5F9"/>
-                    </a:solidFill>
-                  </a:tcPr>
-                </a:tc>
-                <a:tc>
-                  <a:txBody>
-                    <a:bodyPr/>
-                    <a:lstStyle/>
-                    <a:p>
-                      <a:pPr algn="l"/>
-                      <a:r>
-                        <a:rPr sz="1000" b="0">
-                          <a:solidFill>
-                            <a:srgbClr val="334155"/>
-                          </a:solidFill>
-                          <a:latin typeface="Calibri"/>
-                        </a:rPr>
-                        <a:t>Rapid anomaly flag</a:t>
+                        <a:t>Quick flag</a:t>
                       </a:r>
                     </a:p>
                   </a:txBody>
@@ -5970,21 +5375,20 @@
                   </a:tcPr>
                 </a:tc>
               </a:tr>
-              <a:tr h="423236">
+              <a:tr h="384048">
                 <a:tc>
                   <a:txBody>
                     <a:bodyPr/>
                     <a:lstStyle/>
                     <a:p>
-                      <a:pPr algn="ctr"/>
                       <a:r>
-                        <a:rPr sz="1000" b="0">
+                        <a:rPr sz="1200" b="0">
                           <a:solidFill>
                             <a:srgbClr val="334155"/>
                           </a:solidFill>
                           <a:latin typeface="Calibri"/>
                         </a:rPr>
-                        <a:t>Odor check (screening)</a:t>
+                        <a:t>GC-MS test</a:t>
                       </a:r>
                     </a:p>
                   </a:txBody>
@@ -5995,200 +5399,8 @@
                     <a:bodyPr/>
                     <a:lstStyle/>
                     <a:p>
-                      <a:pPr algn="l"/>
                       <a:r>
-                        <a:rPr sz="1000" b="0">
-                          <a:solidFill>
-                            <a:srgbClr val="334155"/>
-                          </a:solidFill>
-                          <a:latin typeface="Calibri"/>
-                        </a:rPr>
-                        <a:t>D40 = mild; MC = sweet; methanol = alcoholic</a:t>
-                      </a:r>
-                    </a:p>
-                  </a:txBody>
-                  <a:tcPr/>
-                </a:tc>
-                <a:tc>
-                  <a:txBody>
-                    <a:bodyPr/>
-                    <a:lstStyle/>
-                    <a:p>
-                      <a:pPr algn="l"/>
-                      <a:r>
-                        <a:rPr sz="1000" b="0">
-                          <a:solidFill>
-                            <a:srgbClr val="334155"/>
-                          </a:solidFill>
-                          <a:latin typeface="Calibri"/>
-                        </a:rPr>
-                        <a:t>Each drum (trained staff)</a:t>
-                      </a:r>
-                    </a:p>
-                  </a:txBody>
-                  <a:tcPr/>
-                </a:tc>
-                <a:tc>
-                  <a:txBody>
-                    <a:bodyPr/>
-                    <a:lstStyle/>
-                    <a:p>
-                      <a:pPr algn="l"/>
-                      <a:r>
-                        <a:rPr sz="1000" b="0">
-                          <a:solidFill>
-                            <a:srgbClr val="334155"/>
-                          </a:solidFill>
-                          <a:latin typeface="Calibri"/>
-                        </a:rPr>
-                        <a:t>Early warning — not definitive</a:t>
-                      </a:r>
-                    </a:p>
-                  </a:txBody>
-                  <a:tcPr/>
-                </a:tc>
-              </a:tr>
-              <a:tr h="423236">
-                <a:tc>
-                  <a:txBody>
-                    <a:bodyPr/>
-                    <a:lstStyle/>
-                    <a:p>
-                      <a:pPr algn="ctr"/>
-                      <a:r>
-                        <a:rPr sz="1000" b="0">
-                          <a:solidFill>
-                            <a:srgbClr val="334155"/>
-                          </a:solidFill>
-                          <a:latin typeface="Calibri"/>
-                        </a:rPr>
-                        <a:t>GC-MS analysis</a:t>
-                      </a:r>
-                    </a:p>
-                  </a:txBody>
-                  <a:tcPr>
-                    <a:solidFill>
-                      <a:srgbClr val="F1F5F9"/>
-                    </a:solidFill>
-                  </a:tcPr>
-                </a:tc>
-                <a:tc>
-                  <a:txBody>
-                    <a:bodyPr/>
-                    <a:lstStyle/>
-                    <a:p>
-                      <a:pPr algn="l"/>
-                      <a:r>
-                        <a:rPr sz="1000" b="0">
-                          <a:solidFill>
-                            <a:srgbClr val="334155"/>
-                          </a:solidFill>
-                          <a:latin typeface="Calibri"/>
-                        </a:rPr>
-                        <a:t>Independent lab fingerprint</a:t>
-                      </a:r>
-                    </a:p>
-                  </a:txBody>
-                  <a:tcPr>
-                    <a:solidFill>
-                      <a:srgbClr val="F1F5F9"/>
-                    </a:solidFill>
-                  </a:tcPr>
-                </a:tc>
-                <a:tc>
-                  <a:txBody>
-                    <a:bodyPr/>
-                    <a:lstStyle/>
-                    <a:p>
-                      <a:pPr algn="l"/>
-                      <a:r>
-                        <a:rPr sz="1000" b="0">
-                          <a:solidFill>
-                            <a:srgbClr val="334155"/>
-                          </a:solidFill>
-                          <a:latin typeface="Calibri"/>
-                        </a:rPr>
-                        <a:t>Critical lots / quarterly</a:t>
-                      </a:r>
-                    </a:p>
-                  </a:txBody>
-                  <a:tcPr>
-                    <a:solidFill>
-                      <a:srgbClr val="F1F5F9"/>
-                    </a:solidFill>
-                  </a:tcPr>
-                </a:tc>
-                <a:tc>
-                  <a:txBody>
-                    <a:bodyPr/>
-                    <a:lstStyle/>
-                    <a:p>
-                      <a:pPr algn="l"/>
-                      <a:r>
-                        <a:rPr sz="1000" b="0">
-                          <a:solidFill>
-                            <a:srgbClr val="334155"/>
-                          </a:solidFill>
-                          <a:latin typeface="Calibri"/>
-                        </a:rPr>
-                        <a:t>Definitive adulterant ID</a:t>
-                      </a:r>
-                    </a:p>
-                  </a:txBody>
-                  <a:tcPr>
-                    <a:solidFill>
-                      <a:srgbClr val="F1F5F9"/>
-                    </a:solidFill>
-                  </a:tcPr>
-                </a:tc>
-              </a:tr>
-              <a:tr h="423236">
-                <a:tc>
-                  <a:txBody>
-                    <a:bodyPr/>
-                    <a:lstStyle/>
-                    <a:p>
-                      <a:pPr algn="ctr"/>
-                      <a:r>
-                        <a:rPr sz="1000" b="0">
-                          <a:solidFill>
-                            <a:srgbClr val="334155"/>
-                          </a:solidFill>
-                          <a:latin typeface="Calibri"/>
-                        </a:rPr>
-                        <a:t>Supplier scorecard</a:t>
-                      </a:r>
-                    </a:p>
-                  </a:txBody>
-                  <a:tcPr/>
-                </a:tc>
-                <a:tc>
-                  <a:txBody>
-                    <a:bodyPr/>
-                    <a:lstStyle/>
-                    <a:p>
-                      <a:pPr algn="l"/>
-                      <a:r>
-                        <a:rPr sz="1000" b="0">
-                          <a:solidFill>
-                            <a:srgbClr val="334155"/>
-                          </a:solidFill>
-                          <a:latin typeface="Calibri"/>
-                        </a:rPr>
-                        <a:t>CoA rejection rate, audit findings</a:t>
-                      </a:r>
-                    </a:p>
-                  </a:txBody>
-                  <a:tcPr/>
-                </a:tc>
-                <a:tc>
-                  <a:txBody>
-                    <a:bodyPr/>
-                    <a:lstStyle/>
-                    <a:p>
-                      <a:pPr algn="l"/>
-                      <a:r>
-                        <a:rPr sz="1000" b="0">
+                        <a:rPr sz="1200" b="0">
                           <a:solidFill>
                             <a:srgbClr val="334155"/>
                           </a:solidFill>
@@ -6205,36 +5417,34 @@
                     <a:bodyPr/>
                     <a:lstStyle/>
                     <a:p>
-                      <a:pPr algn="l"/>
                       <a:r>
-                        <a:rPr sz="1000" b="0">
+                        <a:rPr sz="1200" b="0">
                           <a:solidFill>
                             <a:srgbClr val="334155"/>
                           </a:solidFill>
                           <a:latin typeface="Calibri"/>
                         </a:rPr>
-                        <a:t>Continuous improvement</a:t>
+                        <a:t>Prove purity</a:t>
                       </a:r>
                     </a:p>
                   </a:txBody>
                   <a:tcPr/>
                 </a:tc>
               </a:tr>
-              <a:tr h="423240">
+              <a:tr h="384048">
                 <a:tc>
                   <a:txBody>
                     <a:bodyPr/>
                     <a:lstStyle/>
                     <a:p>
-                      <a:pPr algn="ctr"/>
                       <a:r>
-                        <a:rPr sz="1000" b="0">
+                        <a:rPr sz="1200" b="0">
                           <a:solidFill>
                             <a:srgbClr val="334155"/>
                           </a:solidFill>
                           <a:latin typeface="Calibri"/>
                         </a:rPr>
-                        <a:t>Market intelligence</a:t>
+                        <a:t>Price check</a:t>
                       </a:r>
                     </a:p>
                   </a:txBody>
@@ -6249,32 +5459,8 @@
                     <a:bodyPr/>
                     <a:lstStyle/>
                     <a:p>
-                      <a:pPr algn="l"/>
                       <a:r>
-                        <a:rPr sz="1000" b="0">
-                          <a:solidFill>
-                            <a:srgbClr val="334155"/>
-                          </a:solidFill>
-                          <a:latin typeface="Calibri"/>
-                        </a:rPr>
-                        <a:t>Price benchmarking vs. authorized list</a:t>
-                      </a:r>
-                    </a:p>
-                  </a:txBody>
-                  <a:tcPr>
-                    <a:solidFill>
-                      <a:srgbClr val="F1F5F9"/>
-                    </a:solidFill>
-                  </a:tcPr>
-                </a:tc>
-                <a:tc>
-                  <a:txBody>
-                    <a:bodyPr/>
-                    <a:lstStyle/>
-                    <a:p>
-                      <a:pPr algn="l"/>
-                      <a:r>
-                        <a:rPr sz="1000" b="0">
+                        <a:rPr sz="1200" b="0">
                           <a:solidFill>
                             <a:srgbClr val="334155"/>
                           </a:solidFill>
@@ -6295,15 +5481,14 @@
                     <a:bodyPr/>
                     <a:lstStyle/>
                     <a:p>
-                      <a:pPr algn="l"/>
                       <a:r>
-                        <a:rPr sz="1000" b="0">
+                        <a:rPr sz="1200" b="0">
                           <a:solidFill>
                             <a:srgbClr val="334155"/>
                           </a:solidFill>
                           <a:latin typeface="Calibri"/>
                         </a:rPr>
-                        <a:t>Flags “too good to be true” offers</a:t>
+                        <a:t>Spot fraud</a:t>
                       </a:r>
                     </a:p>
                   </a:txBody>
@@ -6320,14 +5505,14 @@
       </p:graphicFrame>
       <p:sp>
         <p:nvSpPr>
-          <p:cNvPr id="5" name="TextBox 4"/>
+          <p:cNvPr id="6" name="TextBox 5"/>
           <p:cNvSpPr txBox="1"/>
           <p:nvPr/>
         </p:nvSpPr>
         <p:spPr>
           <a:xfrm>
-            <a:off x="457200" y="6446520"/>
-            <a:ext cx="8229600" cy="274320"/>
+            <a:off x="365760" y="6473952"/>
+            <a:ext cx="8412480" cy="256032"/>
           </a:xfrm>
           <a:prstGeom prst="rect">
             <a:avLst/>
@@ -6342,13 +5527,13 @@
           <a:p>
             <a:pPr algn="r"/>
             <a:r>
-              <a:rPr sz="900" b="0">
+              <a:rPr sz="1000" b="0">
                 <a:solidFill>
                   <a:srgbClr val="64748B"/>
                 </a:solidFill>
                 <a:latin typeface="Calibri"/>
               </a:rPr>
-              <a:t>Confidential — Risk Committee | Exxsol D40 Supply Chain Integrity</a:t>
+              <a:t>Confidential — Risk Committee | Exxsol D40</a:t>
             </a:r>
           </a:p>
         </p:txBody>
@@ -6380,7 +5565,7 @@
         <p:spPr>
           <a:xfrm>
             <a:off x="0" y="0"/>
-            <a:ext cx="9144000" cy="1051560"/>
+            <a:ext cx="9144000" cy="1097280"/>
           </a:xfrm>
           <a:prstGeom prst="rect">
             <a:avLst/>
@@ -6422,8 +5607,8 @@
         </p:nvSpPr>
         <p:spPr>
           <a:xfrm>
-            <a:off x="502920" y="201168"/>
-            <a:ext cx="8046720" cy="502920"/>
+            <a:off x="411480" y="164592"/>
+            <a:ext cx="8321040" cy="566928"/>
           </a:xfrm>
           <a:prstGeom prst="rect">
             <a:avLst/>
@@ -6437,7 +5622,7 @@
           <a:lstStyle/>
           <a:p>
             <a:r>
-              <a:rPr sz="2800" b="1">
+              <a:rPr sz="3400" b="1">
                 <a:solidFill>
                   <a:srgbClr val="FFFFFF"/>
                 </a:solidFill>
@@ -6456,8 +5641,8 @@
         </p:nvSpPr>
         <p:spPr>
           <a:xfrm>
-            <a:off x="502920" y="658368"/>
-            <a:ext cx="8046720" cy="320040"/>
+            <a:off x="411480" y="658368"/>
+            <a:ext cx="8321040" cy="347472"/>
           </a:xfrm>
           <a:prstGeom prst="rect">
             <a:avLst/>
@@ -6471,27 +5656,51 @@
           <a:lstStyle/>
           <a:p>
             <a:r>
-              <a:rPr sz="1400" b="0">
+              <a:rPr sz="1800" b="0">
                 <a:solidFill>
                   <a:srgbClr val="CBE5F0"/>
                 </a:solidFill>
                 <a:latin typeface="Calibri"/>
               </a:rPr>
-              <a:t>Risk Committee Approval Requested</a:t>
-            </a:r>
-          </a:p>
-        </p:txBody>
-      </p:sp>
-      <p:sp>
-        <p:nvSpPr>
-          <p:cNvPr id="5" name="Oval 4"/>
+              <a:t>Approval Requested</a:t>
+            </a:r>
+          </a:p>
+        </p:txBody>
+      </p:sp>
+      <p:pic>
+        <p:nvPicPr>
+          <p:cNvPr id="5" name="Picture 4" descr="16_actions.png"/>
+          <p:cNvPicPr>
+            <a:picLocks noChangeAspect="1"/>
+          </p:cNvPicPr>
+          <p:nvPr/>
+        </p:nvPicPr>
+        <p:blipFill>
+          <a:blip r:embed="rId2"/>
+          <a:stretch>
+            <a:fillRect/>
+          </a:stretch>
+        </p:blipFill>
+        <p:spPr>
+          <a:xfrm>
+            <a:off x="5806440" y="1234440"/>
+            <a:ext cx="3063240" cy="4892040"/>
+          </a:xfrm>
+          <a:prstGeom prst="rect">
+            <a:avLst/>
+          </a:prstGeom>
+        </p:spPr>
+      </p:pic>
+      <p:sp>
+        <p:nvSpPr>
+          <p:cNvPr id="6" name="Oval 5"/>
           <p:cNvSpPr/>
           <p:nvPr/>
         </p:nvSpPr>
         <p:spPr>
           <a:xfrm>
-            <a:off x="594360" y="1417320"/>
-            <a:ext cx="384048" cy="384048"/>
+            <a:off x="457200" y="1371600"/>
+            <a:ext cx="457200" cy="457200"/>
           </a:xfrm>
           <a:prstGeom prst="ellipse">
             <a:avLst/>
@@ -6523,7 +5732,7 @@
           <a:p>
             <a:pPr algn="ctr"/>
             <a:r>
-              <a:rPr sz="1400" b="1">
+              <a:rPr sz="1800" b="1">
                 <a:solidFill>
                   <a:srgbClr val="FFFFFF"/>
                 </a:solidFill>
@@ -6536,14 +5745,14 @@
       </p:sp>
       <p:sp>
         <p:nvSpPr>
-          <p:cNvPr id="6" name="TextBox 5"/>
+          <p:cNvPr id="7" name="TextBox 6"/>
           <p:cNvSpPr txBox="1"/>
           <p:nvPr/>
         </p:nvSpPr>
         <p:spPr>
           <a:xfrm>
-            <a:off x="1143000" y="1399032"/>
-            <a:ext cx="7406640" cy="502920"/>
+            <a:off x="1051560" y="1417320"/>
+            <a:ext cx="4480560" cy="457200"/>
           </a:xfrm>
           <a:prstGeom prst="rect">
             <a:avLst/>
@@ -6557,27 +5766,27 @@
           <a:lstStyle/>
           <a:p>
             <a:r>
-              <a:rPr sz="1500" b="0">
+              <a:rPr sz="2200" b="0">
                 <a:solidFill>
                   <a:srgbClr val="334155"/>
                 </a:solidFill>
                 <a:latin typeface="Calibri"/>
               </a:rPr>
-              <a:t>Approve authorized-distributor-only procurement policy with executive exception process.</a:t>
-            </a:r>
-          </a:p>
-        </p:txBody>
-      </p:sp>
-      <p:sp>
-        <p:nvSpPr>
-          <p:cNvPr id="7" name="Oval 6"/>
+              <a:t>Authorized distributors only</a:t>
+            </a:r>
+          </a:p>
+        </p:txBody>
+      </p:sp>
+      <p:sp>
+        <p:nvSpPr>
+          <p:cNvPr id="8" name="Oval 7"/>
           <p:cNvSpPr/>
           <p:nvPr/>
         </p:nvSpPr>
         <p:spPr>
           <a:xfrm>
-            <a:off x="594360" y="2167128"/>
-            <a:ext cx="384048" cy="384048"/>
+            <a:off x="457200" y="2240280"/>
+            <a:ext cx="457200" cy="457200"/>
           </a:xfrm>
           <a:prstGeom prst="ellipse">
             <a:avLst/>
@@ -6609,7 +5818,7 @@
           <a:p>
             <a:pPr algn="ctr"/>
             <a:r>
-              <a:rPr sz="1400" b="1">
+              <a:rPr sz="1800" b="1">
                 <a:solidFill>
                   <a:srgbClr val="FFFFFF"/>
                 </a:solidFill>
@@ -6622,14 +5831,14 @@
       </p:sp>
       <p:sp>
         <p:nvSpPr>
-          <p:cNvPr id="8" name="TextBox 7"/>
+          <p:cNvPr id="9" name="TextBox 8"/>
           <p:cNvSpPr txBox="1"/>
           <p:nvPr/>
         </p:nvSpPr>
         <p:spPr>
           <a:xfrm>
-            <a:off x="1143000" y="2148840"/>
-            <a:ext cx="7406640" cy="502920"/>
+            <a:off x="1051560" y="2286000"/>
+            <a:ext cx="4480560" cy="457200"/>
           </a:xfrm>
           <a:prstGeom prst="rect">
             <a:avLst/>
@@ -6643,27 +5852,27 @@
           <a:lstStyle/>
           <a:p>
             <a:r>
-              <a:rPr sz="1500" b="0">
+              <a:rPr sz="2200" b="0">
                 <a:solidFill>
                   <a:srgbClr val="334155"/>
                 </a:solidFill>
                 <a:latin typeface="Calibri"/>
               </a:rPr>
-              <a:t>Mandate batch CoA verification and quarantine-until-approved for all D40 receipts.</a:t>
-            </a:r>
-          </a:p>
-        </p:txBody>
-      </p:sp>
-      <p:sp>
-        <p:nvSpPr>
-          <p:cNvPr id="9" name="Oval 8"/>
+              <a:t>CoA + quarantine all receipts</a:t>
+            </a:r>
+          </a:p>
+        </p:txBody>
+      </p:sp>
+      <p:sp>
+        <p:nvSpPr>
+          <p:cNvPr id="10" name="Oval 9"/>
           <p:cNvSpPr/>
           <p:nvPr/>
         </p:nvSpPr>
         <p:spPr>
           <a:xfrm>
-            <a:off x="594360" y="2916936"/>
-            <a:ext cx="384048" cy="384048"/>
+            <a:off x="457200" y="3108960"/>
+            <a:ext cx="457200" cy="457200"/>
           </a:xfrm>
           <a:prstGeom prst="ellipse">
             <a:avLst/>
@@ -6695,7 +5904,7 @@
           <a:p>
             <a:pPr algn="ctr"/>
             <a:r>
-              <a:rPr sz="1400" b="1">
+              <a:rPr sz="1800" b="1">
                 <a:solidFill>
                   <a:srgbClr val="FFFFFF"/>
                 </a:solidFill>
@@ -6708,14 +5917,14 @@
       </p:sp>
       <p:sp>
         <p:nvSpPr>
-          <p:cNvPr id="10" name="TextBox 9"/>
+          <p:cNvPr id="11" name="TextBox 10"/>
           <p:cNvSpPr txBox="1"/>
           <p:nvPr/>
         </p:nvSpPr>
         <p:spPr>
           <a:xfrm>
-            <a:off x="1143000" y="2898648"/>
-            <a:ext cx="7406640" cy="502920"/>
+            <a:off x="1051560" y="3154680"/>
+            <a:ext cx="4480560" cy="457200"/>
           </a:xfrm>
           <a:prstGeom prst="rect">
             <a:avLst/>
@@ -6729,27 +5938,27 @@
           <a:lstStyle/>
           <a:p>
             <a:r>
-              <a:rPr sz="1500" b="0">
+              <a:rPr sz="2200" b="0">
                 <a:solidFill>
                   <a:srgbClr val="334155"/>
                 </a:solidFill>
                 <a:latin typeface="Calibri"/>
               </a:rPr>
-              <a:t>Fund independent GC-MS testing program (minimum quarterly + any price anomaly trigger).</a:t>
-            </a:r>
-          </a:p>
-        </p:txBody>
-      </p:sp>
-      <p:sp>
-        <p:nvSpPr>
-          <p:cNvPr id="11" name="Oval 10"/>
+              <a:t>Fund quarterly GC-MS testing</a:t>
+            </a:r>
+          </a:p>
+        </p:txBody>
+      </p:sp>
+      <p:sp>
+        <p:nvSpPr>
+          <p:cNvPr id="12" name="Oval 11"/>
           <p:cNvSpPr/>
           <p:nvPr/>
         </p:nvSpPr>
         <p:spPr>
           <a:xfrm>
-            <a:off x="594360" y="3666744"/>
-            <a:ext cx="384048" cy="384048"/>
+            <a:off x="457200" y="3977640"/>
+            <a:ext cx="457200" cy="457200"/>
           </a:xfrm>
           <a:prstGeom prst="ellipse">
             <a:avLst/>
@@ -6781,7 +5990,7 @@
           <a:p>
             <a:pPr algn="ctr"/>
             <a:r>
-              <a:rPr sz="1400" b="1">
+              <a:rPr sz="1800" b="1">
                 <a:solidFill>
                   <a:srgbClr val="FFFFFF"/>
                 </a:solidFill>
@@ -6794,14 +6003,14 @@
       </p:sp>
       <p:sp>
         <p:nvSpPr>
-          <p:cNvPr id="12" name="TextBox 11"/>
+          <p:cNvPr id="13" name="TextBox 12"/>
           <p:cNvSpPr txBox="1"/>
           <p:nvPr/>
         </p:nvSpPr>
         <p:spPr>
           <a:xfrm>
-            <a:off x="1143000" y="3648456"/>
-            <a:ext cx="7406640" cy="502920"/>
+            <a:off x="1051560" y="4023360"/>
+            <a:ext cx="4480560" cy="457200"/>
           </a:xfrm>
           <a:prstGeom prst="rect">
             <a:avLst/>
@@ -6815,27 +6024,27 @@
           <a:lstStyle/>
           <a:p>
             <a:r>
-              <a:rPr sz="1500" b="0">
+              <a:rPr sz="2200" b="0">
                 <a:solidFill>
                   <a:srgbClr val="334155"/>
                 </a:solidFill>
                 <a:latin typeface="Calibri"/>
               </a:rPr>
-              <a:t>Implement drum-to-dispense digital traceability in ERP within next planning cycle.</a:t>
-            </a:r>
-          </a:p>
-        </p:txBody>
-      </p:sp>
-      <p:sp>
-        <p:nvSpPr>
-          <p:cNvPr id="13" name="Oval 12"/>
+              <a:t>ERP drum-to-line traceability</a:t>
+            </a:r>
+          </a:p>
+        </p:txBody>
+      </p:sp>
+      <p:sp>
+        <p:nvSpPr>
+          <p:cNvPr id="14" name="Oval 13"/>
           <p:cNvSpPr/>
           <p:nvPr/>
         </p:nvSpPr>
         <p:spPr>
           <a:xfrm>
-            <a:off x="594360" y="4416552"/>
-            <a:ext cx="384048" cy="384048"/>
+            <a:off x="457200" y="4846320"/>
+            <a:ext cx="457200" cy="457200"/>
           </a:xfrm>
           <a:prstGeom prst="ellipse">
             <a:avLst/>
@@ -6867,7 +6076,7 @@
           <a:p>
             <a:pPr algn="ctr"/>
             <a:r>
-              <a:rPr sz="1400" b="1">
+              <a:rPr sz="1800" b="1">
                 <a:solidFill>
                   <a:srgbClr val="FFFFFF"/>
                 </a:solidFill>
@@ -6880,14 +6089,14 @@
       </p:sp>
       <p:sp>
         <p:nvSpPr>
-          <p:cNvPr id="14" name="TextBox 13"/>
+          <p:cNvPr id="15" name="TextBox 14"/>
           <p:cNvSpPr txBox="1"/>
           <p:nvPr/>
         </p:nvSpPr>
         <p:spPr>
           <a:xfrm>
-            <a:off x="1143000" y="4398264"/>
-            <a:ext cx="7406640" cy="502920"/>
+            <a:off x="1051560" y="4892040"/>
+            <a:ext cx="4480560" cy="457200"/>
           </a:xfrm>
           <a:prstGeom prst="rect">
             <a:avLst/>
@@ -6901,65 +6110,13 @@
           <a:lstStyle/>
           <a:p>
             <a:r>
-              <a:rPr sz="1500" b="0">
+              <a:rPr sz="2200" b="0">
                 <a:solidFill>
                   <a:srgbClr val="334155"/>
                 </a:solidFill>
                 <a:latin typeface="Calibri"/>
               </a:rPr>
-              <a:t>Conduct distributor audit (storage, labeling, sub-supply controls) within 90 days.</a:t>
-            </a:r>
-          </a:p>
-        </p:txBody>
-      </p:sp>
-      <p:sp>
-        <p:nvSpPr>
-          <p:cNvPr id="15" name="Oval 14"/>
-          <p:cNvSpPr/>
-          <p:nvPr/>
-        </p:nvSpPr>
-        <p:spPr>
-          <a:xfrm>
-            <a:off x="594360" y="5166360"/>
-            <a:ext cx="384048" cy="384048"/>
-          </a:xfrm>
-          <a:prstGeom prst="ellipse">
-            <a:avLst/>
-          </a:prstGeom>
-          <a:solidFill>
-            <a:srgbClr val="007A87"/>
-          </a:solidFill>
-          <a:ln>
-            <a:noFill/>
-          </a:ln>
-        </p:spPr>
-        <p:style>
-          <a:lnRef idx="1">
-            <a:schemeClr val="accent1"/>
-          </a:lnRef>
-          <a:fillRef idx="3">
-            <a:schemeClr val="accent1"/>
-          </a:fillRef>
-          <a:effectRef idx="2">
-            <a:schemeClr val="accent1"/>
-          </a:effectRef>
-          <a:fontRef idx="minor">
-            <a:schemeClr val="lt1"/>
-          </a:fontRef>
-        </p:style>
-        <p:txBody>
-          <a:bodyPr rtlCol="0" anchor="ctr"/>
-          <a:lstStyle/>
-          <a:p>
-            <a:pPr algn="ctr"/>
-            <a:r>
-              <a:rPr sz="1400" b="1">
-                <a:solidFill>
-                  <a:srgbClr val="FFFFFF"/>
-                </a:solidFill>
-                <a:latin typeface="Calibri"/>
-              </a:rPr>
-              <a:t>6</a:t>
+              <a:t>Distributor audit in 90 days</a:t>
             </a:r>
           </a:p>
         </p:txBody>
@@ -6972,8 +6129,8 @@
         </p:nvSpPr>
         <p:spPr>
           <a:xfrm>
-            <a:off x="1143000" y="5148072"/>
-            <a:ext cx="7406640" cy="502920"/>
+            <a:off x="365760" y="6473952"/>
+            <a:ext cx="8412480" cy="256032"/>
           </a:xfrm>
           <a:prstGeom prst="rect">
             <a:avLst/>
@@ -6986,49 +6143,15 @@
           </a:bodyPr>
           <a:lstStyle/>
           <a:p>
-            <a:r>
-              <a:rPr sz="1500" b="0">
-                <a:solidFill>
-                  <a:srgbClr val="334155"/>
-                </a:solidFill>
-                <a:latin typeface="Calibri"/>
-              </a:rPr>
-              <a:t>Brief operations on flash-point and adulteration risks; update chemical risk assessment.</a:t>
-            </a:r>
-          </a:p>
-        </p:txBody>
-      </p:sp>
-      <p:sp>
-        <p:nvSpPr>
-          <p:cNvPr id="17" name="TextBox 16"/>
-          <p:cNvSpPr txBox="1"/>
-          <p:nvPr/>
-        </p:nvSpPr>
-        <p:spPr>
-          <a:xfrm>
-            <a:off x="457200" y="6446520"/>
-            <a:ext cx="8229600" cy="274320"/>
-          </a:xfrm>
-          <a:prstGeom prst="rect">
-            <a:avLst/>
-          </a:prstGeom>
-          <a:noFill/>
-        </p:spPr>
-        <p:txBody>
-          <a:bodyPr wrap="none">
-            <a:spAutoFit/>
-          </a:bodyPr>
-          <a:lstStyle/>
-          <a:p>
             <a:pPr algn="r"/>
             <a:r>
-              <a:rPr sz="900" b="0">
+              <a:rPr sz="1000" b="0">
                 <a:solidFill>
                   <a:srgbClr val="64748B"/>
                 </a:solidFill>
                 <a:latin typeface="Calibri"/>
               </a:rPr>
-              <a:t>Confidential — Risk Committee | Exxsol D40 Supply Chain Integrity</a:t>
+              <a:t>Confidential — Risk Committee | Exxsol D40</a:t>
             </a:r>
           </a:p>
         </p:txBody>
@@ -7060,7 +6183,7 @@
         <p:spPr>
           <a:xfrm>
             <a:off x="0" y="0"/>
-            <a:ext cx="9144000" cy="1051560"/>
+            <a:ext cx="9144000" cy="1097280"/>
           </a:xfrm>
           <a:prstGeom prst="rect">
             <a:avLst/>
@@ -7102,8 +6225,8 @@
         </p:nvSpPr>
         <p:spPr>
           <a:xfrm>
-            <a:off x="502920" y="201168"/>
-            <a:ext cx="8046720" cy="502920"/>
+            <a:off x="411480" y="164592"/>
+            <a:ext cx="8321040" cy="566928"/>
           </a:xfrm>
           <a:prstGeom prst="rect">
             <a:avLst/>
@@ -7117,27 +6240,51 @@
           <a:lstStyle/>
           <a:p>
             <a:r>
-              <a:rPr sz="2800" b="1">
+              <a:rPr sz="3400" b="1">
                 <a:solidFill>
                   <a:srgbClr val="FFFFFF"/>
                 </a:solidFill>
                 <a:latin typeface="Calibri"/>
               </a:rPr>
-              <a:t>Governance Decision &amp; KPIs</a:t>
-            </a:r>
-          </a:p>
-        </p:txBody>
-      </p:sp>
-      <p:sp>
-        <p:nvSpPr>
-          <p:cNvPr id="4" name="TextBox 3"/>
+              <a:t>Governance &amp; KPIs</a:t>
+            </a:r>
+          </a:p>
+        </p:txBody>
+      </p:sp>
+      <p:pic>
+        <p:nvPicPr>
+          <p:cNvPr id="4" name="Picture 3" descr="17_governance.png"/>
+          <p:cNvPicPr>
+            <a:picLocks noChangeAspect="1"/>
+          </p:cNvPicPr>
+          <p:nvPr/>
+        </p:nvPicPr>
+        <p:blipFill>
+          <a:blip r:embed="rId2"/>
+          <a:stretch>
+            <a:fillRect/>
+          </a:stretch>
+        </p:blipFill>
+        <p:spPr>
+          <a:xfrm>
+            <a:off x="5806440" y="1234440"/>
+            <a:ext cx="3063240" cy="4892040"/>
+          </a:xfrm>
+          <a:prstGeom prst="rect">
+            <a:avLst/>
+          </a:prstGeom>
+        </p:spPr>
+      </p:pic>
+      <p:sp>
+        <p:nvSpPr>
+          <p:cNvPr id="5" name="TextBox 4"/>
           <p:cNvSpPr txBox="1"/>
           <p:nvPr/>
         </p:nvSpPr>
         <p:spPr>
           <a:xfrm>
-            <a:off x="594360" y="1325880"/>
-            <a:ext cx="7955279" cy="5029200"/>
+            <a:off x="411480" y="1234440"/>
+            <a:ext cx="5166360" cy="5120640"/>
           </a:xfrm>
           <a:prstGeom prst="rect">
             <a:avLst/>
@@ -7152,177 +6299,101 @@
           <a:p>
             <a:pPr>
               <a:spcBef>
-                <a:spcPts val="200"/>
+                <a:spcPts val="400"/>
               </a:spcBef>
               <a:spcAft>
-                <a:spcPts val="948"/>
+                <a:spcPts val="1400"/>
               </a:spcAft>
             </a:pPr>
             <a:r>
-              <a:rPr sz="1500" b="0">
+              <a:rPr sz="2400" b="0">
                 <a:solidFill>
                   <a:srgbClr val="334155"/>
                 </a:solidFill>
                 <a:latin typeface="Calibri"/>
               </a:rPr>
-              <a:t>Decision sought: Endorse Solvent Integrity Program for Exxsol D40 (policy + testing budget + audit schedule).</a:t>
+              <a:t>• Approve Solvent Integrity Program</a:t>
             </a:r>
           </a:p>
           <a:p>
             <a:pPr>
               <a:spcBef>
-                <a:spcPts val="200"/>
+                <a:spcPts val="400"/>
               </a:spcBef>
               <a:spcAft>
-                <a:spcPts val="948"/>
+                <a:spcPts val="1400"/>
               </a:spcAft>
             </a:pPr>
             <a:r>
-              <a:rPr sz="1500" b="0">
+              <a:rPr sz="2400" b="0">
                 <a:solidFill>
                   <a:srgbClr val="334155"/>
                 </a:solidFill>
                 <a:latin typeface="Calibri"/>
               </a:rPr>
-              <a:t>Accountability: Procurement (sourcing), Quality (CoA &amp; testing), EHS (SDS/flash point), Operations (dispensing traceability).</a:t>
+              <a:t>• 100% CoA verified before use</a:t>
             </a:r>
           </a:p>
           <a:p>
             <a:pPr>
               <a:spcBef>
-                <a:spcPts val="200"/>
+                <a:spcPts val="400"/>
               </a:spcBef>
               <a:spcAft>
-                <a:spcPts val="948"/>
+                <a:spcPts val="1400"/>
               </a:spcAft>
             </a:pPr>
             <a:r>
-              <a:rPr sz="1500" b="0">
+              <a:rPr sz="2400" b="0">
                 <a:solidFill>
                   <a:srgbClr val="334155"/>
                 </a:solidFill>
                 <a:latin typeface="Calibri"/>
               </a:rPr>
-              <a:t>Proposed KPIs:</a:t>
-            </a:r>
-          </a:p>
-          <a:p>
-            <a:pPr lvl="1">
+              <a:t>• Zero unauthorized suppliers</a:t>
+            </a:r>
+          </a:p>
+          <a:p>
+            <a:pPr>
               <a:spcBef>
-                <a:spcPts val="200"/>
+                <a:spcPts val="400"/>
               </a:spcBef>
               <a:spcAft>
-                <a:spcPts val="948"/>
+                <a:spcPts val="1400"/>
               </a:spcAft>
             </a:pPr>
             <a:r>
-              <a:rPr sz="1300" b="0">
+              <a:rPr sz="2400" b="0">
                 <a:solidFill>
                   <a:srgbClr val="334155"/>
                 </a:solidFill>
                 <a:latin typeface="Calibri"/>
               </a:rPr>
-              <a:t>100% of D40 lots received with verified CoA before release to production.</a:t>
-            </a:r>
-          </a:p>
-          <a:p>
-            <a:pPr lvl="1">
-              <a:spcBef>
-                <a:spcPts val="200"/>
-              </a:spcBef>
-              <a:spcAft>
-                <a:spcPts val="948"/>
-              </a:spcAft>
-            </a:pPr>
-            <a:r>
-              <a:rPr sz="1300" b="0">
-                <a:solidFill>
-                  <a:srgbClr val="334155"/>
-                </a:solidFill>
-                <a:latin typeface="Calibri"/>
-              </a:rPr>
-              <a:t>Zero unauthorized suppliers on approved vendor list.</a:t>
-            </a:r>
-          </a:p>
-          <a:p>
-            <a:pPr lvl="1">
-              <a:spcBef>
-                <a:spcPts val="200"/>
-              </a:spcBef>
-              <a:spcAft>
-                <a:spcPts val="948"/>
-              </a:spcAft>
-            </a:pPr>
-            <a:r>
-              <a:rPr sz="1300" b="0">
-                <a:solidFill>
-                  <a:srgbClr val="334155"/>
-                </a:solidFill>
-                <a:latin typeface="Calibri"/>
-              </a:rPr>
-              <a:t>≥1 independent GC-MS verification per quarter (or per new supplier).</a:t>
-            </a:r>
-          </a:p>
-          <a:p>
-            <a:pPr lvl="1">
-              <a:spcBef>
-                <a:spcPts val="200"/>
-              </a:spcBef>
-              <a:spcAft>
-                <a:spcPts val="948"/>
-              </a:spcAft>
-            </a:pPr>
-            <a:r>
-              <a:rPr sz="1300" b="0">
-                <a:solidFill>
-                  <a:srgbClr val="334155"/>
-                </a:solidFill>
-                <a:latin typeface="Calibri"/>
-              </a:rPr>
-              <a:t>Mean time to quarantine suspect material &lt; 4 hours of detection.</a:t>
-            </a:r>
-          </a:p>
-          <a:p>
-            <a:pPr lvl="1">
-              <a:spcBef>
-                <a:spcPts val="200"/>
-              </a:spcBef>
-              <a:spcAft>
-                <a:spcPts val="948"/>
-              </a:spcAft>
-            </a:pPr>
-            <a:r>
-              <a:rPr sz="1300" b="0">
-                <a:solidFill>
-                  <a:srgbClr val="334155"/>
-                </a:solidFill>
-                <a:latin typeface="Calibri"/>
-              </a:rPr>
-              <a:t>Annual distributor audit closure rate 100%.</a:t>
-            </a:r>
-          </a:p>
-        </p:txBody>
-      </p:sp>
-      <p:sp>
-        <p:nvSpPr>
-          <p:cNvPr id="5" name="Rounded Rectangle 4"/>
+              <a:t>• Quarterly GC-MS minimum</a:t>
+            </a:r>
+          </a:p>
+        </p:txBody>
+      </p:sp>
+      <p:sp>
+        <p:nvSpPr>
+          <p:cNvPr id="6" name="Rounded Rectangle 5"/>
           <p:cNvSpPr/>
           <p:nvPr/>
         </p:nvSpPr>
         <p:spPr>
           <a:xfrm>
-            <a:off x="594360" y="5532120"/>
-            <a:ext cx="7955279" cy="594360"/>
+            <a:off x="411480" y="5623560"/>
+            <a:ext cx="5166360" cy="658368"/>
           </a:xfrm>
           <a:prstGeom prst="roundRect">
             <a:avLst/>
           </a:prstGeom>
           <a:solidFill>
-            <a:srgbClr val="DCFCE7"/>
+            <a:srgbClr val="FEF3C7"/>
           </a:solidFill>
-          <a:ln w="15875">
+          <a:ln w="19050">
             <a:solidFill>
-              <a:srgbClr val="166534"/>
+              <a:srgbClr val="B45309"/>
             </a:solidFill>
           </a:ln>
         </p:spPr>
@@ -7341,32 +6412,32 @@
           </a:fontRef>
         </p:style>
         <p:txBody>
-          <a:bodyPr rtlCol="0" anchor="ctr" wrap="square" lIns="137160" rIns="137160" tIns="91440"/>
+          <a:bodyPr rtlCol="0" anchor="ctr" wrap="square" lIns="109728" rIns="109728"/>
           <a:lstStyle/>
           <a:p>
             <a:pPr algn="ctr"/>
             <a:r>
-              <a:rPr sz="1400" b="1">
+              <a:rPr sz="1600" b="1">
                 <a:solidFill>
                   <a:srgbClr val="002B5C"/>
                 </a:solidFill>
                 <a:latin typeface="Calibri"/>
               </a:rPr>
-              <a:t>The cost of prevention is a fraction of the cost of a single fire incident, mass scrap event, or customer stop-ship.</a:t>
-            </a:r>
-          </a:p>
-        </p:txBody>
-      </p:sp>
-      <p:sp>
-        <p:nvSpPr>
-          <p:cNvPr id="6" name="TextBox 5"/>
+              <a:t>Prevention costs less than one incident.</a:t>
+            </a:r>
+          </a:p>
+        </p:txBody>
+      </p:sp>
+      <p:sp>
+        <p:nvSpPr>
+          <p:cNvPr id="7" name="TextBox 6"/>
           <p:cNvSpPr txBox="1"/>
           <p:nvPr/>
         </p:nvSpPr>
         <p:spPr>
           <a:xfrm>
-            <a:off x="457200" y="6446520"/>
-            <a:ext cx="8229600" cy="274320"/>
+            <a:off x="365760" y="6473952"/>
+            <a:ext cx="8412480" cy="256032"/>
           </a:xfrm>
           <a:prstGeom prst="rect">
             <a:avLst/>
@@ -7381,13 +6452,13 @@
           <a:p>
             <a:pPr algn="r"/>
             <a:r>
-              <a:rPr sz="900" b="0">
+              <a:rPr sz="1000" b="0">
                 <a:solidFill>
                   <a:srgbClr val="64748B"/>
                 </a:solidFill>
                 <a:latin typeface="Calibri"/>
               </a:rPr>
-              <a:t>Confidential — Risk Committee | Exxsol D40 Supply Chain Integrity</a:t>
+              <a:t>Confidential — Risk Committee | Exxsol D40</a:t>
             </a:r>
           </a:p>
         </p:txBody>
@@ -7419,7 +6490,7 @@
         <p:spPr>
           <a:xfrm>
             <a:off x="0" y="0"/>
-            <a:ext cx="9144000" cy="1051560"/>
+            <a:ext cx="9144000" cy="1097280"/>
           </a:xfrm>
           <a:prstGeom prst="rect">
             <a:avLst/>
@@ -7461,8 +6532,8 @@
         </p:nvSpPr>
         <p:spPr>
           <a:xfrm>
-            <a:off x="502920" y="201168"/>
-            <a:ext cx="8046720" cy="502920"/>
+            <a:off x="411480" y="164592"/>
+            <a:ext cx="8321040" cy="566928"/>
           </a:xfrm>
           <a:prstGeom prst="rect">
             <a:avLst/>
@@ -7476,13 +6547,13 @@
           <a:lstStyle/>
           <a:p>
             <a:r>
-              <a:rPr sz="2800" b="1">
+              <a:rPr sz="3400" b="1">
                 <a:solidFill>
                   <a:srgbClr val="FFFFFF"/>
                 </a:solidFill>
                 <a:latin typeface="Calibri"/>
               </a:rPr>
-              <a:t>Appendix — Reference Contacts &amp; Further Reading</a:t>
+              <a:t>Appendix</a:t>
             </a:r>
           </a:p>
         </p:txBody>
@@ -7495,8 +6566,66 @@
         </p:nvSpPr>
         <p:spPr>
           <a:xfrm>
-            <a:off x="594360" y="1280160"/>
-            <a:ext cx="7955279" cy="5029200"/>
+            <a:off x="411480" y="658368"/>
+            <a:ext cx="8321040" cy="347472"/>
+          </a:xfrm>
+          <a:prstGeom prst="rect">
+            <a:avLst/>
+          </a:prstGeom>
+          <a:noFill/>
+        </p:spPr>
+        <p:txBody>
+          <a:bodyPr wrap="none">
+            <a:spAutoFit/>
+          </a:bodyPr>
+          <a:lstStyle/>
+          <a:p>
+            <a:r>
+              <a:rPr sz="1800" b="0">
+                <a:solidFill>
+                  <a:srgbClr val="CBE5F0"/>
+                </a:solidFill>
+                <a:latin typeface="Calibri"/>
+              </a:rPr>
+              <a:t>References</a:t>
+            </a:r>
+          </a:p>
+        </p:txBody>
+      </p:sp>
+      <p:pic>
+        <p:nvPicPr>
+          <p:cNvPr id="5" name="Picture 4" descr="18_appendix.png"/>
+          <p:cNvPicPr>
+            <a:picLocks noChangeAspect="1"/>
+          </p:cNvPicPr>
+          <p:nvPr/>
+        </p:nvPicPr>
+        <p:blipFill>
+          <a:blip r:embed="rId2"/>
+          <a:stretch>
+            <a:fillRect/>
+          </a:stretch>
+        </p:blipFill>
+        <p:spPr>
+          <a:xfrm>
+            <a:off x="5806440" y="1234440"/>
+            <a:ext cx="3063240" cy="4892040"/>
+          </a:xfrm>
+          <a:prstGeom prst="rect">
+            <a:avLst/>
+          </a:prstGeom>
+        </p:spPr>
+      </p:pic>
+      <p:sp>
+        <p:nvSpPr>
+          <p:cNvPr id="6" name="TextBox 5"/>
+          <p:cNvSpPr txBox="1"/>
+          <p:nvPr/>
+        </p:nvSpPr>
+        <p:spPr>
+          <a:xfrm>
+            <a:off x="411480" y="1234440"/>
+            <a:ext cx="5166360" cy="5120640"/>
           </a:xfrm>
           <a:prstGeom prst="rect">
             <a:avLst/>
@@ -7511,167 +6640,91 @@
           <a:p>
             <a:pPr>
               <a:spcBef>
-                <a:spcPts val="200"/>
+                <a:spcPts val="400"/>
               </a:spcBef>
               <a:spcAft>
-                <a:spcPts val="822"/>
+                <a:spcPts val="1400"/>
               </a:spcAft>
             </a:pPr>
             <a:r>
-              <a:rPr sz="1300" b="0">
+              <a:rPr sz="2400" b="0">
                 <a:solidFill>
                   <a:srgbClr val="334155"/>
                 </a:solidFill>
                 <a:latin typeface="Calibri"/>
               </a:rPr>
-              <a:t>ExxonMobil product data: consult current Exxsol D40 Technical Data Sheet and SDS before use.</a:t>
+              <a:t>• Verify distributors with ExxonMobil</a:t>
             </a:r>
           </a:p>
           <a:p>
             <a:pPr>
               <a:spcBef>
-                <a:spcPts val="200"/>
+                <a:spcPts val="400"/>
               </a:spcBef>
               <a:spcAft>
-                <a:spcPts val="822"/>
+                <a:spcPts val="1400"/>
               </a:spcAft>
             </a:pPr>
             <a:r>
-              <a:rPr sz="1300" b="0">
+              <a:rPr sz="2400" b="0">
                 <a:solidFill>
                   <a:srgbClr val="334155"/>
                 </a:solidFill>
                 <a:latin typeface="Calibri"/>
               </a:rPr>
-              <a:t>Authorized distributors (verify current status with ExxonMobil):</a:t>
-            </a:r>
-          </a:p>
-          <a:p>
-            <a:pPr lvl="1">
+              <a:t>• Shanghai Huishuo — East/North China</a:t>
+            </a:r>
+          </a:p>
+          <a:p>
+            <a:pPr>
               <a:spcBef>
-                <a:spcPts val="200"/>
+                <a:spcPts val="400"/>
               </a:spcBef>
               <a:spcAft>
-                <a:spcPts val="822"/>
+                <a:spcPts val="1400"/>
               </a:spcAft>
             </a:pPr>
             <a:r>
-              <a:rPr sz="1100" b="0">
+              <a:rPr sz="2400" b="0">
                 <a:solidFill>
                   <a:srgbClr val="334155"/>
                 </a:solidFill>
                 <a:latin typeface="Calibri"/>
               </a:rPr>
-              <a:t>Shanghai Huishuo — East/North China (est. 2003)</a:t>
-            </a:r>
-          </a:p>
-          <a:p>
-            <a:pPr lvl="1">
+              <a:t>• Sang Hing Hong — South China</a:t>
+            </a:r>
+          </a:p>
+          <a:p>
+            <a:pPr>
               <a:spcBef>
-                <a:spcPts val="200"/>
+                <a:spcPts val="400"/>
               </a:spcBef>
               <a:spcAft>
-                <a:spcPts val="822"/>
+                <a:spcPts val="1400"/>
               </a:spcAft>
             </a:pPr>
             <a:r>
-              <a:rPr sz="1100" b="0">
+              <a:rPr sz="2400" b="0">
                 <a:solidFill>
                   <a:srgbClr val="334155"/>
                 </a:solidFill>
                 <a:latin typeface="Calibri"/>
               </a:rPr>
-              <a:t>Sang Hing Hong Group — South China &amp; regional branches</a:t>
-            </a:r>
-          </a:p>
-          <a:p>
-            <a:pPr lvl="1">
-              <a:spcBef>
-                <a:spcPts val="200"/>
-              </a:spcBef>
-              <a:spcAft>
-                <a:spcPts val="822"/>
-              </a:spcAft>
-            </a:pPr>
-            <a:r>
-              <a:rPr sz="1100" b="0">
-                <a:solidFill>
-                  <a:srgbClr val="334155"/>
-                </a:solidFill>
-                <a:latin typeface="Calibri"/>
-              </a:rPr>
-              <a:t>Additional regional suppliers — require authorization confirmation</a:t>
-            </a:r>
-          </a:p>
-          <a:p>
-            <a:pPr>
-              <a:spcBef>
-                <a:spcPts val="200"/>
-              </a:spcBef>
-              <a:spcAft>
-                <a:spcPts val="822"/>
-              </a:spcAft>
-            </a:pPr>
-            <a:r>
-              <a:rPr sz="1300" b="0">
-                <a:solidFill>
-                  <a:srgbClr val="334155"/>
-                </a:solidFill>
-                <a:latin typeface="Calibri"/>
-              </a:rPr>
-              <a:t>Validation: run small-scale cleaning trials (time, temperature, agitation) for specific PM parts and contaminants.</a:t>
-            </a:r>
-          </a:p>
-          <a:p>
-            <a:pPr>
-              <a:spcBef>
-                <a:spcPts val="200"/>
-              </a:spcBef>
-              <a:spcAft>
-                <a:spcPts val="822"/>
-              </a:spcAft>
-            </a:pPr>
-            <a:r>
-              <a:rPr sz="1300" b="0">
-                <a:solidFill>
-                  <a:srgbClr val="334155"/>
-                </a:solidFill>
-                <a:latin typeface="Calibri"/>
-              </a:rPr>
-              <a:t>Regulatory: ensure compliance with local chemical storage, flammability, and occupational exposure regulations.</a:t>
-            </a:r>
-          </a:p>
-          <a:p>
-            <a:pPr>
-              <a:spcBef>
-                <a:spcPts val="200"/>
-              </a:spcBef>
-              <a:spcAft>
-                <a:spcPts val="822"/>
-              </a:spcAft>
-            </a:pPr>
-            <a:r>
-              <a:rPr sz="1300" b="0">
-                <a:solidFill>
-                  <a:srgbClr val="334155"/>
-                </a:solidFill>
-                <a:latin typeface="Calibri"/>
-              </a:rPr>
-              <a:t>Internal cross-reference: align with PPAP Element 10 (material/test results) and supplier quality requirements.</a:t>
-            </a:r>
-          </a:p>
-        </p:txBody>
-      </p:sp>
-      <p:sp>
-        <p:nvSpPr>
-          <p:cNvPr id="5" name="TextBox 4"/>
+              <a:t>• Align with PPAP Element 10</a:t>
+            </a:r>
+          </a:p>
+        </p:txBody>
+      </p:sp>
+      <p:sp>
+        <p:nvSpPr>
+          <p:cNvPr id="7" name="TextBox 6"/>
           <p:cNvSpPr txBox="1"/>
           <p:nvPr/>
         </p:nvSpPr>
         <p:spPr>
           <a:xfrm>
-            <a:off x="457200" y="6446520"/>
-            <a:ext cx="8229600" cy="274320"/>
+            <a:off x="365760" y="6473952"/>
+            <a:ext cx="8412480" cy="256032"/>
           </a:xfrm>
           <a:prstGeom prst="rect">
             <a:avLst/>
@@ -7686,13 +6739,13 @@
           <a:p>
             <a:pPr algn="r"/>
             <a:r>
-              <a:rPr sz="900" b="0">
+              <a:rPr sz="1000" b="0">
                 <a:solidFill>
                   <a:srgbClr val="64748B"/>
                 </a:solidFill>
                 <a:latin typeface="Calibri"/>
               </a:rPr>
-              <a:t>Appendix — Confidential</a:t>
+              <a:t>Confidential — Risk Committee | Exxsol D40</a:t>
             </a:r>
           </a:p>
         </p:txBody>
@@ -7758,16 +6811,40 @@
           </a:p>
         </p:txBody>
       </p:sp>
-      <p:sp>
-        <p:nvSpPr>
-          <p:cNvPr id="3" name="TextBox 2"/>
+      <p:pic>
+        <p:nvPicPr>
+          <p:cNvPr id="3" name="Picture 2" descr="19_qa.png"/>
+          <p:cNvPicPr>
+            <a:picLocks noChangeAspect="1"/>
+          </p:cNvPicPr>
+          <p:nvPr/>
+        </p:nvPicPr>
+        <p:blipFill>
+          <a:blip r:embed="rId2"/>
+          <a:stretch>
+            <a:fillRect/>
+          </a:stretch>
+        </p:blipFill>
+        <p:spPr>
+          <a:xfrm>
+            <a:off x="4572000" y="731520"/>
+            <a:ext cx="4206240" cy="5303520"/>
+          </a:xfrm>
+          <a:prstGeom prst="rect">
+            <a:avLst/>
+          </a:prstGeom>
+        </p:spPr>
+      </p:pic>
+      <p:sp>
+        <p:nvSpPr>
+          <p:cNvPr id="4" name="TextBox 3"/>
           <p:cNvSpPr txBox="1"/>
           <p:nvPr/>
         </p:nvSpPr>
         <p:spPr>
           <a:xfrm>
-            <a:off x="914400" y="2560320"/>
-            <a:ext cx="7315200" cy="1371600"/>
+            <a:off x="640080" y="2286000"/>
+            <a:ext cx="3840480" cy="2286000"/>
           </a:xfrm>
           <a:prstGeom prst="rect">
             <a:avLst/>
@@ -7780,27 +6857,26 @@
           </a:bodyPr>
           <a:lstStyle/>
           <a:p>
-            <a:pPr algn="ctr"/>
-            <a:r>
-              <a:rPr sz="3600" b="1">
+            <a:r>
+              <a:rPr sz="4400" b="1">
                 <a:solidFill>
                   <a:srgbClr val="FFFFFF"/>
                 </a:solidFill>
                 <a:latin typeface="Calibri"/>
               </a:rPr>
-              <a:t>Questions &amp; Discussion</a:t>
-            </a:r>
-          </a:p>
-          <a:p>
-            <a:pPr algn="ctr"/>
-            <a:r>
-              <a:rPr sz="1800" b="0">
+              <a:t>Questions?</a:t>
+            </a:r>
+          </a:p>
+          <a:p>
+            <a:r>
+              <a:rPr sz="2200" b="0">
                 <a:solidFill>
                   <a:srgbClr val="CBE5F0"/>
                 </a:solidFill>
                 <a:latin typeface="Calibri"/>
               </a:rPr>
-              <a:t>Risk Committee — Exxsol D40 Supply Chain Integrity</a:t>
+              <a:t>Risk Committee
+Exxsol D40 Integrity</a:t>
             </a:r>
           </a:p>
         </p:txBody>
@@ -7832,7 +6908,7 @@
         <p:spPr>
           <a:xfrm>
             <a:off x="0" y="0"/>
-            <a:ext cx="9144000" cy="1051560"/>
+            <a:ext cx="9144000" cy="1097280"/>
           </a:xfrm>
           <a:prstGeom prst="rect">
             <a:avLst/>
@@ -7874,8 +6950,8 @@
         </p:nvSpPr>
         <p:spPr>
           <a:xfrm>
-            <a:off x="502920" y="201168"/>
-            <a:ext cx="8046720" cy="502920"/>
+            <a:off x="411480" y="164592"/>
+            <a:ext cx="8321040" cy="566928"/>
           </a:xfrm>
           <a:prstGeom prst="rect">
             <a:avLst/>
@@ -7889,7 +6965,7 @@
           <a:lstStyle/>
           <a:p>
             <a:r>
-              <a:rPr sz="2800" b="1">
+              <a:rPr sz="3400" b="1">
                 <a:solidFill>
                   <a:srgbClr val="FFFFFF"/>
                 </a:solidFill>
@@ -7900,16 +6976,40 @@
           </a:p>
         </p:txBody>
       </p:sp>
-      <p:sp>
-        <p:nvSpPr>
-          <p:cNvPr id="4" name="TextBox 3"/>
+      <p:pic>
+        <p:nvPicPr>
+          <p:cNvPr id="4" name="Picture 3" descr="02_executive.png"/>
+          <p:cNvPicPr>
+            <a:picLocks noChangeAspect="1"/>
+          </p:cNvPicPr>
+          <p:nvPr/>
+        </p:nvPicPr>
+        <p:blipFill>
+          <a:blip r:embed="rId2"/>
+          <a:stretch>
+            <a:fillRect/>
+          </a:stretch>
+        </p:blipFill>
+        <p:spPr>
+          <a:xfrm>
+            <a:off x="5806440" y="1234440"/>
+            <a:ext cx="3063240" cy="4892040"/>
+          </a:xfrm>
+          <a:prstGeom prst="rect">
+            <a:avLst/>
+          </a:prstGeom>
+        </p:spPr>
+      </p:pic>
+      <p:sp>
+        <p:nvSpPr>
+          <p:cNvPr id="5" name="TextBox 4"/>
           <p:cNvSpPr txBox="1"/>
           <p:nvPr/>
         </p:nvSpPr>
         <p:spPr>
           <a:xfrm>
-            <a:off x="594360" y="1325880"/>
-            <a:ext cx="7955279" cy="5029200"/>
+            <a:off x="411480" y="1234440"/>
+            <a:ext cx="5166360" cy="5120640"/>
           </a:xfrm>
           <a:prstGeom prst="rect">
             <a:avLst/>
@@ -7924,110 +7024,91 @@
           <a:p>
             <a:pPr>
               <a:spcBef>
-                <a:spcPts val="200"/>
+                <a:spcPts val="400"/>
               </a:spcBef>
               <a:spcAft>
-                <a:spcPts val="1011"/>
+                <a:spcPts val="1400"/>
               </a:spcAft>
             </a:pPr>
             <a:r>
-              <a:rPr sz="1600" b="0">
+              <a:rPr sz="2400" b="0">
                 <a:solidFill>
                   <a:srgbClr val="334155"/>
                 </a:solidFill>
                 <a:latin typeface="Calibri"/>
               </a:rPr>
-              <a:t>Exxsol D40 is a precision-engineered dearomatized hydrocarbon solvent critical to cleaning porous sintered powder metallurgy (PM) components before plating, coating, or assembly.</a:t>
+              <a:t>• D40 cleans porous PM parts before plating/coating</a:t>
             </a:r>
           </a:p>
           <a:p>
             <a:pPr>
               <a:spcBef>
-                <a:spcPts val="200"/>
+                <a:spcPts val="400"/>
               </a:spcBef>
               <a:spcAft>
-                <a:spcPts val="1011"/>
+                <a:spcPts val="1400"/>
               </a:spcAft>
             </a:pPr>
             <a:r>
-              <a:rPr sz="1600" b="0">
+              <a:rPr sz="2400" b="0">
                 <a:solidFill>
                   <a:srgbClr val="334155"/>
                 </a:solidFill>
                 <a:latin typeface="Calibri"/>
               </a:rPr>
-              <a:t>Rising feedstock costs and Middle East supply volatility have increased incentive for unauthorized traders to adulterate drums — mixing cheaper chemicals (e.g., methylene chloride, methanol) while retaining genuine labels.</a:t>
+              <a:t>• Price pressure drives drum adulteration risk</a:t>
             </a:r>
           </a:p>
           <a:p>
             <a:pPr>
               <a:spcBef>
-                <a:spcPts val="200"/>
+                <a:spcPts val="400"/>
               </a:spcBef>
               <a:spcAft>
-                <a:spcPts val="1011"/>
+                <a:spcPts val="1400"/>
               </a:spcAft>
             </a:pPr>
             <a:r>
-              <a:rPr sz="1600" b="0">
+              <a:rPr sz="2400" b="0">
                 <a:solidFill>
                   <a:srgbClr val="334155"/>
                 </a:solidFill>
                 <a:latin typeface="Calibri"/>
               </a:rPr>
-              <a:t>Adulteration destroys the narrow distillation profile and flash point that make D40 suitable for PM cleaning — creating fire, HSE, quality, and downstream process failure risks.</a:t>
+              <a:t>• Fake fluid = fire, HSE &amp; quality failures</a:t>
             </a:r>
           </a:p>
           <a:p>
             <a:pPr>
               <a:spcBef>
-                <a:spcPts val="200"/>
+                <a:spcPts val="400"/>
               </a:spcBef>
               <a:spcAft>
-                <a:spcPts val="1011"/>
+                <a:spcPts val="1400"/>
               </a:spcAft>
             </a:pPr>
             <a:r>
-              <a:rPr sz="1600" b="0">
+              <a:rPr sz="2400" b="0">
                 <a:solidFill>
                   <a:srgbClr val="334155"/>
                 </a:solidFill>
                 <a:latin typeface="Calibri"/>
               </a:rPr>
-              <a:t>Primary defense: authorized distributor sourcing, batch-level Certificate of Analysis (CoA), chain-of-custody traceability, and independent GC-MS verification for critical lots.</a:t>
-            </a:r>
-          </a:p>
-          <a:p>
-            <a:pPr>
-              <a:spcBef>
-                <a:spcPts val="200"/>
-              </a:spcBef>
-              <a:spcAft>
-                <a:spcPts val="1011"/>
-              </a:spcAft>
-            </a:pPr>
-            <a:r>
-              <a:rPr sz="1600" b="0">
-                <a:solidFill>
-                  <a:srgbClr val="334155"/>
-                </a:solidFill>
-                <a:latin typeface="Calibri"/>
-              </a:rPr>
-              <a:t>Risk Committee decision requested: approve enhanced procurement controls, supplier qualification criteria, and audit/testing budget for solvent integrity assurance.</a:t>
-            </a:r>
-          </a:p>
-        </p:txBody>
-      </p:sp>
-      <p:sp>
-        <p:nvSpPr>
-          <p:cNvPr id="5" name="Rounded Rectangle 4"/>
+              <a:t>• Defense: authorized supply + CoA + GC-MS</a:t>
+            </a:r>
+          </a:p>
+        </p:txBody>
+      </p:sp>
+      <p:sp>
+        <p:nvSpPr>
+          <p:cNvPr id="6" name="Rounded Rectangle 5"/>
           <p:cNvSpPr/>
           <p:nvPr/>
         </p:nvSpPr>
         <p:spPr>
           <a:xfrm>
-            <a:off x="594360" y="5623560"/>
-            <a:ext cx="7955279" cy="594360"/>
+            <a:off x="411480" y="5623560"/>
+            <a:ext cx="5166360" cy="658368"/>
           </a:xfrm>
           <a:prstGeom prst="roundRect">
             <a:avLst/>
@@ -8035,7 +7116,7 @@
           <a:solidFill>
             <a:srgbClr val="FEF3C7"/>
           </a:solidFill>
-          <a:ln w="15875">
+          <a:ln w="19050">
             <a:solidFill>
               <a:srgbClr val="B45309"/>
             </a:solidFill>
@@ -8056,32 +7137,32 @@
           </a:fontRef>
         </p:style>
         <p:txBody>
-          <a:bodyPr rtlCol="0" anchor="ctr" wrap="square" lIns="137160" rIns="137160" tIns="91440"/>
+          <a:bodyPr rtlCol="0" anchor="ctr" wrap="square" lIns="109728" rIns="109728"/>
           <a:lstStyle/>
           <a:p>
             <a:pPr algn="ctr"/>
             <a:r>
-              <a:rPr sz="1400" b="1">
+              <a:rPr sz="1600" b="1">
                 <a:solidFill>
                   <a:srgbClr val="002B5C"/>
                 </a:solidFill>
                 <a:latin typeface="Calibri"/>
               </a:rPr>
-              <a:t>Bottom line: A marginally cheaper drum can cost far more in scrap, rework, safety incidents, and regulatory exposure.</a:t>
-            </a:r>
-          </a:p>
-        </p:txBody>
-      </p:sp>
-      <p:sp>
-        <p:nvSpPr>
-          <p:cNvPr id="6" name="TextBox 5"/>
+              <a:t>Cheap drums cost more than they save.</a:t>
+            </a:r>
+          </a:p>
+        </p:txBody>
+      </p:sp>
+      <p:sp>
+        <p:nvSpPr>
+          <p:cNvPr id="7" name="TextBox 6"/>
           <p:cNvSpPr txBox="1"/>
           <p:nvPr/>
         </p:nvSpPr>
         <p:spPr>
           <a:xfrm>
-            <a:off x="457200" y="6446520"/>
-            <a:ext cx="8229600" cy="274320"/>
+            <a:off x="365760" y="6473952"/>
+            <a:ext cx="8412480" cy="256032"/>
           </a:xfrm>
           <a:prstGeom prst="rect">
             <a:avLst/>
@@ -8096,13 +7177,13 @@
           <a:p>
             <a:pPr algn="r"/>
             <a:r>
-              <a:rPr sz="900" b="0">
+              <a:rPr sz="1000" b="0">
                 <a:solidFill>
                   <a:srgbClr val="64748B"/>
                 </a:solidFill>
                 <a:latin typeface="Calibri"/>
               </a:rPr>
-              <a:t>Confidential — Risk Committee | Exxsol D40 Supply Chain Integrity</a:t>
+              <a:t>Confidential — Risk Committee | Exxsol D40</a:t>
             </a:r>
           </a:p>
         </p:txBody>
@@ -8134,7 +7215,7 @@
         <p:spPr>
           <a:xfrm>
             <a:off x="0" y="0"/>
-            <a:ext cx="9144000" cy="1051560"/>
+            <a:ext cx="9144000" cy="1097280"/>
           </a:xfrm>
           <a:prstGeom prst="rect">
             <a:avLst/>
@@ -8176,8 +7257,8 @@
         </p:nvSpPr>
         <p:spPr>
           <a:xfrm>
-            <a:off x="502920" y="201168"/>
-            <a:ext cx="8046720" cy="502920"/>
+            <a:off x="411480" y="164592"/>
+            <a:ext cx="8321040" cy="566928"/>
           </a:xfrm>
           <a:prstGeom prst="rect">
             <a:avLst/>
@@ -8191,7 +7272,7 @@
           <a:lstStyle/>
           <a:p>
             <a:r>
-              <a:rPr sz="2800" b="1">
+              <a:rPr sz="3400" b="1">
                 <a:solidFill>
                   <a:srgbClr val="FFFFFF"/>
                 </a:solidFill>
@@ -8202,16 +7283,40 @@
           </a:p>
         </p:txBody>
       </p:sp>
-      <p:sp>
-        <p:nvSpPr>
-          <p:cNvPr id="4" name="TextBox 3"/>
+      <p:pic>
+        <p:nvPicPr>
+          <p:cNvPr id="4" name="Picture 3" descr="03_agenda.png"/>
+          <p:cNvPicPr>
+            <a:picLocks noChangeAspect="1"/>
+          </p:cNvPicPr>
+          <p:nvPr/>
+        </p:nvPicPr>
+        <p:blipFill>
+          <a:blip r:embed="rId2"/>
+          <a:stretch>
+            <a:fillRect/>
+          </a:stretch>
+        </p:blipFill>
+        <p:spPr>
+          <a:xfrm>
+            <a:off x="5806440" y="1234440"/>
+            <a:ext cx="3063240" cy="4892040"/>
+          </a:xfrm>
+          <a:prstGeom prst="rect">
+            <a:avLst/>
+          </a:prstGeom>
+        </p:spPr>
+      </p:pic>
+      <p:sp>
+        <p:nvSpPr>
+          <p:cNvPr id="5" name="TextBox 4"/>
           <p:cNvSpPr txBox="1"/>
           <p:nvPr/>
         </p:nvSpPr>
         <p:spPr>
           <a:xfrm>
-            <a:off x="594360" y="1554480"/>
-            <a:ext cx="7955279" cy="5029200"/>
+            <a:off x="411480" y="1234440"/>
+            <a:ext cx="5166360" cy="5120640"/>
           </a:xfrm>
           <a:prstGeom prst="rect">
             <a:avLst/>
@@ -8226,129 +7331,91 @@
           <a:p>
             <a:pPr>
               <a:spcBef>
-                <a:spcPts val="200"/>
+                <a:spcPts val="400"/>
               </a:spcBef>
               <a:spcAft>
-                <a:spcPts val="1540"/>
+                <a:spcPts val="1400"/>
               </a:spcAft>
             </a:pPr>
             <a:r>
-              <a:rPr sz="2000" b="0">
+              <a:rPr sz="2400" b="0">
                 <a:solidFill>
                   <a:srgbClr val="334155"/>
                 </a:solidFill>
                 <a:latin typeface="Calibri"/>
               </a:rPr>
-              <a:t>1.  Business &amp; Technical Context — Why D40 Specifications Matter</a:t>
+              <a:t>• Why D40 specs matter</a:t>
             </a:r>
           </a:p>
           <a:p>
             <a:pPr>
               <a:spcBef>
-                <a:spcPts val="200"/>
+                <a:spcPts val="400"/>
               </a:spcBef>
               <a:spcAft>
-                <a:spcPts val="1540"/>
+                <a:spcPts val="1400"/>
               </a:spcAft>
             </a:pPr>
             <a:r>
-              <a:rPr sz="2000" b="0">
+              <a:rPr sz="2400" b="0">
                 <a:solidFill>
                   <a:srgbClr val="334155"/>
                 </a:solidFill>
                 <a:latin typeface="Calibri"/>
               </a:rPr>
-              <a:t>2.  Boiling Range &amp; Aromatic Content — Engineering Rationale</a:t>
+              <a:t>• Boiling range &amp; aromatics</a:t>
             </a:r>
           </a:p>
           <a:p>
             <a:pPr>
               <a:spcBef>
-                <a:spcPts val="200"/>
+                <a:spcPts val="400"/>
               </a:spcBef>
               <a:spcAft>
-                <a:spcPts val="1540"/>
+                <a:spcPts val="1400"/>
               </a:spcAft>
             </a:pPr>
             <a:r>
-              <a:rPr sz="2000" b="0">
+              <a:rPr sz="2400" b="0">
                 <a:solidFill>
                   <a:srgbClr val="334155"/>
                 </a:solidFill>
                 <a:latin typeface="Calibri"/>
               </a:rPr>
-              <a:t>3.  Supply Chain Risk Landscape &amp; Price Pressure</a:t>
+              <a:t>• Supply chain risk</a:t>
             </a:r>
           </a:p>
           <a:p>
             <a:pPr>
               <a:spcBef>
-                <a:spcPts val="200"/>
+                <a:spcPts val="400"/>
               </a:spcBef>
               <a:spcAft>
-                <a:spcPts val="1540"/>
+                <a:spcPts val="1400"/>
               </a:spcAft>
             </a:pPr>
             <a:r>
-              <a:rPr sz="2000" b="0">
+              <a:rPr sz="2400" b="0">
                 <a:solidFill>
                   <a:srgbClr val="334155"/>
                 </a:solidFill>
                 <a:latin typeface="Calibri"/>
               </a:rPr>
-              <a:t>4.  Adulteration Threat Model &amp; Operational Impact</a:t>
-            </a:r>
-          </a:p>
-          <a:p>
-            <a:pPr>
-              <a:spcBef>
-                <a:spcPts val="200"/>
-              </a:spcBef>
-              <a:spcAft>
-                <a:spcPts val="1540"/>
-              </a:spcAft>
-            </a:pPr>
-            <a:r>
-              <a:rPr sz="2000" b="0">
-                <a:solidFill>
-                  <a:srgbClr val="334155"/>
-                </a:solidFill>
-                <a:latin typeface="Calibri"/>
-              </a:rPr>
-              <a:t>5.  Distributor QC, Traceability &amp; Anti-Counterfeit Controls</a:t>
-            </a:r>
-          </a:p>
-          <a:p>
-            <a:pPr>
-              <a:spcBef>
-                <a:spcPts val="200"/>
-              </a:spcBef>
-              <a:spcAft>
-                <a:spcPts val="1540"/>
-              </a:spcAft>
-            </a:pPr>
-            <a:r>
-              <a:rPr sz="2000" b="0">
-                <a:solidFill>
-                  <a:srgbClr val="334155"/>
-                </a:solidFill>
-                <a:latin typeface="Calibri"/>
-              </a:rPr>
-              <a:t>6.  Detection Methods &amp; Recommended Governance Actions</a:t>
-            </a:r>
-          </a:p>
-        </p:txBody>
-      </p:sp>
-      <p:sp>
-        <p:nvSpPr>
-          <p:cNvPr id="5" name="TextBox 4"/>
+              <a:t>• Controls &amp; actions</a:t>
+            </a:r>
+          </a:p>
+        </p:txBody>
+      </p:sp>
+      <p:sp>
+        <p:nvSpPr>
+          <p:cNvPr id="6" name="TextBox 5"/>
           <p:cNvSpPr txBox="1"/>
           <p:nvPr/>
         </p:nvSpPr>
         <p:spPr>
           <a:xfrm>
-            <a:off x="457200" y="6446520"/>
-            <a:ext cx="8229600" cy="274320"/>
+            <a:off x="365760" y="6473952"/>
+            <a:ext cx="8412480" cy="256032"/>
           </a:xfrm>
           <a:prstGeom prst="rect">
             <a:avLst/>
@@ -8363,13 +7430,13 @@
           <a:p>
             <a:pPr algn="r"/>
             <a:r>
-              <a:rPr sz="900" b="0">
+              <a:rPr sz="1000" b="0">
                 <a:solidFill>
                   <a:srgbClr val="64748B"/>
                 </a:solidFill>
                 <a:latin typeface="Calibri"/>
               </a:rPr>
-              <a:t>Confidential — Risk Committee | Exxsol D40 Supply Chain Integrity</a:t>
+              <a:t>Confidential — Risk Committee | Exxsol D40</a:t>
             </a:r>
           </a:p>
         </p:txBody>
@@ -8401,7 +7468,7 @@
         <p:spPr>
           <a:xfrm>
             <a:off x="0" y="0"/>
-            <a:ext cx="9144000" cy="1051560"/>
+            <a:ext cx="9144000" cy="1097280"/>
           </a:xfrm>
           <a:prstGeom prst="rect">
             <a:avLst/>
@@ -8443,8 +7510,8 @@
         </p:nvSpPr>
         <p:spPr>
           <a:xfrm>
-            <a:off x="502920" y="201168"/>
-            <a:ext cx="8046720" cy="502920"/>
+            <a:off x="411480" y="164592"/>
+            <a:ext cx="8321040" cy="566928"/>
           </a:xfrm>
           <a:prstGeom prst="rect">
             <a:avLst/>
@@ -8458,7 +7525,7 @@
           <a:lstStyle/>
           <a:p>
             <a:r>
-              <a:rPr sz="2800" b="1">
+              <a:rPr sz="3400" b="1">
                 <a:solidFill>
                   <a:srgbClr val="FFFFFF"/>
                 </a:solidFill>
@@ -8477,8 +7544,8 @@
         </p:nvSpPr>
         <p:spPr>
           <a:xfrm>
-            <a:off x="502920" y="658368"/>
-            <a:ext cx="8046720" cy="320040"/>
+            <a:off x="411480" y="658368"/>
+            <a:ext cx="8321040" cy="347472"/>
           </a:xfrm>
           <a:prstGeom prst="rect">
             <a:avLst/>
@@ -8492,27 +7559,51 @@
           <a:lstStyle/>
           <a:p>
             <a:r>
-              <a:rPr sz="1400" b="0">
+              <a:rPr sz="1800" b="0">
                 <a:solidFill>
                   <a:srgbClr val="CBE5F0"/>
                 </a:solidFill>
                 <a:latin typeface="Calibri"/>
               </a:rPr>
-              <a:t>Why Exxsol D40 Is on the Risk Agenda</a:t>
-            </a:r>
-          </a:p>
-        </p:txBody>
-      </p:sp>
-      <p:sp>
-        <p:nvSpPr>
-          <p:cNvPr id="5" name="TextBox 4"/>
+              <a:t>Why D40 Is on the Agenda</a:t>
+            </a:r>
+          </a:p>
+        </p:txBody>
+      </p:sp>
+      <p:pic>
+        <p:nvPicPr>
+          <p:cNvPr id="5" name="Picture 4" descr="04_business.png"/>
+          <p:cNvPicPr>
+            <a:picLocks noChangeAspect="1"/>
+          </p:cNvPicPr>
+          <p:nvPr/>
+        </p:nvPicPr>
+        <p:blipFill>
+          <a:blip r:embed="rId2"/>
+          <a:stretch>
+            <a:fillRect/>
+          </a:stretch>
+        </p:blipFill>
+        <p:spPr>
+          <a:xfrm>
+            <a:off x="5806440" y="1234440"/>
+            <a:ext cx="3063240" cy="4892040"/>
+          </a:xfrm>
+          <a:prstGeom prst="rect">
+            <a:avLst/>
+          </a:prstGeom>
+        </p:spPr>
+      </p:pic>
+      <p:sp>
+        <p:nvSpPr>
+          <p:cNvPr id="6" name="TextBox 5"/>
           <p:cNvSpPr txBox="1"/>
           <p:nvPr/>
         </p:nvSpPr>
         <p:spPr>
           <a:xfrm>
-            <a:off x="594360" y="1325880"/>
-            <a:ext cx="7955279" cy="5029200"/>
+            <a:off x="411480" y="1234440"/>
+            <a:ext cx="5166360" cy="5120640"/>
           </a:xfrm>
           <a:prstGeom prst="rect">
             <a:avLst/>
@@ -8527,110 +7618,91 @@
           <a:p>
             <a:pPr>
               <a:spcBef>
-                <a:spcPts val="200"/>
+                <a:spcPts val="400"/>
               </a:spcBef>
               <a:spcAft>
-                <a:spcPts val="948"/>
+                <a:spcPts val="1400"/>
               </a:spcAft>
             </a:pPr>
             <a:r>
-              <a:rPr sz="1500" b="0">
+              <a:rPr sz="2400" b="0">
                 <a:solidFill>
                   <a:srgbClr val="334155"/>
                 </a:solidFill>
                 <a:latin typeface="Calibri"/>
               </a:rPr>
-              <a:t>Application: degreasing and precision cleaning of sintered PM parts where porosity traps machining oils, waxes, and cutting fluids.</a:t>
+              <a:t>• PM pores trap oils — need residue-free clean</a:t>
             </a:r>
           </a:p>
           <a:p>
             <a:pPr>
               <a:spcBef>
-                <a:spcPts val="200"/>
+                <a:spcPts val="400"/>
               </a:spcBef>
               <a:spcAft>
-                <a:spcPts val="948"/>
+                <a:spcPts val="1400"/>
               </a:spcAft>
             </a:pPr>
             <a:r>
-              <a:rPr sz="1500" b="0">
+              <a:rPr sz="2400" b="0">
                 <a:solidFill>
                   <a:srgbClr val="334155"/>
                 </a:solidFill>
                 <a:latin typeface="Calibri"/>
               </a:rPr>
-              <a:t>Process criticality: residual solvent in pores can block plating adhesion, cause coating defects, or promote in-process corrosion.</a:t>
+              <a:t>• D40: fast dry, low odor, metal-safe</a:t>
             </a:r>
           </a:p>
           <a:p>
             <a:pPr>
               <a:spcBef>
-                <a:spcPts val="200"/>
+                <a:spcPts val="400"/>
               </a:spcBef>
               <a:spcAft>
-                <a:spcPts val="948"/>
+                <a:spcPts val="1400"/>
               </a:spcAft>
             </a:pPr>
             <a:r>
-              <a:rPr sz="1500" b="0">
+              <a:rPr sz="2400" b="0">
                 <a:solidFill>
                   <a:srgbClr val="334155"/>
                 </a:solidFill>
                 <a:latin typeface="Calibri"/>
               </a:rPr>
-              <a:t>D40 is selected for: strong solvency, predictable evaporation, low odor/toxicity, and compatibility with metals and many elastomers.</a:t>
+              <a:t>• Not a commodity — specs are critical</a:t>
             </a:r>
           </a:p>
           <a:p>
             <a:pPr>
               <a:spcBef>
-                <a:spcPts val="200"/>
+                <a:spcPts val="400"/>
               </a:spcBef>
               <a:spcAft>
-                <a:spcPts val="948"/>
+                <a:spcPts val="1400"/>
               </a:spcAft>
             </a:pPr>
             <a:r>
-              <a:rPr sz="1500" b="0">
+              <a:rPr sz="2400" b="0">
                 <a:solidFill>
                   <a:srgbClr val="334155"/>
                 </a:solidFill>
                 <a:latin typeface="Calibri"/>
               </a:rPr>
-              <a:t>Specification sensitivity: D40 is not a commodity solvent — performance depends on tight control of distillation range, flash point, and aromatic content.</a:t>
-            </a:r>
-          </a:p>
-          <a:p>
-            <a:pPr>
-              <a:spcBef>
-                <a:spcPts val="200"/>
-              </a:spcBef>
-              <a:spcAft>
-                <a:spcPts val="948"/>
-              </a:spcAft>
-            </a:pPr>
-            <a:r>
-              <a:rPr sz="1500" b="0">
-                <a:solidFill>
-                  <a:srgbClr val="334155"/>
-                </a:solidFill>
-                <a:latin typeface="Calibri"/>
-              </a:rPr>
-              <a:t>Supply chain complexity: multiple regional distributors, look-alike products (e.g., generic “Isoparaffin D40”), and relabeled drums increase fraud exposure.</a:t>
-            </a:r>
-          </a:p>
-        </p:txBody>
-      </p:sp>
-      <p:sp>
-        <p:nvSpPr>
-          <p:cNvPr id="6" name="TextBox 5"/>
+              <a:t>• Look-alike solvents increase fraud risk</a:t>
+            </a:r>
+          </a:p>
+        </p:txBody>
+      </p:sp>
+      <p:sp>
+        <p:nvSpPr>
+          <p:cNvPr id="7" name="TextBox 6"/>
           <p:cNvSpPr txBox="1"/>
           <p:nvPr/>
         </p:nvSpPr>
         <p:spPr>
           <a:xfrm>
-            <a:off x="457200" y="6446520"/>
-            <a:ext cx="8229600" cy="274320"/>
+            <a:off x="365760" y="6473952"/>
+            <a:ext cx="8412480" cy="256032"/>
           </a:xfrm>
           <a:prstGeom prst="rect">
             <a:avLst/>
@@ -8645,13 +7717,13 @@
           <a:p>
             <a:pPr algn="r"/>
             <a:r>
-              <a:rPr sz="900" b="0">
+              <a:rPr sz="1000" b="0">
                 <a:solidFill>
                   <a:srgbClr val="64748B"/>
                 </a:solidFill>
                 <a:latin typeface="Calibri"/>
               </a:rPr>
-              <a:t>Confidential — Risk Committee | Exxsol D40 Supply Chain Integrity</a:t>
+              <a:t>Confidential — Risk Committee | Exxsol D40</a:t>
             </a:r>
           </a:p>
         </p:txBody>
@@ -8683,7 +7755,7 @@
         <p:spPr>
           <a:xfrm>
             <a:off x="0" y="0"/>
-            <a:ext cx="9144000" cy="1051560"/>
+            <a:ext cx="9144000" cy="1097280"/>
           </a:xfrm>
           <a:prstGeom prst="rect">
             <a:avLst/>
@@ -8725,8 +7797,8 @@
         </p:nvSpPr>
         <p:spPr>
           <a:xfrm>
-            <a:off x="502920" y="201168"/>
-            <a:ext cx="8046720" cy="502920"/>
+            <a:off x="411480" y="164592"/>
+            <a:ext cx="8321040" cy="566928"/>
           </a:xfrm>
           <a:prstGeom prst="rect">
             <a:avLst/>
@@ -8740,28 +7812,86 @@
           <a:lstStyle/>
           <a:p>
             <a:r>
-              <a:rPr sz="2800" b="1">
+              <a:rPr sz="3400" b="1">
                 <a:solidFill>
                   <a:srgbClr val="FFFFFF"/>
                 </a:solidFill>
                 <a:latin typeface="Calibri"/>
               </a:rPr>
-              <a:t>Product Profile — Exxsol D40</a:t>
-            </a:r>
-          </a:p>
-        </p:txBody>
-      </p:sp>
+              <a:t>Product Profile</a:t>
+            </a:r>
+          </a:p>
+        </p:txBody>
+      </p:sp>
+      <p:sp>
+        <p:nvSpPr>
+          <p:cNvPr id="4" name="TextBox 3"/>
+          <p:cNvSpPr txBox="1"/>
+          <p:nvPr/>
+        </p:nvSpPr>
+        <p:spPr>
+          <a:xfrm>
+            <a:off x="411480" y="658368"/>
+            <a:ext cx="8321040" cy="347472"/>
+          </a:xfrm>
+          <a:prstGeom prst="rect">
+            <a:avLst/>
+          </a:prstGeom>
+          <a:noFill/>
+        </p:spPr>
+        <p:txBody>
+          <a:bodyPr wrap="none">
+            <a:spAutoFit/>
+          </a:bodyPr>
+          <a:lstStyle/>
+          <a:p>
+            <a:r>
+              <a:rPr sz="1800" b="0">
+                <a:solidFill>
+                  <a:srgbClr val="CBE5F0"/>
+                </a:solidFill>
+                <a:latin typeface="Calibri"/>
+              </a:rPr>
+              <a:t>Exxsol D40 Key Specs</a:t>
+            </a:r>
+          </a:p>
+        </p:txBody>
+      </p:sp>
+      <p:pic>
+        <p:nvPicPr>
+          <p:cNvPr id="5" name="Picture 4" descr="05_product.png"/>
+          <p:cNvPicPr>
+            <a:picLocks noChangeAspect="1"/>
+          </p:cNvPicPr>
+          <p:nvPr/>
+        </p:nvPicPr>
+        <p:blipFill>
+          <a:blip r:embed="rId2"/>
+          <a:stretch>
+            <a:fillRect/>
+          </a:stretch>
+        </p:blipFill>
+        <p:spPr>
+          <a:xfrm>
+            <a:off x="5806440" y="1234440"/>
+            <a:ext cx="3063240" cy="4892040"/>
+          </a:xfrm>
+          <a:prstGeom prst="rect">
+            <a:avLst/>
+          </a:prstGeom>
+        </p:spPr>
+      </p:pic>
       <p:graphicFrame>
         <p:nvGraphicFramePr>
-          <p:cNvPr id="4" name="Table 3"/>
+          <p:cNvPr id="6" name="Table 5"/>
           <p:cNvGraphicFramePr>
             <a:graphicFrameLocks noGrp="1"/>
           </p:cNvGraphicFramePr>
           <p:nvPr/>
         </p:nvGraphicFramePr>
         <p:xfrm>
-          <a:off x="502920" y="1417320"/>
-          <a:ext cx="8229600" cy="3730752"/>
+          <a:off x="411480" y="1234440"/>
+          <a:ext cx="5166360" cy="1920240"/>
         </p:xfrm>
         <a:graphic>
           <a:graphicData uri="http://schemas.openxmlformats.org/drawingml/2006/table">
@@ -8770,25 +7900,24 @@
                 <a:tableStyleId>{5C22544A-7EE6-4342-B048-85BDC9FD1C3A}</a:tableStyleId>
               </a:tblPr>
               <a:tblGrid>
-                <a:gridCol w="1463040"/>
-                <a:gridCol w="2194560"/>
-                <a:gridCol w="4572000"/>
+                <a:gridCol w="1188720"/>
+                <a:gridCol w="1371600"/>
+                <a:gridCol w="2606040"/>
               </a:tblGrid>
-              <a:tr h="414528">
+              <a:tr h="384048">
                 <a:tc>
                   <a:txBody>
                     <a:bodyPr/>
                     <a:lstStyle/>
                     <a:p>
-                      <a:pPr algn="ctr"/>
                       <a:r>
-                        <a:rPr sz="1100" b="1">
+                        <a:rPr sz="1300" b="1">
                           <a:solidFill>
                             <a:srgbClr val="FFFFFF"/>
                           </a:solidFill>
                           <a:latin typeface="Calibri"/>
                         </a:rPr>
-                        <a:t>Parameter</a:t>
+                        <a:t>Spec</a:t>
                       </a:r>
                     </a:p>
                   </a:txBody>
@@ -8803,15 +7932,14 @@
                     <a:bodyPr/>
                     <a:lstStyle/>
                     <a:p>
-                      <a:pPr algn="ctr"/>
                       <a:r>
-                        <a:rPr sz="1100" b="1">
+                        <a:rPr sz="1300" b="1">
                           <a:solidFill>
                             <a:srgbClr val="FFFFFF"/>
                           </a:solidFill>
                           <a:latin typeface="Calibri"/>
                         </a:rPr>
-                        <a:t>Typical Specification</a:t>
+                        <a:t>Value</a:t>
                       </a:r>
                     </a:p>
                   </a:txBody>
@@ -8826,15 +7954,14 @@
                     <a:bodyPr/>
                     <a:lstStyle/>
                     <a:p>
-                      <a:pPr algn="ctr"/>
                       <a:r>
-                        <a:rPr sz="1100" b="1">
+                        <a:rPr sz="1300" b="1">
                           <a:solidFill>
                             <a:srgbClr val="FFFFFF"/>
                           </a:solidFill>
                           <a:latin typeface="Calibri"/>
                         </a:rPr>
-                        <a:t>Operational Significance</a:t>
+                        <a:t>Why It Matters</a:t>
                       </a:r>
                     </a:p>
                   </a:txBody>
@@ -8845,21 +7972,20 @@
                   </a:tcPr>
                 </a:tc>
               </a:tr>
-              <a:tr h="414528">
+              <a:tr h="384048">
                 <a:tc>
                   <a:txBody>
                     <a:bodyPr/>
                     <a:lstStyle/>
                     <a:p>
-                      <a:pPr algn="ctr"/>
                       <a:r>
-                        <a:rPr sz="1000" b="0">
+                        <a:rPr sz="1200" b="0">
                           <a:solidFill>
                             <a:srgbClr val="334155"/>
                           </a:solidFill>
                           <a:latin typeface="Calibri"/>
                         </a:rPr>
-                        <a:t>Composition</a:t>
+                        <a:t>Distillation</a:t>
                       </a:r>
                     </a:p>
                   </a:txBody>
@@ -8870,1432 +7996,8 @@
                     <a:bodyPr/>
                     <a:lstStyle/>
                     <a:p>
-                      <a:pPr algn="l"/>
                       <a:r>
-                        <a:rPr sz="1000" b="0">
-                          <a:solidFill>
-                            <a:srgbClr val="334155"/>
-                          </a:solidFill>
-                          <a:latin typeface="Calibri"/>
-                        </a:rPr>
-                        <a:t>Dearomatized isoparaffinic hydrocarbon</a:t>
-                      </a:r>
-                    </a:p>
-                  </a:txBody>
-                  <a:tcPr/>
-                </a:tc>
-                <a:tc>
-                  <a:txBody>
-                    <a:bodyPr/>
-                    <a:lstStyle/>
-                    <a:p>
-                      <a:pPr algn="l"/>
-                      <a:r>
-                        <a:rPr sz="1000" b="0">
-                          <a:solidFill>
-                            <a:srgbClr val="334155"/>
-                          </a:solidFill>
-                          <a:latin typeface="Calibri"/>
-                        </a:rPr>
-                        <a:t>Low toxicity; mild to polymers</a:t>
-                      </a:r>
-                    </a:p>
-                  </a:txBody>
-                  <a:tcPr/>
-                </a:tc>
-              </a:tr>
-              <a:tr h="414528">
-                <a:tc>
-                  <a:txBody>
-                    <a:bodyPr/>
-                    <a:lstStyle/>
-                    <a:p>
-                      <a:pPr algn="ctr"/>
-                      <a:r>
-                        <a:rPr sz="1000" b="0">
-                          <a:solidFill>
-                            <a:srgbClr val="334155"/>
-                          </a:solidFill>
-                          <a:latin typeface="Calibri"/>
-                        </a:rPr>
-                        <a:t>Distillation (IBP–DP)</a:t>
-                      </a:r>
-                    </a:p>
-                  </a:txBody>
-                  <a:tcPr>
-                    <a:solidFill>
-                      <a:srgbClr val="F1F5F9"/>
-                    </a:solidFill>
-                  </a:tcPr>
-                </a:tc>
-                <a:tc>
-                  <a:txBody>
-                    <a:bodyPr/>
-                    <a:lstStyle/>
-                    <a:p>
-                      <a:pPr algn="l"/>
-                      <a:r>
-                        <a:rPr sz="1000" b="0">
-                          <a:solidFill>
-                            <a:srgbClr val="334155"/>
-                          </a:solidFill>
-                          <a:latin typeface="Calibri"/>
-                        </a:rPr>
-                        <a:t>~163–187 °C (narrow range)</a:t>
-                      </a:r>
-                    </a:p>
-                  </a:txBody>
-                  <a:tcPr>
-                    <a:solidFill>
-                      <a:srgbClr val="F1F5F9"/>
-                    </a:solidFill>
-                  </a:tcPr>
-                </a:tc>
-                <a:tc>
-                  <a:txBody>
-                    <a:bodyPr/>
-                    <a:lstStyle/>
-                    <a:p>
-                      <a:pPr algn="l"/>
-                      <a:r>
-                        <a:rPr sz="1000" b="0">
-                          <a:solidFill>
-                            <a:srgbClr val="334155"/>
-                          </a:solidFill>
-                          <a:latin typeface="Calibri"/>
-                        </a:rPr>
-                        <a:t>Consistent drying; no heavy-end residue in pores</a:t>
-                      </a:r>
-                    </a:p>
-                  </a:txBody>
-                  <a:tcPr>
-                    <a:solidFill>
-                      <a:srgbClr val="F1F5F9"/>
-                    </a:solidFill>
-                  </a:tcPr>
-                </a:tc>
-              </a:tr>
-              <a:tr h="414528">
-                <a:tc>
-                  <a:txBody>
-                    <a:bodyPr/>
-                    <a:lstStyle/>
-                    <a:p>
-                      <a:pPr algn="ctr"/>
-                      <a:r>
-                        <a:rPr sz="1000" b="0">
-                          <a:solidFill>
-                            <a:srgbClr val="334155"/>
-                          </a:solidFill>
-                          <a:latin typeface="Calibri"/>
-                        </a:rPr>
-                        <a:t>Flash point</a:t>
-                      </a:r>
-                    </a:p>
-                  </a:txBody>
-                  <a:tcPr/>
-                </a:tc>
-                <a:tc>
-                  <a:txBody>
-                    <a:bodyPr/>
-                    <a:lstStyle/>
-                    <a:p>
-                      <a:pPr algn="l"/>
-                      <a:r>
-                        <a:rPr sz="1000" b="0">
-                          <a:solidFill>
-                            <a:srgbClr val="334155"/>
-                          </a:solidFill>
-                          <a:latin typeface="Calibri"/>
-                        </a:rPr>
-                        <a:t>~48 °C</a:t>
-                      </a:r>
-                    </a:p>
-                  </a:txBody>
-                  <a:tcPr/>
-                </a:tc>
-                <a:tc>
-                  <a:txBody>
-                    <a:bodyPr/>
-                    <a:lstStyle/>
-                    <a:p>
-                      <a:pPr algn="l"/>
-                      <a:r>
-                        <a:rPr sz="1000" b="0">
-                          <a:solidFill>
-                            <a:srgbClr val="334155"/>
-                          </a:solidFill>
-                          <a:latin typeface="Calibri"/>
-                        </a:rPr>
-                        <a:t>Flammable — requires ignition-source controls</a:t>
-                      </a:r>
-                    </a:p>
-                  </a:txBody>
-                  <a:tcPr/>
-                </a:tc>
-              </a:tr>
-              <a:tr h="414528">
-                <a:tc>
-                  <a:txBody>
-                    <a:bodyPr/>
-                    <a:lstStyle/>
-                    <a:p>
-                      <a:pPr algn="ctr"/>
-                      <a:r>
-                        <a:rPr sz="1000" b="0">
-                          <a:solidFill>
-                            <a:srgbClr val="334155"/>
-                          </a:solidFill>
-                          <a:latin typeface="Calibri"/>
-                        </a:rPr>
-                        <a:t>Aromatic content</a:t>
-                      </a:r>
-                    </a:p>
-                  </a:txBody>
-                  <a:tcPr>
-                    <a:solidFill>
-                      <a:srgbClr val="F1F5F9"/>
-                    </a:solidFill>
-                  </a:tcPr>
-                </a:tc>
-                <a:tc>
-                  <a:txBody>
-                    <a:bodyPr/>
-                    <a:lstStyle/>
-                    <a:p>
-                      <a:pPr algn="l"/>
-                      <a:r>
-                        <a:rPr sz="1000" b="0">
-                          <a:solidFill>
-                            <a:srgbClr val="334155"/>
-                          </a:solidFill>
-                          <a:latin typeface="Calibri"/>
-                        </a:rPr>
-                        <a:t>&lt;0.1% (often &lt;0.001%)</a:t>
-                      </a:r>
-                    </a:p>
-                  </a:txBody>
-                  <a:tcPr>
-                    <a:solidFill>
-                      <a:srgbClr val="F1F5F9"/>
-                    </a:solidFill>
-                  </a:tcPr>
-                </a:tc>
-                <a:tc>
-                  <a:txBody>
-                    <a:bodyPr/>
-                    <a:lstStyle/>
-                    <a:p>
-                      <a:pPr algn="l"/>
-                      <a:r>
-                        <a:rPr sz="1000" b="0">
-                          <a:solidFill>
-                            <a:srgbClr val="334155"/>
-                          </a:solidFill>
-                          <a:latin typeface="Calibri"/>
-                        </a:rPr>
-                        <a:t>Low odor; reduced HSE risk; clean surface</a:t>
-                      </a:r>
-                    </a:p>
-                  </a:txBody>
-                  <a:tcPr>
-                    <a:solidFill>
-                      <a:srgbClr val="F1F5F9"/>
-                    </a:solidFill>
-                  </a:tcPr>
-                </a:tc>
-              </a:tr>
-              <a:tr h="414528">
-                <a:tc>
-                  <a:txBody>
-                    <a:bodyPr/>
-                    <a:lstStyle/>
-                    <a:p>
-                      <a:pPr algn="ctr"/>
-                      <a:r>
-                        <a:rPr sz="1000" b="0">
-                          <a:solidFill>
-                            <a:srgbClr val="334155"/>
-                          </a:solidFill>
-                          <a:latin typeface="Calibri"/>
-                        </a:rPr>
-                        <a:t>Density @ 15 °C</a:t>
-                      </a:r>
-                    </a:p>
-                  </a:txBody>
-                  <a:tcPr/>
-                </a:tc>
-                <a:tc>
-                  <a:txBody>
-                    <a:bodyPr/>
-                    <a:lstStyle/>
-                    <a:p>
-                      <a:pPr algn="l"/>
-                      <a:r>
-                        <a:rPr sz="1000" b="0">
-                          <a:solidFill>
-                            <a:srgbClr val="334155"/>
-                          </a:solidFill>
-                          <a:latin typeface="Calibri"/>
-                        </a:rPr>
-                        <a:t>~0.775 g/cm³</a:t>
-                      </a:r>
-                    </a:p>
-                  </a:txBody>
-                  <a:tcPr/>
-                </a:tc>
-                <a:tc>
-                  <a:txBody>
-                    <a:bodyPr/>
-                    <a:lstStyle/>
-                    <a:p>
-                      <a:pPr algn="l"/>
-                      <a:r>
-                        <a:rPr sz="1000" b="0">
-                          <a:solidFill>
-                            <a:srgbClr val="334155"/>
-                          </a:solidFill>
-                          <a:latin typeface="Calibri"/>
-                        </a:rPr>
-                        <a:t>Batch consistency indicator</a:t>
-                      </a:r>
-                    </a:p>
-                  </a:txBody>
-                  <a:tcPr/>
-                </a:tc>
-              </a:tr>
-              <a:tr h="414528">
-                <a:tc>
-                  <a:txBody>
-                    <a:bodyPr/>
-                    <a:lstStyle/>
-                    <a:p>
-                      <a:pPr algn="ctr"/>
-                      <a:r>
-                        <a:rPr sz="1000" b="0">
-                          <a:solidFill>
-                            <a:srgbClr val="334155"/>
-                          </a:solidFill>
-                          <a:latin typeface="Calibri"/>
-                        </a:rPr>
-                        <a:t>Viscosity @ 25 °C</a:t>
-                      </a:r>
-                    </a:p>
-                  </a:txBody>
-                  <a:tcPr>
-                    <a:solidFill>
-                      <a:srgbClr val="F1F5F9"/>
-                    </a:solidFill>
-                  </a:tcPr>
-                </a:tc>
-                <a:tc>
-                  <a:txBody>
-                    <a:bodyPr/>
-                    <a:lstStyle/>
-                    <a:p>
-                      <a:pPr algn="l"/>
-                      <a:r>
-                        <a:rPr sz="1000" b="0">
-                          <a:solidFill>
-                            <a:srgbClr val="334155"/>
-                          </a:solidFill>
-                          <a:latin typeface="Calibri"/>
-                        </a:rPr>
-                        <a:t>~1.28 mm²/s</a:t>
-                      </a:r>
-                    </a:p>
-                  </a:txBody>
-                  <a:tcPr>
-                    <a:solidFill>
-                      <a:srgbClr val="F1F5F9"/>
-                    </a:solidFill>
-                  </a:tcPr>
-                </a:tc>
-                <a:tc>
-                  <a:txBody>
-                    <a:bodyPr/>
-                    <a:lstStyle/>
-                    <a:p>
-                      <a:pPr algn="l"/>
-                      <a:r>
-                        <a:rPr sz="1000" b="0">
-                          <a:solidFill>
-                            <a:srgbClr val="334155"/>
-                          </a:solidFill>
-                          <a:latin typeface="Calibri"/>
-                        </a:rPr>
-                        <a:t>Penetration into porous PM geometry</a:t>
-                      </a:r>
-                    </a:p>
-                  </a:txBody>
-                  <a:tcPr>
-                    <a:solidFill>
-                      <a:srgbClr val="F1F5F9"/>
-                    </a:solidFill>
-                  </a:tcPr>
-                </a:tc>
-              </a:tr>
-              <a:tr h="414528">
-                <a:tc>
-                  <a:txBody>
-                    <a:bodyPr/>
-                    <a:lstStyle/>
-                    <a:p>
-                      <a:pPr algn="ctr"/>
-                      <a:r>
-                        <a:rPr sz="1000" b="0">
-                          <a:solidFill>
-                            <a:srgbClr val="334155"/>
-                          </a:solidFill>
-                          <a:latin typeface="Calibri"/>
-                        </a:rPr>
-                        <a:t>KB value (solvency)</a:t>
-                      </a:r>
-                    </a:p>
-                  </a:txBody>
-                  <a:tcPr/>
-                </a:tc>
-                <a:tc>
-                  <a:txBody>
-                    <a:bodyPr/>
-                    <a:lstStyle/>
-                    <a:p>
-                      <a:pPr algn="l"/>
-                      <a:r>
-                        <a:rPr sz="1000" b="0">
-                          <a:solidFill>
-                            <a:srgbClr val="334155"/>
-                          </a:solidFill>
-                          <a:latin typeface="Calibri"/>
-                        </a:rPr>
-                        <a:t>~31</a:t>
-                      </a:r>
-                    </a:p>
-                  </a:txBody>
-                  <a:tcPr/>
-                </a:tc>
-                <a:tc>
-                  <a:txBody>
-                    <a:bodyPr/>
-                    <a:lstStyle/>
-                    <a:p>
-                      <a:pPr algn="l"/>
-                      <a:r>
-                        <a:rPr sz="1000" b="0">
-                          <a:solidFill>
-                            <a:srgbClr val="334155"/>
-                          </a:solidFill>
-                          <a:latin typeface="Calibri"/>
-                        </a:rPr>
-                        <a:t>Controlled removal of oils and greases</a:t>
-                      </a:r>
-                    </a:p>
-                  </a:txBody>
-                  <a:tcPr/>
-                </a:tc>
-              </a:tr>
-              <a:tr h="414528">
-                <a:tc>
-                  <a:txBody>
-                    <a:bodyPr/>
-                    <a:lstStyle/>
-                    <a:p>
-                      <a:pPr algn="ctr"/>
-                      <a:r>
-                        <a:rPr sz="1000" b="0">
-                          <a:solidFill>
-                            <a:srgbClr val="334155"/>
-                          </a:solidFill>
-                          <a:latin typeface="Calibri"/>
-                        </a:rPr>
-                        <a:t>OEL (8-hr TWA)</a:t>
-                      </a:r>
-                    </a:p>
-                  </a:txBody>
-                  <a:tcPr>
-                    <a:solidFill>
-                      <a:srgbClr val="F1F5F9"/>
-                    </a:solidFill>
-                  </a:tcPr>
-                </a:tc>
-                <a:tc>
-                  <a:txBody>
-                    <a:bodyPr/>
-                    <a:lstStyle/>
-                    <a:p>
-                      <a:pPr algn="l"/>
-                      <a:r>
-                        <a:rPr sz="1000" b="0">
-                          <a:solidFill>
-                            <a:srgbClr val="334155"/>
-                          </a:solidFill>
-                          <a:latin typeface="Calibri"/>
-                        </a:rPr>
-                        <a:t>1,200 mg/m³</a:t>
-                      </a:r>
-                    </a:p>
-                  </a:txBody>
-                  <a:tcPr>
-                    <a:solidFill>
-                      <a:srgbClr val="F1F5F9"/>
-                    </a:solidFill>
-                  </a:tcPr>
-                </a:tc>
-                <a:tc>
-                  <a:txBody>
-                    <a:bodyPr/>
-                    <a:lstStyle/>
-                    <a:p>
-                      <a:pPr algn="l"/>
-                      <a:r>
-                        <a:rPr sz="1000" b="0">
-                          <a:solidFill>
-                            <a:srgbClr val="334155"/>
-                          </a:solidFill>
-                          <a:latin typeface="Calibri"/>
-                        </a:rPr>
-                        <a:t>~4× higher than white spirit (~300 mg/m³)</a:t>
-                      </a:r>
-                    </a:p>
-                  </a:txBody>
-                  <a:tcPr>
-                    <a:solidFill>
-                      <a:srgbClr val="F1F5F9"/>
-                    </a:solidFill>
-                  </a:tcPr>
-                </a:tc>
-              </a:tr>
-            </a:tbl>
-          </a:graphicData>
-        </a:graphic>
-      </p:graphicFrame>
-      <p:sp>
-        <p:nvSpPr>
-          <p:cNvPr id="5" name="TextBox 4"/>
-          <p:cNvSpPr txBox="1"/>
-          <p:nvPr/>
-        </p:nvSpPr>
-        <p:spPr>
-          <a:xfrm>
-            <a:off x="457200" y="6446520"/>
-            <a:ext cx="8229600" cy="274320"/>
-          </a:xfrm>
-          <a:prstGeom prst="rect">
-            <a:avLst/>
-          </a:prstGeom>
-          <a:noFill/>
-        </p:spPr>
-        <p:txBody>
-          <a:bodyPr wrap="none">
-            <a:spAutoFit/>
-          </a:bodyPr>
-          <a:lstStyle/>
-          <a:p>
-            <a:pPr algn="r"/>
-            <a:r>
-              <a:rPr sz="900" b="0">
-                <a:solidFill>
-                  <a:srgbClr val="64748B"/>
-                </a:solidFill>
-                <a:latin typeface="Calibri"/>
-              </a:rPr>
-              <a:t>Confidential — Risk Committee | Exxsol D40 Supply Chain Integrity</a:t>
-            </a:r>
-          </a:p>
-        </p:txBody>
-      </p:sp>
-    </p:spTree>
-  </p:cSld>
-  <p:clrMapOvr>
-    <a:masterClrMapping/>
-  </p:clrMapOvr>
-</p:sld>
-</file>
-
-<file path=ppt/slides/slide6.xml><?xml version="1.0" encoding="utf-8"?>
-<p:sld xmlns:a="http://schemas.openxmlformats.org/drawingml/2006/main" xmlns:p="http://schemas.openxmlformats.org/presentationml/2006/main" xmlns:r="http://schemas.openxmlformats.org/officeDocument/2006/relationships">
-  <p:cSld>
-    <p:spTree>
-      <p:nvGrpSpPr>
-        <p:cNvPr id="1" name=""/>
-        <p:cNvGrpSpPr/>
-        <p:nvPr/>
-      </p:nvGrpSpPr>
-      <p:grpSpPr/>
-      <p:sp>
-        <p:nvSpPr>
-          <p:cNvPr id="2" name="Rectangle 1"/>
-          <p:cNvSpPr/>
-          <p:nvPr/>
-        </p:nvSpPr>
-        <p:spPr>
-          <a:xfrm>
-            <a:off x="0" y="0"/>
-            <a:ext cx="9144000" cy="1051560"/>
-          </a:xfrm>
-          <a:prstGeom prst="rect">
-            <a:avLst/>
-          </a:prstGeom>
-          <a:solidFill>
-            <a:srgbClr val="002B5C"/>
-          </a:solidFill>
-          <a:ln>
-            <a:noFill/>
-          </a:ln>
-        </p:spPr>
-        <p:style>
-          <a:lnRef idx="1">
-            <a:schemeClr val="accent1"/>
-          </a:lnRef>
-          <a:fillRef idx="3">
-            <a:schemeClr val="accent1"/>
-          </a:fillRef>
-          <a:effectRef idx="2">
-            <a:schemeClr val="accent1"/>
-          </a:effectRef>
-          <a:fontRef idx="minor">
-            <a:schemeClr val="lt1"/>
-          </a:fontRef>
-        </p:style>
-        <p:txBody>
-          <a:bodyPr rtlCol="0" anchor="ctr"/>
-          <a:lstStyle/>
-          <a:p>
-            <a:pPr algn="ctr"/>
-          </a:p>
-        </p:txBody>
-      </p:sp>
-      <p:sp>
-        <p:nvSpPr>
-          <p:cNvPr id="3" name="TextBox 2"/>
-          <p:cNvSpPr txBox="1"/>
-          <p:nvPr/>
-        </p:nvSpPr>
-        <p:spPr>
-          <a:xfrm>
-            <a:off x="502920" y="201168"/>
-            <a:ext cx="8046720" cy="502920"/>
-          </a:xfrm>
-          <a:prstGeom prst="rect">
-            <a:avLst/>
-          </a:prstGeom>
-          <a:noFill/>
-        </p:spPr>
-        <p:txBody>
-          <a:bodyPr wrap="none">
-            <a:spAutoFit/>
-          </a:bodyPr>
-          <a:lstStyle/>
-          <a:p>
-            <a:r>
-              <a:rPr sz="2800" b="1">
-                <a:solidFill>
-                  <a:srgbClr val="FFFFFF"/>
-                </a:solidFill>
-                <a:latin typeface="Calibri"/>
-              </a:rPr>
-              <a:t>Technical Foundation: Boiling Range</a:t>
-            </a:r>
-          </a:p>
-        </p:txBody>
-      </p:sp>
-      <p:sp>
-        <p:nvSpPr>
-          <p:cNvPr id="4" name="TextBox 3"/>
-          <p:cNvSpPr txBox="1"/>
-          <p:nvPr/>
-        </p:nvSpPr>
-        <p:spPr>
-          <a:xfrm>
-            <a:off x="502920" y="658368"/>
-            <a:ext cx="8046720" cy="320040"/>
-          </a:xfrm>
-          <a:prstGeom prst="rect">
-            <a:avLst/>
-          </a:prstGeom>
-          <a:noFill/>
-        </p:spPr>
-        <p:txBody>
-          <a:bodyPr wrap="none">
-            <a:spAutoFit/>
-          </a:bodyPr>
-          <a:lstStyle/>
-          <a:p>
-            <a:r>
-              <a:rPr sz="1400" b="0">
-                <a:solidFill>
-                  <a:srgbClr val="CBE5F0"/>
-                </a:solidFill>
-                <a:latin typeface="Calibri"/>
-              </a:rPr>
-              <a:t>Initial Boiling Point (IBP), Dry Point (DP) &amp; Why the Narrow Range Matters</a:t>
-            </a:r>
-          </a:p>
-        </p:txBody>
-      </p:sp>
-      <p:sp>
-        <p:nvSpPr>
-          <p:cNvPr id="5" name="TextBox 4"/>
-          <p:cNvSpPr txBox="1"/>
-          <p:nvPr/>
-        </p:nvSpPr>
-        <p:spPr>
-          <a:xfrm>
-            <a:off x="594360" y="1280160"/>
-            <a:ext cx="7955279" cy="5029200"/>
-          </a:xfrm>
-          <a:prstGeom prst="rect">
-            <a:avLst/>
-          </a:prstGeom>
-          <a:noFill/>
-        </p:spPr>
-        <p:txBody>
-          <a:bodyPr wrap="square" anchor="t">
-            <a:spAutoFit/>
-          </a:bodyPr>
-          <a:lstStyle/>
-          <a:p>
-            <a:pPr>
-              <a:spcBef>
-                <a:spcPts val="200"/>
-              </a:spcBef>
-              <a:spcAft>
-                <a:spcPts val="885"/>
-              </a:spcAft>
-            </a:pPr>
-            <a:r>
-              <a:rPr sz="1400" b="0">
-                <a:solidFill>
-                  <a:srgbClr val="334155"/>
-                </a:solidFill>
-                <a:latin typeface="Calibri"/>
-              </a:rPr>
-              <a:t>IBP (Initial Boiling Point): temperature at which the first distillate appears — reflects the lightest, most volatile components.</a:t>
-            </a:r>
-          </a:p>
-          <a:p>
-            <a:pPr>
-              <a:spcBef>
-                <a:spcPts val="200"/>
-              </a:spcBef>
-              <a:spcAft>
-                <a:spcPts val="885"/>
-              </a:spcAft>
-            </a:pPr>
-            <a:r>
-              <a:rPr sz="1400" b="0">
-                <a:solidFill>
-                  <a:srgbClr val="334155"/>
-                </a:solidFill>
-                <a:latin typeface="Calibri"/>
-              </a:rPr>
-              <a:t>DP (Dry Point): temperature at which the last liquid evaporates — reflects the heaviest, least volatile components.</a:t>
-            </a:r>
-          </a:p>
-          <a:p>
-            <a:pPr>
-              <a:spcBef>
-                <a:spcPts val="200"/>
-              </a:spcBef>
-              <a:spcAft>
-                <a:spcPts val="885"/>
-              </a:spcAft>
-            </a:pPr>
-            <a:r>
-              <a:rPr sz="1400" b="0">
-                <a:solidFill>
-                  <a:srgbClr val="334155"/>
-                </a:solidFill>
-                <a:latin typeface="Calibri"/>
-              </a:rPr>
-              <a:t>Boiling range = DP − IBP. D40’s narrow range (~24 °C) means all components evaporate within a tight temperature window.</a:t>
-            </a:r>
-          </a:p>
-          <a:p>
-            <a:pPr lvl="1">
-              <a:spcBef>
-                <a:spcPts val="200"/>
-              </a:spcBef>
-              <a:spcAft>
-                <a:spcPts val="885"/>
-              </a:spcAft>
-            </a:pPr>
-            <a:r>
-              <a:rPr sz="1200" b="0">
-                <a:solidFill>
-                  <a:srgbClr val="334155"/>
-                </a:solidFill>
-                <a:latin typeface="Calibri"/>
-              </a:rPr>
-              <a:t>Predictable drying on high-volume lines — no parts drying too fast (condensation/rust risk) or too slow (bottleneck).</a:t>
-            </a:r>
-          </a:p>
-          <a:p>
-            <a:pPr lvl="1">
-              <a:spcBef>
-                <a:spcPts val="200"/>
-              </a:spcBef>
-              <a:spcAft>
-                <a:spcPts val="885"/>
-              </a:spcAft>
-            </a:pPr>
-            <a:r>
-              <a:rPr sz="1200" b="0">
-                <a:solidFill>
-                  <a:srgbClr val="334155"/>
-                </a:solidFill>
-                <a:latin typeface="Calibri"/>
-              </a:rPr>
-              <a:t>Equipment setpoints (heaters, condensers, vacuum) remain stable — the fluid behaves as a consistent pseudo-single component.</a:t>
-            </a:r>
-          </a:p>
-          <a:p>
-            <a:pPr lvl="1">
-              <a:spcBef>
-                <a:spcPts val="200"/>
-              </a:spcBef>
-              <a:spcAft>
-                <a:spcPts val="885"/>
-              </a:spcAft>
-            </a:pPr>
-            <a:r>
-              <a:rPr sz="1200" b="0">
-                <a:solidFill>
-                  <a:srgbClr val="334155"/>
-                </a:solidFill>
-                <a:latin typeface="Calibri"/>
-              </a:rPr>
-              <a:t>Critical for PM: wide-range solvents leave heavy ends trapped in pores → sticky/oily residue that standard room-temp drying cannot remove.</a:t>
-            </a:r>
-          </a:p>
-        </p:txBody>
-      </p:sp>
-      <p:sp>
-        <p:nvSpPr>
-          <p:cNvPr id="6" name="Rounded Rectangle 5"/>
-          <p:cNvSpPr/>
-          <p:nvPr/>
-        </p:nvSpPr>
-        <p:spPr>
-          <a:xfrm>
-            <a:off x="594360" y="5349240"/>
-            <a:ext cx="7955279" cy="685800"/>
-          </a:xfrm>
-          <a:prstGeom prst="roundRect">
-            <a:avLst/>
-          </a:prstGeom>
-          <a:solidFill>
-            <a:srgbClr val="FEE2E2"/>
-          </a:solidFill>
-          <a:ln w="15875">
-            <a:solidFill>
-              <a:srgbClr val="B91C1C"/>
-            </a:solidFill>
-          </a:ln>
-        </p:spPr>
-        <p:style>
-          <a:lnRef idx="1">
-            <a:schemeClr val="accent1"/>
-          </a:lnRef>
-          <a:fillRef idx="3">
-            <a:schemeClr val="accent1"/>
-          </a:fillRef>
-          <a:effectRef idx="2">
-            <a:schemeClr val="accent1"/>
-          </a:effectRef>
-          <a:fontRef idx="minor">
-            <a:schemeClr val="lt1"/>
-          </a:fontRef>
-        </p:style>
-        <p:txBody>
-          <a:bodyPr rtlCol="0" anchor="ctr" wrap="square" lIns="137160" rIns="137160" tIns="91440"/>
-          <a:lstStyle/>
-          <a:p>
-            <a:pPr algn="ctr"/>
-            <a:r>
-              <a:rPr sz="1400" b="1">
-                <a:solidFill>
-                  <a:srgbClr val="002B5C"/>
-                </a:solidFill>
-                <a:latin typeface="Calibri"/>
-              </a:rPr>
-              <a:t>Adulteration with low-boiling additives (MC ~40 °C, methanol ~65 °C) collapses this profile — drying becomes unpredictable and residues become inevitable.</a:t>
-            </a:r>
-          </a:p>
-        </p:txBody>
-      </p:sp>
-      <p:sp>
-        <p:nvSpPr>
-          <p:cNvPr id="7" name="TextBox 6"/>
-          <p:cNvSpPr txBox="1"/>
-          <p:nvPr/>
-        </p:nvSpPr>
-        <p:spPr>
-          <a:xfrm>
-            <a:off x="457200" y="6446520"/>
-            <a:ext cx="8229600" cy="274320"/>
-          </a:xfrm>
-          <a:prstGeom prst="rect">
-            <a:avLst/>
-          </a:prstGeom>
-          <a:noFill/>
-        </p:spPr>
-        <p:txBody>
-          <a:bodyPr wrap="none">
-            <a:spAutoFit/>
-          </a:bodyPr>
-          <a:lstStyle/>
-          <a:p>
-            <a:pPr algn="r"/>
-            <a:r>
-              <a:rPr sz="900" b="0">
-                <a:solidFill>
-                  <a:srgbClr val="64748B"/>
-                </a:solidFill>
-                <a:latin typeface="Calibri"/>
-              </a:rPr>
-              <a:t>Confidential — Risk Committee | Exxsol D40 Supply Chain Integrity</a:t>
-            </a:r>
-          </a:p>
-        </p:txBody>
-      </p:sp>
-    </p:spTree>
-  </p:cSld>
-  <p:clrMapOvr>
-    <a:masterClrMapping/>
-  </p:clrMapOvr>
-</p:sld>
-</file>
-
-<file path=ppt/slides/slide7.xml><?xml version="1.0" encoding="utf-8"?>
-<p:sld xmlns:a="http://schemas.openxmlformats.org/drawingml/2006/main" xmlns:p="http://schemas.openxmlformats.org/presentationml/2006/main" xmlns:r="http://schemas.openxmlformats.org/officeDocument/2006/relationships">
-  <p:cSld>
-    <p:spTree>
-      <p:nvGrpSpPr>
-        <p:cNvPr id="1" name=""/>
-        <p:cNvGrpSpPr/>
-        <p:nvPr/>
-      </p:nvGrpSpPr>
-      <p:grpSpPr/>
-      <p:sp>
-        <p:nvSpPr>
-          <p:cNvPr id="2" name="Rectangle 1"/>
-          <p:cNvSpPr/>
-          <p:nvPr/>
-        </p:nvSpPr>
-        <p:spPr>
-          <a:xfrm>
-            <a:off x="0" y="0"/>
-            <a:ext cx="9144000" cy="1051560"/>
-          </a:xfrm>
-          <a:prstGeom prst="rect">
-            <a:avLst/>
-          </a:prstGeom>
-          <a:solidFill>
-            <a:srgbClr val="002B5C"/>
-          </a:solidFill>
-          <a:ln>
-            <a:noFill/>
-          </a:ln>
-        </p:spPr>
-        <p:style>
-          <a:lnRef idx="1">
-            <a:schemeClr val="accent1"/>
-          </a:lnRef>
-          <a:fillRef idx="3">
-            <a:schemeClr val="accent1"/>
-          </a:fillRef>
-          <a:effectRef idx="2">
-            <a:schemeClr val="accent1"/>
-          </a:effectRef>
-          <a:fontRef idx="minor">
-            <a:schemeClr val="lt1"/>
-          </a:fontRef>
-        </p:style>
-        <p:txBody>
-          <a:bodyPr rtlCol="0" anchor="ctr"/>
-          <a:lstStyle/>
-          <a:p>
-            <a:pPr algn="ctr"/>
-          </a:p>
-        </p:txBody>
-      </p:sp>
-      <p:sp>
-        <p:nvSpPr>
-          <p:cNvPr id="3" name="TextBox 2"/>
-          <p:cNvSpPr txBox="1"/>
-          <p:nvPr/>
-        </p:nvSpPr>
-        <p:spPr>
-          <a:xfrm>
-            <a:off x="502920" y="201168"/>
-            <a:ext cx="8046720" cy="502920"/>
-          </a:xfrm>
-          <a:prstGeom prst="rect">
-            <a:avLst/>
-          </a:prstGeom>
-          <a:noFill/>
-        </p:spPr>
-        <p:txBody>
-          <a:bodyPr wrap="none">
-            <a:spAutoFit/>
-          </a:bodyPr>
-          <a:lstStyle/>
-          <a:p>
-            <a:r>
-              <a:rPr sz="2800" b="1">
-                <a:solidFill>
-                  <a:srgbClr val="FFFFFF"/>
-                </a:solidFill>
-                <a:latin typeface="Calibri"/>
-              </a:rPr>
-              <a:t>Technical Foundation: Low Aromatic Content</a:t>
-            </a:r>
-          </a:p>
-        </p:txBody>
-      </p:sp>
-      <p:sp>
-        <p:nvSpPr>
-          <p:cNvPr id="4" name="TextBox 3"/>
-          <p:cNvSpPr txBox="1"/>
-          <p:nvPr/>
-        </p:nvSpPr>
-        <p:spPr>
-          <a:xfrm>
-            <a:off x="502920" y="658368"/>
-            <a:ext cx="8046720" cy="320040"/>
-          </a:xfrm>
-          <a:prstGeom prst="rect">
-            <a:avLst/>
-          </a:prstGeom>
-          <a:noFill/>
-        </p:spPr>
-        <p:txBody>
-          <a:bodyPr wrap="none">
-            <a:spAutoFit/>
-          </a:bodyPr>
-          <a:lstStyle/>
-          <a:p>
-            <a:r>
-              <a:rPr sz="1400" b="0">
-                <a:solidFill>
-                  <a:srgbClr val="CBE5F0"/>
-                </a:solidFill>
-                <a:latin typeface="Calibri"/>
-              </a:rPr>
-              <a:t>Dearomatization Is a Performance &amp; Safety Requirement, Not Marketing</a:t>
-            </a:r>
-          </a:p>
-        </p:txBody>
-      </p:sp>
-      <p:sp>
-        <p:nvSpPr>
-          <p:cNvPr id="5" name="TextBox 4"/>
-          <p:cNvSpPr txBox="1"/>
-          <p:nvPr/>
-        </p:nvSpPr>
-        <p:spPr>
-          <a:xfrm>
-            <a:off x="594360" y="1280160"/>
-            <a:ext cx="7955279" cy="5029200"/>
-          </a:xfrm>
-          <a:prstGeom prst="rect">
-            <a:avLst/>
-          </a:prstGeom>
-          <a:noFill/>
-        </p:spPr>
-        <p:txBody>
-          <a:bodyPr wrap="square" anchor="t">
-            <a:spAutoFit/>
-          </a:bodyPr>
-          <a:lstStyle/>
-          <a:p>
-            <a:pPr>
-              <a:spcBef>
-                <a:spcPts val="200"/>
-              </a:spcBef>
-              <a:spcAft>
-                <a:spcPts val="885"/>
-              </a:spcAft>
-            </a:pPr>
-            <a:r>
-              <a:rPr sz="1400" b="0">
-                <a:solidFill>
-                  <a:srgbClr val="334155"/>
-                </a:solidFill>
-                <a:latin typeface="Calibri"/>
-              </a:rPr>
-              <a:t>Aromatics (benzene, toluene, xylene ring structures) drive odor, toxicity, and aggressive interaction with polymers.</a:t>
-            </a:r>
-          </a:p>
-          <a:p>
-            <a:pPr>
-              <a:spcBef>
-                <a:spcPts val="200"/>
-              </a:spcBef>
-              <a:spcAft>
-                <a:spcPts val="885"/>
-              </a:spcAft>
-            </a:pPr>
-            <a:r>
-              <a:rPr sz="1400" b="0">
-                <a:solidFill>
-                  <a:srgbClr val="334155"/>
-                </a:solidFill>
-                <a:latin typeface="Calibri"/>
-              </a:rPr>
-              <a:t>D40 dearomatization (&lt;0.1% aromatics) delivers:</a:t>
-            </a:r>
-          </a:p>
-          <a:p>
-            <a:pPr lvl="1">
-              <a:spcBef>
-                <a:spcPts val="200"/>
-              </a:spcBef>
-              <a:spcAft>
-                <a:spcPts val="885"/>
-              </a:spcAft>
-            </a:pPr>
-            <a:r>
-              <a:rPr sz="1200" b="0">
-                <a:solidFill>
-                  <a:srgbClr val="334155"/>
-                </a:solidFill>
-                <a:latin typeface="Calibri"/>
-              </a:rPr>
-              <a:t>Worker safety: OEL 1,200 mg/m³ vs. 300 (white spirit) and 200 (kerosene) mg/m³.</a:t>
-            </a:r>
-          </a:p>
-          <a:p>
-            <a:pPr lvl="1">
-              <a:spcBef>
-                <a:spcPts val="200"/>
-              </a:spcBef>
-              <a:spcAft>
-                <a:spcPts val="885"/>
-              </a:spcAft>
-            </a:pPr>
-            <a:r>
-              <a:rPr sz="1200" b="0">
-                <a:solidFill>
-                  <a:srgbClr val="334155"/>
-                </a:solidFill>
-                <a:latin typeface="Calibri"/>
-              </a:rPr>
-              <a:t>Material compatibility: reduced swelling/cracking risk for O-rings, seals, and plastic bushings on PM assemblies.</a:t>
-            </a:r>
-          </a:p>
-          <a:p>
-            <a:pPr lvl="1">
-              <a:spcBef>
-                <a:spcPts val="200"/>
-              </a:spcBef>
-              <a:spcAft>
-                <a:spcPts val="885"/>
-              </a:spcAft>
-            </a:pPr>
-            <a:r>
-              <a:rPr sz="1200" b="0">
-                <a:solidFill>
-                  <a:srgbClr val="334155"/>
-                </a:solidFill>
-                <a:latin typeface="Calibri"/>
-              </a:rPr>
-              <a:t>Surface integrity: avoids aromatic film on metal — essential before electroplating, phosphating, PVD, or adhesive bonding.</a:t>
-            </a:r>
-          </a:p>
-          <a:p>
-            <a:pPr lvl="1">
-              <a:spcBef>
-                <a:spcPts val="200"/>
-              </a:spcBef>
-              <a:spcAft>
-                <a:spcPts val="885"/>
-              </a:spcAft>
-            </a:pPr>
-            <a:r>
-              <a:rPr sz="1200" b="0">
-                <a:solidFill>
-                  <a:srgbClr val="334155"/>
-                </a:solidFill>
-                <a:latin typeface="Calibri"/>
-              </a:rPr>
-              <a:t>Regulatory &amp; ESG alignment: lower VOC toxicity profile supports occupational health commitments.</a:t>
-            </a:r>
-          </a:p>
-          <a:p>
-            <a:pPr>
-              <a:spcBef>
-                <a:spcPts val="200"/>
-              </a:spcBef>
-              <a:spcAft>
-                <a:spcPts val="885"/>
-              </a:spcAft>
-            </a:pPr>
-            <a:r>
-              <a:rPr sz="1400" b="0">
-                <a:solidFill>
-                  <a:srgbClr val="334155"/>
-                </a:solidFill>
-                <a:latin typeface="Calibri"/>
-              </a:rPr>
-              <a:t>Adulteration does not preserve this profile — even if aromatics are unchanged, added volatiles alter toxicity, flammability, and certification validity.</a:t>
-            </a:r>
-          </a:p>
-        </p:txBody>
-      </p:sp>
-      <p:sp>
-        <p:nvSpPr>
-          <p:cNvPr id="6" name="TextBox 5"/>
-          <p:cNvSpPr txBox="1"/>
-          <p:nvPr/>
-        </p:nvSpPr>
-        <p:spPr>
-          <a:xfrm>
-            <a:off x="457200" y="6446520"/>
-            <a:ext cx="8229600" cy="274320"/>
-          </a:xfrm>
-          <a:prstGeom prst="rect">
-            <a:avLst/>
-          </a:prstGeom>
-          <a:noFill/>
-        </p:spPr>
-        <p:txBody>
-          <a:bodyPr wrap="none">
-            <a:spAutoFit/>
-          </a:bodyPr>
-          <a:lstStyle/>
-          <a:p>
-            <a:pPr algn="r"/>
-            <a:r>
-              <a:rPr sz="900" b="0">
-                <a:solidFill>
-                  <a:srgbClr val="64748B"/>
-                </a:solidFill>
-                <a:latin typeface="Calibri"/>
-              </a:rPr>
-              <a:t>Confidential — Risk Committee | Exxsol D40 Supply Chain Integrity</a:t>
-            </a:r>
-          </a:p>
-        </p:txBody>
-      </p:sp>
-    </p:spTree>
-  </p:cSld>
-  <p:clrMapOvr>
-    <a:masterClrMapping/>
-  </p:clrMapOvr>
-</p:sld>
-</file>
-
-<file path=ppt/slides/slide8.xml><?xml version="1.0" encoding="utf-8"?>
-<p:sld xmlns:a="http://schemas.openxmlformats.org/drawingml/2006/main" xmlns:p="http://schemas.openxmlformats.org/presentationml/2006/main" xmlns:r="http://schemas.openxmlformats.org/officeDocument/2006/relationships">
-  <p:cSld>
-    <p:spTree>
-      <p:nvGrpSpPr>
-        <p:cNvPr id="1" name=""/>
-        <p:cNvGrpSpPr/>
-        <p:nvPr/>
-      </p:nvGrpSpPr>
-      <p:grpSpPr/>
-      <p:sp>
-        <p:nvSpPr>
-          <p:cNvPr id="2" name="Rectangle 1"/>
-          <p:cNvSpPr/>
-          <p:nvPr/>
-        </p:nvSpPr>
-        <p:spPr>
-          <a:xfrm>
-            <a:off x="0" y="0"/>
-            <a:ext cx="9144000" cy="1051560"/>
-          </a:xfrm>
-          <a:prstGeom prst="rect">
-            <a:avLst/>
-          </a:prstGeom>
-          <a:solidFill>
-            <a:srgbClr val="002B5C"/>
-          </a:solidFill>
-          <a:ln>
-            <a:noFill/>
-          </a:ln>
-        </p:spPr>
-        <p:style>
-          <a:lnRef idx="1">
-            <a:schemeClr val="accent1"/>
-          </a:lnRef>
-          <a:fillRef idx="3">
-            <a:schemeClr val="accent1"/>
-          </a:fillRef>
-          <a:effectRef idx="2">
-            <a:schemeClr val="accent1"/>
-          </a:effectRef>
-          <a:fontRef idx="minor">
-            <a:schemeClr val="lt1"/>
-          </a:fontRef>
-        </p:style>
-        <p:txBody>
-          <a:bodyPr rtlCol="0" anchor="ctr"/>
-          <a:lstStyle/>
-          <a:p>
-            <a:pPr algn="ctr"/>
-          </a:p>
-        </p:txBody>
-      </p:sp>
-      <p:sp>
-        <p:nvSpPr>
-          <p:cNvPr id="3" name="TextBox 2"/>
-          <p:cNvSpPr txBox="1"/>
-          <p:nvPr/>
-        </p:nvSpPr>
-        <p:spPr>
-          <a:xfrm>
-            <a:off x="502920" y="201168"/>
-            <a:ext cx="8046720" cy="502920"/>
-          </a:xfrm>
-          <a:prstGeom prst="rect">
-            <a:avLst/>
-          </a:prstGeom>
-          <a:noFill/>
-        </p:spPr>
-        <p:txBody>
-          <a:bodyPr wrap="none">
-            <a:spAutoFit/>
-          </a:bodyPr>
-          <a:lstStyle/>
-          <a:p>
-            <a:r>
-              <a:rPr sz="2800" b="1">
-                <a:solidFill>
-                  <a:srgbClr val="FFFFFF"/>
-                </a:solidFill>
-                <a:latin typeface="Calibri"/>
-              </a:rPr>
-              <a:t>Product Comparison: D40 vs. D60 / D60(S)</a:t>
-            </a:r>
-          </a:p>
-        </p:txBody>
-      </p:sp>
-      <p:graphicFrame>
-        <p:nvGraphicFramePr>
-          <p:cNvPr id="4" name="Table 3"/>
-          <p:cNvGraphicFramePr>
-            <a:graphicFrameLocks noGrp="1"/>
-          </p:cNvGraphicFramePr>
-          <p:nvPr/>
-        </p:nvGraphicFramePr>
-        <p:xfrm>
-          <a:off x="502920" y="1417320"/>
-          <a:ext cx="8229600" cy="3346703"/>
-        </p:xfrm>
-        <a:graphic>
-          <a:graphicData uri="http://schemas.openxmlformats.org/drawingml/2006/table">
-            <a:tbl>
-              <a:tblPr firstRow="1" bandRow="1">
-                <a:tableStyleId>{5C22544A-7EE6-4342-B048-85BDC9FD1C3A}</a:tableStyleId>
-              </a:tblPr>
-              <a:tblGrid>
-                <a:gridCol w="1828800"/>
-                <a:gridCol w="3200400"/>
-                <a:gridCol w="3200400"/>
-              </a:tblGrid>
-              <a:tr h="418337">
-                <a:tc>
-                  <a:txBody>
-                    <a:bodyPr/>
-                    <a:lstStyle/>
-                    <a:p>
-                      <a:pPr algn="ctr"/>
-                      <a:r>
-                        <a:rPr sz="1100" b="1">
-                          <a:solidFill>
-                            <a:srgbClr val="FFFFFF"/>
-                          </a:solidFill>
-                          <a:latin typeface="Calibri"/>
-                        </a:rPr>
-                        <a:t>Attribute</a:t>
-                      </a:r>
-                    </a:p>
-                  </a:txBody>
-                  <a:tcPr>
-                    <a:solidFill>
-                      <a:srgbClr val="002B5C"/>
-                    </a:solidFill>
-                  </a:tcPr>
-                </a:tc>
-                <a:tc>
-                  <a:txBody>
-                    <a:bodyPr/>
-                    <a:lstStyle/>
-                    <a:p>
-                      <a:pPr algn="ctr"/>
-                      <a:r>
-                        <a:rPr sz="1100" b="1">
-                          <a:solidFill>
-                            <a:srgbClr val="FFFFFF"/>
-                          </a:solidFill>
-                          <a:latin typeface="Calibri"/>
-                        </a:rPr>
-                        <a:t>Exxsol D40</a:t>
-                      </a:r>
-                    </a:p>
-                  </a:txBody>
-                  <a:tcPr>
-                    <a:solidFill>
-                      <a:srgbClr val="002B5C"/>
-                    </a:solidFill>
-                  </a:tcPr>
-                </a:tc>
-                <a:tc>
-                  <a:txBody>
-                    <a:bodyPr/>
-                    <a:lstStyle/>
-                    <a:p>
-                      <a:pPr algn="ctr"/>
-                      <a:r>
-                        <a:rPr sz="1100" b="1">
-                          <a:solidFill>
-                            <a:srgbClr val="FFFFFF"/>
-                          </a:solidFill>
-                          <a:latin typeface="Calibri"/>
-                        </a:rPr>
-                        <a:t>Exxsol D60 / D60(S)</a:t>
-                      </a:r>
-                    </a:p>
-                  </a:txBody>
-                  <a:tcPr>
-                    <a:solidFill>
-                      <a:srgbClr val="002B5C"/>
-                    </a:solidFill>
-                  </a:tcPr>
-                </a:tc>
-              </a:tr>
-              <a:tr h="418337">
-                <a:tc>
-                  <a:txBody>
-                    <a:bodyPr/>
-                    <a:lstStyle/>
-                    <a:p>
-                      <a:pPr algn="ctr"/>
-                      <a:r>
-                        <a:rPr sz="1000" b="0">
-                          <a:solidFill>
-                            <a:srgbClr val="334155"/>
-                          </a:solidFill>
-                          <a:latin typeface="Calibri"/>
-                        </a:rPr>
-                        <a:t>Distillation (IBP–DP)</a:t>
-                      </a:r>
-                    </a:p>
-                  </a:txBody>
-                  <a:tcPr/>
-                </a:tc>
-                <a:tc>
-                  <a:txBody>
-                    <a:bodyPr/>
-                    <a:lstStyle/>
-                    <a:p>
-                      <a:pPr algn="l"/>
-                      <a:r>
-                        <a:rPr sz="1000" b="0">
+                        <a:rPr sz="1200" b="0">
                           <a:solidFill>
                             <a:srgbClr val="334155"/>
                           </a:solidFill>
@@ -10312,30 +8014,28 @@
                     <a:bodyPr/>
                     <a:lstStyle/>
                     <a:p>
-                      <a:pPr algn="l"/>
                       <a:r>
-                        <a:rPr sz="1000" b="0">
+                        <a:rPr sz="1200" b="0">
                           <a:solidFill>
                             <a:srgbClr val="334155"/>
                           </a:solidFill>
                           <a:latin typeface="Calibri"/>
                         </a:rPr>
-                        <a:t>180–210 °C</a:t>
+                        <a:t>Uniform dry</a:t>
                       </a:r>
                     </a:p>
                   </a:txBody>
                   <a:tcPr/>
                 </a:tc>
               </a:tr>
-              <a:tr h="418337">
+              <a:tr h="384048">
                 <a:tc>
                   <a:txBody>
                     <a:bodyPr/>
                     <a:lstStyle/>
                     <a:p>
-                      <a:pPr algn="ctr"/>
                       <a:r>
-                        <a:rPr sz="1000" b="0">
+                        <a:rPr sz="1200" b="0">
                           <a:solidFill>
                             <a:srgbClr val="334155"/>
                           </a:solidFill>
@@ -10356,15 +8056,14 @@
                     <a:bodyPr/>
                     <a:lstStyle/>
                     <a:p>
-                      <a:pPr algn="l"/>
                       <a:r>
-                        <a:rPr sz="1000" b="0">
+                        <a:rPr sz="1200" b="0">
                           <a:solidFill>
                             <a:srgbClr val="334155"/>
                           </a:solidFill>
                           <a:latin typeface="Calibri"/>
                         </a:rPr>
-                        <a:t>~48 °C (more flammable)</a:t>
+                        <a:t>~48 °C</a:t>
                       </a:r>
                     </a:p>
                   </a:txBody>
@@ -10379,15 +8078,14 @@
                     <a:bodyPr/>
                     <a:lstStyle/>
                     <a:p>
-                      <a:pPr algn="l"/>
                       <a:r>
-                        <a:rPr sz="1000" b="0">
+                        <a:rPr sz="1200" b="0">
                           <a:solidFill>
                             <a:srgbClr val="334155"/>
                           </a:solidFill>
                           <a:latin typeface="Calibri"/>
                         </a:rPr>
-                        <a:t>~68 °C (lower flammability)</a:t>
+                        <a:t>Flammable</a:t>
                       </a:r>
                     </a:p>
                   </a:txBody>
@@ -10398,21 +8096,20 @@
                   </a:tcPr>
                 </a:tc>
               </a:tr>
-              <a:tr h="418337">
+              <a:tr h="384048">
                 <a:tc>
                   <a:txBody>
                     <a:bodyPr/>
                     <a:lstStyle/>
                     <a:p>
-                      <a:pPr algn="ctr"/>
                       <a:r>
-                        <a:rPr sz="1000" b="0">
+                        <a:rPr sz="1200" b="0">
                           <a:solidFill>
                             <a:srgbClr val="334155"/>
                           </a:solidFill>
                           <a:latin typeface="Calibri"/>
                         </a:rPr>
-                        <a:t>Evaporation rate</a:t>
+                        <a:t>Aromatics</a:t>
                       </a:r>
                     </a:p>
                   </a:txBody>
@@ -10423,139 +8120,8 @@
                     <a:bodyPr/>
                     <a:lstStyle/>
                     <a:p>
-                      <a:pPr algn="l"/>
                       <a:r>
-                        <a:rPr sz="1000" b="0">
-                          <a:solidFill>
-                            <a:srgbClr val="334155"/>
-                          </a:solidFill>
-                          <a:latin typeface="Calibri"/>
-                        </a:rPr>
-                        <a:t>Faster (relative ~higher)</a:t>
-                      </a:r>
-                    </a:p>
-                  </a:txBody>
-                  <a:tcPr/>
-                </a:tc>
-                <a:tc>
-                  <a:txBody>
-                    <a:bodyPr/>
-                    <a:lstStyle/>
-                    <a:p>
-                      <a:pPr algn="l"/>
-                      <a:r>
-                        <a:rPr sz="1000" b="0">
-                          <a:solidFill>
-                            <a:srgbClr val="334155"/>
-                          </a:solidFill>
-                          <a:latin typeface="Calibri"/>
-                        </a:rPr>
-                        <a:t>Slower (relative rate ~3, n-BuAc=100)</a:t>
-                      </a:r>
-                    </a:p>
-                  </a:txBody>
-                  <a:tcPr/>
-                </a:tc>
-              </a:tr>
-              <a:tr h="418337">
-                <a:tc>
-                  <a:txBody>
-                    <a:bodyPr/>
-                    <a:lstStyle/>
-                    <a:p>
-                      <a:pPr algn="ctr"/>
-                      <a:r>
-                        <a:rPr sz="1000" b="0">
-                          <a:solidFill>
-                            <a:srgbClr val="334155"/>
-                          </a:solidFill>
-                          <a:latin typeface="Calibri"/>
-                        </a:rPr>
-                        <a:t>KB value</a:t>
-                      </a:r>
-                    </a:p>
-                  </a:txBody>
-                  <a:tcPr>
-                    <a:solidFill>
-                      <a:srgbClr val="F1F5F9"/>
-                    </a:solidFill>
-                  </a:tcPr>
-                </a:tc>
-                <a:tc>
-                  <a:txBody>
-                    <a:bodyPr/>
-                    <a:lstStyle/>
-                    <a:p>
-                      <a:pPr algn="l"/>
-                      <a:r>
-                        <a:rPr sz="1000" b="0">
-                          <a:solidFill>
-                            <a:srgbClr val="334155"/>
-                          </a:solidFill>
-                          <a:latin typeface="Calibri"/>
-                        </a:rPr>
-                        <a:t>~31</a:t>
-                      </a:r>
-                    </a:p>
-                  </a:txBody>
-                  <a:tcPr>
-                    <a:solidFill>
-                      <a:srgbClr val="F1F5F9"/>
-                    </a:solidFill>
-                  </a:tcPr>
-                </a:tc>
-                <a:tc>
-                  <a:txBody>
-                    <a:bodyPr/>
-                    <a:lstStyle/>
-                    <a:p>
-                      <a:pPr algn="l"/>
-                      <a:r>
-                        <a:rPr sz="1000" b="0">
-                          <a:solidFill>
-                            <a:srgbClr val="334155"/>
-                          </a:solidFill>
-                          <a:latin typeface="Calibri"/>
-                        </a:rPr>
-                        <a:t>~31</a:t>
-                      </a:r>
-                    </a:p>
-                  </a:txBody>
-                  <a:tcPr>
-                    <a:solidFill>
-                      <a:srgbClr val="F1F5F9"/>
-                    </a:solidFill>
-                  </a:tcPr>
-                </a:tc>
-              </a:tr>
-              <a:tr h="418337">
-                <a:tc>
-                  <a:txBody>
-                    <a:bodyPr/>
-                    <a:lstStyle/>
-                    <a:p>
-                      <a:pPr algn="ctr"/>
-                      <a:r>
-                        <a:rPr sz="1000" b="0">
-                          <a:solidFill>
-                            <a:srgbClr val="334155"/>
-                          </a:solidFill>
-                          <a:latin typeface="Calibri"/>
-                        </a:rPr>
-                        <a:t>Aromatic content</a:t>
-                      </a:r>
-                    </a:p>
-                  </a:txBody>
-                  <a:tcPr/>
-                </a:tc>
-                <a:tc>
-                  <a:txBody>
-                    <a:bodyPr/>
-                    <a:lstStyle/>
-                    <a:p>
-                      <a:pPr algn="l"/>
-                      <a:r>
-                        <a:rPr sz="1000" b="0">
+                        <a:rPr sz="1200" b="0">
                           <a:solidFill>
                             <a:srgbClr val="334155"/>
                           </a:solidFill>
@@ -10572,36 +8138,34 @@
                     <a:bodyPr/>
                     <a:lstStyle/>
                     <a:p>
-                      <a:pPr algn="l"/>
                       <a:r>
-                        <a:rPr sz="1000" b="0">
+                        <a:rPr sz="1200" b="0">
                           <a:solidFill>
                             <a:srgbClr val="334155"/>
                           </a:solidFill>
                           <a:latin typeface="Calibri"/>
                         </a:rPr>
-                        <a:t>&lt;0.1%</a:t>
+                        <a:t>Safe, clean</a:t>
                       </a:r>
                     </a:p>
                   </a:txBody>
                   <a:tcPr/>
                 </a:tc>
               </a:tr>
-              <a:tr h="418337">
+              <a:tr h="384048">
                 <a:tc>
                   <a:txBody>
                     <a:bodyPr/>
                     <a:lstStyle/>
                     <a:p>
-                      <a:pPr algn="ctr"/>
                       <a:r>
-                        <a:rPr sz="1000" b="0">
+                        <a:rPr sz="1200" b="0">
                           <a:solidFill>
                             <a:srgbClr val="334155"/>
                           </a:solidFill>
                           <a:latin typeface="Calibri"/>
                         </a:rPr>
-                        <a:t>Transport classification</a:t>
+                        <a:t>OEL</a:t>
                       </a:r>
                     </a:p>
                   </a:txBody>
@@ -10616,15 +8180,14 @@
                     <a:bodyPr/>
                     <a:lstStyle/>
                     <a:p>
-                      <a:pPr algn="l"/>
                       <a:r>
-                        <a:rPr sz="1000" b="0">
+                        <a:rPr sz="1200" b="0">
                           <a:solidFill>
                             <a:srgbClr val="334155"/>
                           </a:solidFill>
                           <a:latin typeface="Calibri"/>
                         </a:rPr>
-                        <a:t>Flammable liquid</a:t>
+                        <a:t>1200 mg/m³</a:t>
                       </a:r>
                     </a:p>
                   </a:txBody>
@@ -10639,15 +8202,14 @@
                     <a:bodyPr/>
                     <a:lstStyle/>
                     <a:p>
-                      <a:pPr algn="l"/>
                       <a:r>
-                        <a:rPr sz="1000" b="0">
+                        <a:rPr sz="1200" b="0">
                           <a:solidFill>
                             <a:srgbClr val="334155"/>
                           </a:solidFill>
                           <a:latin typeface="Calibri"/>
                         </a:rPr>
-                        <a:t>Often non-DG for transport (regional)</a:t>
+                        <a:t>4× vs white spirit</a:t>
                       </a:r>
                     </a:p>
                   </a:txBody>
@@ -10658,90 +8220,82 @@
                   </a:tcPr>
                 </a:tc>
               </a:tr>
-              <a:tr h="418344">
-                <a:tc>
-                  <a:txBody>
-                    <a:bodyPr/>
-                    <a:lstStyle/>
-                    <a:p>
-                      <a:pPr algn="ctr"/>
-                      <a:r>
-                        <a:rPr sz="1000" b="0">
-                          <a:solidFill>
-                            <a:srgbClr val="334155"/>
-                          </a:solidFill>
-                          <a:latin typeface="Calibri"/>
-                        </a:rPr>
-                        <a:t>Typical use case</a:t>
-                      </a:r>
-                    </a:p>
-                  </a:txBody>
-                  <a:tcPr/>
-                </a:tc>
-                <a:tc>
-                  <a:txBody>
-                    <a:bodyPr/>
-                    <a:lstStyle/>
-                    <a:p>
-                      <a:pPr algn="l"/>
-                      <a:r>
-                        <a:rPr sz="1000" b="0">
-                          <a:solidFill>
-                            <a:srgbClr val="334155"/>
-                          </a:solidFill>
-                          <a:latin typeface="Calibri"/>
-                        </a:rPr>
-                        <a:t>Fast-dry PM cleaning; tight pore evacuation</a:t>
-                      </a:r>
-                    </a:p>
-                  </a:txBody>
-                  <a:tcPr/>
-                </a:tc>
-                <a:tc>
-                  <a:txBody>
-                    <a:bodyPr/>
-                    <a:lstStyle/>
-                    <a:p>
-                      <a:pPr algn="l"/>
-                      <a:r>
-                        <a:rPr sz="1000" b="0">
-                          <a:solidFill>
-                            <a:srgbClr val="334155"/>
-                          </a:solidFill>
-                          <a:latin typeface="Calibri"/>
-                        </a:rPr>
-                        <a:t>Slower dry; higher flash point needs</a:t>
-                      </a:r>
-                    </a:p>
-                  </a:txBody>
-                  <a:tcPr/>
-                </a:tc>
-              </a:tr>
             </a:tbl>
           </a:graphicData>
         </a:graphic>
       </p:graphicFrame>
       <p:sp>
         <p:nvSpPr>
-          <p:cNvPr id="5" name="Rounded Rectangle 4"/>
+          <p:cNvPr id="7" name="TextBox 6"/>
+          <p:cNvSpPr txBox="1"/>
+          <p:nvPr/>
+        </p:nvSpPr>
+        <p:spPr>
+          <a:xfrm>
+            <a:off x="365760" y="6473952"/>
+            <a:ext cx="8412480" cy="256032"/>
+          </a:xfrm>
+          <a:prstGeom prst="rect">
+            <a:avLst/>
+          </a:prstGeom>
+          <a:noFill/>
+        </p:spPr>
+        <p:txBody>
+          <a:bodyPr wrap="none">
+            <a:spAutoFit/>
+          </a:bodyPr>
+          <a:lstStyle/>
+          <a:p>
+            <a:pPr algn="r"/>
+            <a:r>
+              <a:rPr sz="1000" b="0">
+                <a:solidFill>
+                  <a:srgbClr val="64748B"/>
+                </a:solidFill>
+                <a:latin typeface="Calibri"/>
+              </a:rPr>
+              <a:t>Confidential — Risk Committee | Exxsol D40</a:t>
+            </a:r>
+          </a:p>
+        </p:txBody>
+      </p:sp>
+    </p:spTree>
+  </p:cSld>
+  <p:clrMapOvr>
+    <a:masterClrMapping/>
+  </p:clrMapOvr>
+</p:sld>
+</file>
+
+<file path=ppt/slides/slide6.xml><?xml version="1.0" encoding="utf-8"?>
+<p:sld xmlns:a="http://schemas.openxmlformats.org/drawingml/2006/main" xmlns:p="http://schemas.openxmlformats.org/presentationml/2006/main" xmlns:r="http://schemas.openxmlformats.org/officeDocument/2006/relationships">
+  <p:cSld>
+    <p:spTree>
+      <p:nvGrpSpPr>
+        <p:cNvPr id="1" name=""/>
+        <p:cNvGrpSpPr/>
+        <p:nvPr/>
+      </p:nvGrpSpPr>
+      <p:grpSpPr/>
+      <p:sp>
+        <p:nvSpPr>
+          <p:cNvPr id="2" name="Rectangle 1"/>
           <p:cNvSpPr/>
           <p:nvPr/>
         </p:nvSpPr>
         <p:spPr>
           <a:xfrm>
-            <a:off x="502920" y="4892040"/>
-            <a:ext cx="8138160" cy="502920"/>
-          </a:xfrm>
-          <a:prstGeom prst="roundRect">
+            <a:off x="0" y="0"/>
+            <a:ext cx="9144000" cy="1097280"/>
+          </a:xfrm>
+          <a:prstGeom prst="rect">
             <a:avLst/>
           </a:prstGeom>
           <a:solidFill>
-            <a:srgbClr val="E0F2FE"/>
+            <a:srgbClr val="002B5C"/>
           </a:solidFill>
-          <a:ln w="15875">
-            <a:solidFill>
-              <a:srgbClr val="007A87"/>
-            </a:solidFill>
+          <a:ln>
+            <a:noFill/>
           </a:ln>
         </p:spPr>
         <p:style>
@@ -10759,32 +8313,23 @@
           </a:fontRef>
         </p:style>
         <p:txBody>
-          <a:bodyPr rtlCol="0" anchor="ctr" wrap="square" lIns="137160" rIns="137160" tIns="91440"/>
+          <a:bodyPr rtlCol="0" anchor="ctr"/>
           <a:lstStyle/>
           <a:p>
             <a:pPr algn="ctr"/>
-            <a:r>
-              <a:rPr sz="1400" b="1">
-                <a:solidFill>
-                  <a:srgbClr val="002B5C"/>
-                </a:solidFill>
-                <a:latin typeface="Calibri"/>
-              </a:rPr>
-              <a:t>Note: D60(S) is the same product grade with a supplier-specific designation — not a different formulation.</a:t>
-            </a:r>
-          </a:p>
-        </p:txBody>
-      </p:sp>
-      <p:sp>
-        <p:nvSpPr>
-          <p:cNvPr id="6" name="TextBox 5"/>
+          </a:p>
+        </p:txBody>
+      </p:sp>
+      <p:sp>
+        <p:nvSpPr>
+          <p:cNvPr id="3" name="TextBox 2"/>
           <p:cNvSpPr txBox="1"/>
           <p:nvPr/>
         </p:nvSpPr>
         <p:spPr>
           <a:xfrm>
-            <a:off x="457200" y="6446520"/>
-            <a:ext cx="8229600" cy="274320"/>
+            <a:off x="411480" y="164592"/>
+            <a:ext cx="8321040" cy="566928"/>
           </a:xfrm>
           <a:prstGeom prst="rect">
             <a:avLst/>
@@ -10797,15 +8342,1034 @@
           </a:bodyPr>
           <a:lstStyle/>
           <a:p>
+            <a:r>
+              <a:rPr sz="3400" b="1">
+                <a:solidFill>
+                  <a:srgbClr val="FFFFFF"/>
+                </a:solidFill>
+                <a:latin typeface="Calibri"/>
+              </a:rPr>
+              <a:t>Boiling Range</a:t>
+            </a:r>
+          </a:p>
+        </p:txBody>
+      </p:sp>
+      <p:sp>
+        <p:nvSpPr>
+          <p:cNvPr id="4" name="TextBox 3"/>
+          <p:cNvSpPr txBox="1"/>
+          <p:nvPr/>
+        </p:nvSpPr>
+        <p:spPr>
+          <a:xfrm>
+            <a:off x="411480" y="658368"/>
+            <a:ext cx="8321040" cy="347472"/>
+          </a:xfrm>
+          <a:prstGeom prst="rect">
+            <a:avLst/>
+          </a:prstGeom>
+          <a:noFill/>
+        </p:spPr>
+        <p:txBody>
+          <a:bodyPr wrap="none">
+            <a:spAutoFit/>
+          </a:bodyPr>
+          <a:lstStyle/>
+          <a:p>
+            <a:r>
+              <a:rPr sz="1800" b="0">
+                <a:solidFill>
+                  <a:srgbClr val="CBE5F0"/>
+                </a:solidFill>
+                <a:latin typeface="Calibri"/>
+              </a:rPr>
+              <a:t>IBP • Dry Point • Narrow Window</a:t>
+            </a:r>
+          </a:p>
+        </p:txBody>
+      </p:sp>
+      <p:pic>
+        <p:nvPicPr>
+          <p:cNvPr id="5" name="Picture 4" descr="06_boiling.png"/>
+          <p:cNvPicPr>
+            <a:picLocks noChangeAspect="1"/>
+          </p:cNvPicPr>
+          <p:nvPr/>
+        </p:nvPicPr>
+        <p:blipFill>
+          <a:blip r:embed="rId2"/>
+          <a:stretch>
+            <a:fillRect/>
+          </a:stretch>
+        </p:blipFill>
+        <p:spPr>
+          <a:xfrm>
+            <a:off x="5806440" y="1234440"/>
+            <a:ext cx="3063240" cy="4892040"/>
+          </a:xfrm>
+          <a:prstGeom prst="rect">
+            <a:avLst/>
+          </a:prstGeom>
+        </p:spPr>
+      </p:pic>
+      <p:sp>
+        <p:nvSpPr>
+          <p:cNvPr id="6" name="TextBox 5"/>
+          <p:cNvSpPr txBox="1"/>
+          <p:nvPr/>
+        </p:nvSpPr>
+        <p:spPr>
+          <a:xfrm>
+            <a:off x="411480" y="1234440"/>
+            <a:ext cx="5166360" cy="5120640"/>
+          </a:xfrm>
+          <a:prstGeom prst="rect">
+            <a:avLst/>
+          </a:prstGeom>
+          <a:noFill/>
+        </p:spPr>
+        <p:txBody>
+          <a:bodyPr wrap="square" anchor="t">
+            <a:spAutoFit/>
+          </a:bodyPr>
+          <a:lstStyle/>
+          <a:p>
+            <a:pPr>
+              <a:spcBef>
+                <a:spcPts val="400"/>
+              </a:spcBef>
+              <a:spcAft>
+                <a:spcPts val="1400"/>
+              </a:spcAft>
+            </a:pPr>
+            <a:r>
+              <a:rPr sz="2400" b="0">
+                <a:solidFill>
+                  <a:srgbClr val="334155"/>
+                </a:solidFill>
+                <a:latin typeface="Calibri"/>
+              </a:rPr>
+              <a:t>• IBP = first drop; DP = last drop</a:t>
+            </a:r>
+          </a:p>
+          <a:p>
+            <a:pPr>
+              <a:spcBef>
+                <a:spcPts val="400"/>
+              </a:spcBef>
+              <a:spcAft>
+                <a:spcPts val="1400"/>
+              </a:spcAft>
+            </a:pPr>
+            <a:r>
+              <a:rPr sz="2400" b="0">
+                <a:solidFill>
+                  <a:srgbClr val="334155"/>
+                </a:solidFill>
+                <a:latin typeface="Calibri"/>
+              </a:rPr>
+              <a:t>• Narrow range = predictable drying</a:t>
+            </a:r>
+          </a:p>
+          <a:p>
+            <a:pPr>
+              <a:spcBef>
+                <a:spcPts val="400"/>
+              </a:spcBef>
+              <a:spcAft>
+                <a:spcPts val="1400"/>
+              </a:spcAft>
+            </a:pPr>
+            <a:r>
+              <a:rPr sz="2400" b="0">
+                <a:solidFill>
+                  <a:srgbClr val="334155"/>
+                </a:solidFill>
+                <a:latin typeface="Calibri"/>
+              </a:rPr>
+              <a:t>• Heavy ends stay in PM pores</a:t>
+            </a:r>
+          </a:p>
+          <a:p>
+            <a:pPr>
+              <a:spcBef>
+                <a:spcPts val="400"/>
+              </a:spcBef>
+              <a:spcAft>
+                <a:spcPts val="1400"/>
+              </a:spcAft>
+            </a:pPr>
+            <a:r>
+              <a:rPr sz="2400" b="0">
+                <a:solidFill>
+                  <a:srgbClr val="334155"/>
+                </a:solidFill>
+                <a:latin typeface="Calibri"/>
+              </a:rPr>
+              <a:t>• MC/methanol breaks the profile</a:t>
+            </a:r>
+          </a:p>
+        </p:txBody>
+      </p:sp>
+      <p:sp>
+        <p:nvSpPr>
+          <p:cNvPr id="7" name="Rounded Rectangle 6"/>
+          <p:cNvSpPr/>
+          <p:nvPr/>
+        </p:nvSpPr>
+        <p:spPr>
+          <a:xfrm>
+            <a:off x="411480" y="5623560"/>
+            <a:ext cx="5166360" cy="658368"/>
+          </a:xfrm>
+          <a:prstGeom prst="roundRect">
+            <a:avLst/>
+          </a:prstGeom>
+          <a:solidFill>
+            <a:srgbClr val="FEF3C7"/>
+          </a:solidFill>
+          <a:ln w="19050">
+            <a:solidFill>
+              <a:srgbClr val="B45309"/>
+            </a:solidFill>
+          </a:ln>
+        </p:spPr>
+        <p:style>
+          <a:lnRef idx="1">
+            <a:schemeClr val="accent1"/>
+          </a:lnRef>
+          <a:fillRef idx="3">
+            <a:schemeClr val="accent1"/>
+          </a:fillRef>
+          <a:effectRef idx="2">
+            <a:schemeClr val="accent1"/>
+          </a:effectRef>
+          <a:fontRef idx="minor">
+            <a:schemeClr val="lt1"/>
+          </a:fontRef>
+        </p:style>
+        <p:txBody>
+          <a:bodyPr rtlCol="0" anchor="ctr" wrap="square" lIns="109728" rIns="109728"/>
+          <a:lstStyle/>
+          <a:p>
+            <a:pPr algn="ctr"/>
+            <a:r>
+              <a:rPr sz="1600" b="1">
+                <a:solidFill>
+                  <a:srgbClr val="002B5C"/>
+                </a:solidFill>
+                <a:latin typeface="Calibri"/>
+              </a:rPr>
+              <a:t>Adulteration = residue in pores.</a:t>
+            </a:r>
+          </a:p>
+        </p:txBody>
+      </p:sp>
+      <p:sp>
+        <p:nvSpPr>
+          <p:cNvPr id="8" name="TextBox 7"/>
+          <p:cNvSpPr txBox="1"/>
+          <p:nvPr/>
+        </p:nvSpPr>
+        <p:spPr>
+          <a:xfrm>
+            <a:off x="365760" y="6473952"/>
+            <a:ext cx="8412480" cy="256032"/>
+          </a:xfrm>
+          <a:prstGeom prst="rect">
+            <a:avLst/>
+          </a:prstGeom>
+          <a:noFill/>
+        </p:spPr>
+        <p:txBody>
+          <a:bodyPr wrap="none">
+            <a:spAutoFit/>
+          </a:bodyPr>
+          <a:lstStyle/>
+          <a:p>
             <a:pPr algn="r"/>
             <a:r>
-              <a:rPr sz="900" b="0">
+              <a:rPr sz="1000" b="0">
                 <a:solidFill>
                   <a:srgbClr val="64748B"/>
                 </a:solidFill>
                 <a:latin typeface="Calibri"/>
               </a:rPr>
-              <a:t>Confidential — Risk Committee | Exxsol D40 Supply Chain Integrity</a:t>
+              <a:t>Confidential — Risk Committee | Exxsol D40</a:t>
+            </a:r>
+          </a:p>
+        </p:txBody>
+      </p:sp>
+    </p:spTree>
+  </p:cSld>
+  <p:clrMapOvr>
+    <a:masterClrMapping/>
+  </p:clrMapOvr>
+</p:sld>
+</file>
+
+<file path=ppt/slides/slide7.xml><?xml version="1.0" encoding="utf-8"?>
+<p:sld xmlns:a="http://schemas.openxmlformats.org/drawingml/2006/main" xmlns:p="http://schemas.openxmlformats.org/presentationml/2006/main" xmlns:r="http://schemas.openxmlformats.org/officeDocument/2006/relationships">
+  <p:cSld>
+    <p:spTree>
+      <p:nvGrpSpPr>
+        <p:cNvPr id="1" name=""/>
+        <p:cNvGrpSpPr/>
+        <p:nvPr/>
+      </p:nvGrpSpPr>
+      <p:grpSpPr/>
+      <p:sp>
+        <p:nvSpPr>
+          <p:cNvPr id="2" name="Rectangle 1"/>
+          <p:cNvSpPr/>
+          <p:nvPr/>
+        </p:nvSpPr>
+        <p:spPr>
+          <a:xfrm>
+            <a:off x="0" y="0"/>
+            <a:ext cx="9144000" cy="1097280"/>
+          </a:xfrm>
+          <a:prstGeom prst="rect">
+            <a:avLst/>
+          </a:prstGeom>
+          <a:solidFill>
+            <a:srgbClr val="002B5C"/>
+          </a:solidFill>
+          <a:ln>
+            <a:noFill/>
+          </a:ln>
+        </p:spPr>
+        <p:style>
+          <a:lnRef idx="1">
+            <a:schemeClr val="accent1"/>
+          </a:lnRef>
+          <a:fillRef idx="3">
+            <a:schemeClr val="accent1"/>
+          </a:fillRef>
+          <a:effectRef idx="2">
+            <a:schemeClr val="accent1"/>
+          </a:effectRef>
+          <a:fontRef idx="minor">
+            <a:schemeClr val="lt1"/>
+          </a:fontRef>
+        </p:style>
+        <p:txBody>
+          <a:bodyPr rtlCol="0" anchor="ctr"/>
+          <a:lstStyle/>
+          <a:p>
+            <a:pPr algn="ctr"/>
+          </a:p>
+        </p:txBody>
+      </p:sp>
+      <p:sp>
+        <p:nvSpPr>
+          <p:cNvPr id="3" name="TextBox 2"/>
+          <p:cNvSpPr txBox="1"/>
+          <p:nvPr/>
+        </p:nvSpPr>
+        <p:spPr>
+          <a:xfrm>
+            <a:off x="411480" y="164592"/>
+            <a:ext cx="8321040" cy="566928"/>
+          </a:xfrm>
+          <a:prstGeom prst="rect">
+            <a:avLst/>
+          </a:prstGeom>
+          <a:noFill/>
+        </p:spPr>
+        <p:txBody>
+          <a:bodyPr wrap="none">
+            <a:spAutoFit/>
+          </a:bodyPr>
+          <a:lstStyle/>
+          <a:p>
+            <a:r>
+              <a:rPr sz="3400" b="1">
+                <a:solidFill>
+                  <a:srgbClr val="FFFFFF"/>
+                </a:solidFill>
+                <a:latin typeface="Calibri"/>
+              </a:rPr>
+              <a:t>Low Aromatics</a:t>
+            </a:r>
+          </a:p>
+        </p:txBody>
+      </p:sp>
+      <p:sp>
+        <p:nvSpPr>
+          <p:cNvPr id="4" name="TextBox 3"/>
+          <p:cNvSpPr txBox="1"/>
+          <p:nvPr/>
+        </p:nvSpPr>
+        <p:spPr>
+          <a:xfrm>
+            <a:off x="411480" y="658368"/>
+            <a:ext cx="8321040" cy="347472"/>
+          </a:xfrm>
+          <a:prstGeom prst="rect">
+            <a:avLst/>
+          </a:prstGeom>
+          <a:noFill/>
+        </p:spPr>
+        <p:txBody>
+          <a:bodyPr wrap="none">
+            <a:spAutoFit/>
+          </a:bodyPr>
+          <a:lstStyle/>
+          <a:p>
+            <a:r>
+              <a:rPr sz="1800" b="0">
+                <a:solidFill>
+                  <a:srgbClr val="CBE5F0"/>
+                </a:solidFill>
+                <a:latin typeface="Calibri"/>
+              </a:rPr>
+              <a:t>Dearomatized = Engineered Safety</a:t>
+            </a:r>
+          </a:p>
+        </p:txBody>
+      </p:sp>
+      <p:pic>
+        <p:nvPicPr>
+          <p:cNvPr id="5" name="Picture 4" descr="07_aromatic.png"/>
+          <p:cNvPicPr>
+            <a:picLocks noChangeAspect="1"/>
+          </p:cNvPicPr>
+          <p:nvPr/>
+        </p:nvPicPr>
+        <p:blipFill>
+          <a:blip r:embed="rId2"/>
+          <a:stretch>
+            <a:fillRect/>
+          </a:stretch>
+        </p:blipFill>
+        <p:spPr>
+          <a:xfrm>
+            <a:off x="5806440" y="1234440"/>
+            <a:ext cx="3063240" cy="4892040"/>
+          </a:xfrm>
+          <a:prstGeom prst="rect">
+            <a:avLst/>
+          </a:prstGeom>
+        </p:spPr>
+      </p:pic>
+      <p:sp>
+        <p:nvSpPr>
+          <p:cNvPr id="6" name="TextBox 5"/>
+          <p:cNvSpPr txBox="1"/>
+          <p:nvPr/>
+        </p:nvSpPr>
+        <p:spPr>
+          <a:xfrm>
+            <a:off x="411480" y="1234440"/>
+            <a:ext cx="5166360" cy="5120640"/>
+          </a:xfrm>
+          <a:prstGeom prst="rect">
+            <a:avLst/>
+          </a:prstGeom>
+          <a:noFill/>
+        </p:spPr>
+        <p:txBody>
+          <a:bodyPr wrap="square" anchor="t">
+            <a:spAutoFit/>
+          </a:bodyPr>
+          <a:lstStyle/>
+          <a:p>
+            <a:pPr>
+              <a:spcBef>
+                <a:spcPts val="400"/>
+              </a:spcBef>
+              <a:spcAft>
+                <a:spcPts val="1400"/>
+              </a:spcAft>
+            </a:pPr>
+            <a:r>
+              <a:rPr sz="2400" b="0">
+                <a:solidFill>
+                  <a:srgbClr val="334155"/>
+                </a:solidFill>
+                <a:latin typeface="Calibri"/>
+              </a:rPr>
+              <a:t>• Less odor &amp; toxicity for workers</a:t>
+            </a:r>
+          </a:p>
+          <a:p>
+            <a:pPr>
+              <a:spcBef>
+                <a:spcPts val="400"/>
+              </a:spcBef>
+              <a:spcAft>
+                <a:spcPts val="1400"/>
+              </a:spcAft>
+            </a:pPr>
+            <a:r>
+              <a:rPr sz="2400" b="0">
+                <a:solidFill>
+                  <a:srgbClr val="334155"/>
+                </a:solidFill>
+                <a:latin typeface="Calibri"/>
+              </a:rPr>
+              <a:t>• Safe for seals &amp; elastomers</a:t>
+            </a:r>
+          </a:p>
+          <a:p>
+            <a:pPr>
+              <a:spcBef>
+                <a:spcPts val="400"/>
+              </a:spcBef>
+              <a:spcAft>
+                <a:spcPts val="1400"/>
+              </a:spcAft>
+            </a:pPr>
+            <a:r>
+              <a:rPr sz="2400" b="0">
+                <a:solidFill>
+                  <a:srgbClr val="334155"/>
+                </a:solidFill>
+                <a:latin typeface="Calibri"/>
+              </a:rPr>
+              <a:t>• Clean surface for plating</a:t>
+            </a:r>
+          </a:p>
+          <a:p>
+            <a:pPr>
+              <a:spcBef>
+                <a:spcPts val="400"/>
+              </a:spcBef>
+              <a:spcAft>
+                <a:spcPts val="1400"/>
+              </a:spcAft>
+            </a:pPr>
+            <a:r>
+              <a:rPr sz="2400" b="0">
+                <a:solidFill>
+                  <a:srgbClr val="334155"/>
+                </a:solidFill>
+                <a:latin typeface="Calibri"/>
+              </a:rPr>
+              <a:t>• Adulteration voids certification</a:t>
+            </a:r>
+          </a:p>
+        </p:txBody>
+      </p:sp>
+      <p:sp>
+        <p:nvSpPr>
+          <p:cNvPr id="7" name="TextBox 6"/>
+          <p:cNvSpPr txBox="1"/>
+          <p:nvPr/>
+        </p:nvSpPr>
+        <p:spPr>
+          <a:xfrm>
+            <a:off x="365760" y="6473952"/>
+            <a:ext cx="8412480" cy="256032"/>
+          </a:xfrm>
+          <a:prstGeom prst="rect">
+            <a:avLst/>
+          </a:prstGeom>
+          <a:noFill/>
+        </p:spPr>
+        <p:txBody>
+          <a:bodyPr wrap="none">
+            <a:spAutoFit/>
+          </a:bodyPr>
+          <a:lstStyle/>
+          <a:p>
+            <a:pPr algn="r"/>
+            <a:r>
+              <a:rPr sz="1000" b="0">
+                <a:solidFill>
+                  <a:srgbClr val="64748B"/>
+                </a:solidFill>
+                <a:latin typeface="Calibri"/>
+              </a:rPr>
+              <a:t>Confidential — Risk Committee | Exxsol D40</a:t>
+            </a:r>
+          </a:p>
+        </p:txBody>
+      </p:sp>
+    </p:spTree>
+  </p:cSld>
+  <p:clrMapOvr>
+    <a:masterClrMapping/>
+  </p:clrMapOvr>
+</p:sld>
+</file>
+
+<file path=ppt/slides/slide8.xml><?xml version="1.0" encoding="utf-8"?>
+<p:sld xmlns:a="http://schemas.openxmlformats.org/drawingml/2006/main" xmlns:p="http://schemas.openxmlformats.org/presentationml/2006/main" xmlns:r="http://schemas.openxmlformats.org/officeDocument/2006/relationships">
+  <p:cSld>
+    <p:spTree>
+      <p:nvGrpSpPr>
+        <p:cNvPr id="1" name=""/>
+        <p:cNvGrpSpPr/>
+        <p:nvPr/>
+      </p:nvGrpSpPr>
+      <p:grpSpPr/>
+      <p:sp>
+        <p:nvSpPr>
+          <p:cNvPr id="2" name="Rectangle 1"/>
+          <p:cNvSpPr/>
+          <p:nvPr/>
+        </p:nvSpPr>
+        <p:spPr>
+          <a:xfrm>
+            <a:off x="0" y="0"/>
+            <a:ext cx="9144000" cy="1097280"/>
+          </a:xfrm>
+          <a:prstGeom prst="rect">
+            <a:avLst/>
+          </a:prstGeom>
+          <a:solidFill>
+            <a:srgbClr val="002B5C"/>
+          </a:solidFill>
+          <a:ln>
+            <a:noFill/>
+          </a:ln>
+        </p:spPr>
+        <p:style>
+          <a:lnRef idx="1">
+            <a:schemeClr val="accent1"/>
+          </a:lnRef>
+          <a:fillRef idx="3">
+            <a:schemeClr val="accent1"/>
+          </a:fillRef>
+          <a:effectRef idx="2">
+            <a:schemeClr val="accent1"/>
+          </a:effectRef>
+          <a:fontRef idx="minor">
+            <a:schemeClr val="lt1"/>
+          </a:fontRef>
+        </p:style>
+        <p:txBody>
+          <a:bodyPr rtlCol="0" anchor="ctr"/>
+          <a:lstStyle/>
+          <a:p>
+            <a:pPr algn="ctr"/>
+          </a:p>
+        </p:txBody>
+      </p:sp>
+      <p:sp>
+        <p:nvSpPr>
+          <p:cNvPr id="3" name="TextBox 2"/>
+          <p:cNvSpPr txBox="1"/>
+          <p:nvPr/>
+        </p:nvSpPr>
+        <p:spPr>
+          <a:xfrm>
+            <a:off x="411480" y="164592"/>
+            <a:ext cx="8321040" cy="566928"/>
+          </a:xfrm>
+          <a:prstGeom prst="rect">
+            <a:avLst/>
+          </a:prstGeom>
+          <a:noFill/>
+        </p:spPr>
+        <p:txBody>
+          <a:bodyPr wrap="none">
+            <a:spAutoFit/>
+          </a:bodyPr>
+          <a:lstStyle/>
+          <a:p>
+            <a:r>
+              <a:rPr sz="3400" b="1">
+                <a:solidFill>
+                  <a:srgbClr val="FFFFFF"/>
+                </a:solidFill>
+                <a:latin typeface="Calibri"/>
+              </a:rPr>
+              <a:t>D40 vs D60</a:t>
+            </a:r>
+          </a:p>
+        </p:txBody>
+      </p:sp>
+      <p:pic>
+        <p:nvPicPr>
+          <p:cNvPr id="4" name="Picture 3" descr="08_compare.png"/>
+          <p:cNvPicPr>
+            <a:picLocks noChangeAspect="1"/>
+          </p:cNvPicPr>
+          <p:nvPr/>
+        </p:nvPicPr>
+        <p:blipFill>
+          <a:blip r:embed="rId2"/>
+          <a:stretch>
+            <a:fillRect/>
+          </a:stretch>
+        </p:blipFill>
+        <p:spPr>
+          <a:xfrm>
+            <a:off x="5806440" y="1234440"/>
+            <a:ext cx="3063240" cy="4892040"/>
+          </a:xfrm>
+          <a:prstGeom prst="rect">
+            <a:avLst/>
+          </a:prstGeom>
+        </p:spPr>
+      </p:pic>
+      <p:graphicFrame>
+        <p:nvGraphicFramePr>
+          <p:cNvPr id="5" name="Table 4"/>
+          <p:cNvGraphicFramePr>
+            <a:graphicFrameLocks noGrp="1"/>
+          </p:cNvGraphicFramePr>
+          <p:nvPr/>
+        </p:nvGraphicFramePr>
+        <p:xfrm>
+          <a:off x="411480" y="1234440"/>
+          <a:ext cx="5166360" cy="1920240"/>
+        </p:xfrm>
+        <a:graphic>
+          <a:graphicData uri="http://schemas.openxmlformats.org/drawingml/2006/table">
+            <a:tbl>
+              <a:tblPr firstRow="1" bandRow="1">
+                <a:tableStyleId>{5C22544A-7EE6-4342-B048-85BDC9FD1C3A}</a:tableStyleId>
+              </a:tblPr>
+              <a:tblGrid>
+                <a:gridCol w="1097280"/>
+                <a:gridCol w="2011680"/>
+                <a:gridCol w="2057400"/>
+              </a:tblGrid>
+              <a:tr h="384048">
+                <a:tc>
+                  <a:txBody>
+                    <a:bodyPr/>
+                    <a:lstStyle/>
+                    <a:p/>
+                  </a:txBody>
+                  <a:tcPr>
+                    <a:solidFill>
+                      <a:srgbClr val="002B5C"/>
+                    </a:solidFill>
+                  </a:tcPr>
+                </a:tc>
+                <a:tc>
+                  <a:txBody>
+                    <a:bodyPr/>
+                    <a:lstStyle/>
+                    <a:p>
+                      <a:r>
+                        <a:rPr sz="1300" b="1">
+                          <a:solidFill>
+                            <a:srgbClr val="FFFFFF"/>
+                          </a:solidFill>
+                          <a:latin typeface="Calibri"/>
+                        </a:rPr>
+                        <a:t>D40</a:t>
+                      </a:r>
+                    </a:p>
+                  </a:txBody>
+                  <a:tcPr>
+                    <a:solidFill>
+                      <a:srgbClr val="002B5C"/>
+                    </a:solidFill>
+                  </a:tcPr>
+                </a:tc>
+                <a:tc>
+                  <a:txBody>
+                    <a:bodyPr/>
+                    <a:lstStyle/>
+                    <a:p>
+                      <a:r>
+                        <a:rPr sz="1300" b="1">
+                          <a:solidFill>
+                            <a:srgbClr val="FFFFFF"/>
+                          </a:solidFill>
+                          <a:latin typeface="Calibri"/>
+                        </a:rPr>
+                        <a:t>D60(S)</a:t>
+                      </a:r>
+                    </a:p>
+                  </a:txBody>
+                  <a:tcPr>
+                    <a:solidFill>
+                      <a:srgbClr val="002B5C"/>
+                    </a:solidFill>
+                  </a:tcPr>
+                </a:tc>
+              </a:tr>
+              <a:tr h="384048">
+                <a:tc>
+                  <a:txBody>
+                    <a:bodyPr/>
+                    <a:lstStyle/>
+                    <a:p>
+                      <a:r>
+                        <a:rPr sz="1200" b="0">
+                          <a:solidFill>
+                            <a:srgbClr val="334155"/>
+                          </a:solidFill>
+                          <a:latin typeface="Calibri"/>
+                        </a:rPr>
+                        <a:t>Boil range</a:t>
+                      </a:r>
+                    </a:p>
+                  </a:txBody>
+                  <a:tcPr/>
+                </a:tc>
+                <a:tc>
+                  <a:txBody>
+                    <a:bodyPr/>
+                    <a:lstStyle/>
+                    <a:p>
+                      <a:r>
+                        <a:rPr sz="1200" b="0">
+                          <a:solidFill>
+                            <a:srgbClr val="334155"/>
+                          </a:solidFill>
+                          <a:latin typeface="Calibri"/>
+                        </a:rPr>
+                        <a:t>163–187 °C</a:t>
+                      </a:r>
+                    </a:p>
+                  </a:txBody>
+                  <a:tcPr/>
+                </a:tc>
+                <a:tc>
+                  <a:txBody>
+                    <a:bodyPr/>
+                    <a:lstStyle/>
+                    <a:p>
+                      <a:r>
+                        <a:rPr sz="1200" b="0">
+                          <a:solidFill>
+                            <a:srgbClr val="334155"/>
+                          </a:solidFill>
+                          <a:latin typeface="Calibri"/>
+                        </a:rPr>
+                        <a:t>180–210 °C</a:t>
+                      </a:r>
+                    </a:p>
+                  </a:txBody>
+                  <a:tcPr/>
+                </a:tc>
+              </a:tr>
+              <a:tr h="384048">
+                <a:tc>
+                  <a:txBody>
+                    <a:bodyPr/>
+                    <a:lstStyle/>
+                    <a:p>
+                      <a:r>
+                        <a:rPr sz="1200" b="0">
+                          <a:solidFill>
+                            <a:srgbClr val="334155"/>
+                          </a:solidFill>
+                          <a:latin typeface="Calibri"/>
+                        </a:rPr>
+                        <a:t>Flash point</a:t>
+                      </a:r>
+                    </a:p>
+                  </a:txBody>
+                  <a:tcPr>
+                    <a:solidFill>
+                      <a:srgbClr val="F1F5F9"/>
+                    </a:solidFill>
+                  </a:tcPr>
+                </a:tc>
+                <a:tc>
+                  <a:txBody>
+                    <a:bodyPr/>
+                    <a:lstStyle/>
+                    <a:p>
+                      <a:r>
+                        <a:rPr sz="1200" b="0">
+                          <a:solidFill>
+                            <a:srgbClr val="334155"/>
+                          </a:solidFill>
+                          <a:latin typeface="Calibri"/>
+                        </a:rPr>
+                        <a:t>~48 °C</a:t>
+                      </a:r>
+                    </a:p>
+                  </a:txBody>
+                  <a:tcPr>
+                    <a:solidFill>
+                      <a:srgbClr val="F1F5F9"/>
+                    </a:solidFill>
+                  </a:tcPr>
+                </a:tc>
+                <a:tc>
+                  <a:txBody>
+                    <a:bodyPr/>
+                    <a:lstStyle/>
+                    <a:p>
+                      <a:r>
+                        <a:rPr sz="1200" b="0">
+                          <a:solidFill>
+                            <a:srgbClr val="334155"/>
+                          </a:solidFill>
+                          <a:latin typeface="Calibri"/>
+                        </a:rPr>
+                        <a:t>~68 °C</a:t>
+                      </a:r>
+                    </a:p>
+                  </a:txBody>
+                  <a:tcPr>
+                    <a:solidFill>
+                      <a:srgbClr val="F1F5F9"/>
+                    </a:solidFill>
+                  </a:tcPr>
+                </a:tc>
+              </a:tr>
+              <a:tr h="384048">
+                <a:tc>
+                  <a:txBody>
+                    <a:bodyPr/>
+                    <a:lstStyle/>
+                    <a:p>
+                      <a:r>
+                        <a:rPr sz="1200" b="0">
+                          <a:solidFill>
+                            <a:srgbClr val="334155"/>
+                          </a:solidFill>
+                          <a:latin typeface="Calibri"/>
+                        </a:rPr>
+                        <a:t>Dry speed</a:t>
+                      </a:r>
+                    </a:p>
+                  </a:txBody>
+                  <a:tcPr/>
+                </a:tc>
+                <a:tc>
+                  <a:txBody>
+                    <a:bodyPr/>
+                    <a:lstStyle/>
+                    <a:p>
+                      <a:r>
+                        <a:rPr sz="1200" b="0">
+                          <a:solidFill>
+                            <a:srgbClr val="334155"/>
+                          </a:solidFill>
+                          <a:latin typeface="Calibri"/>
+                        </a:rPr>
+                        <a:t>Fast</a:t>
+                      </a:r>
+                    </a:p>
+                  </a:txBody>
+                  <a:tcPr/>
+                </a:tc>
+                <a:tc>
+                  <a:txBody>
+                    <a:bodyPr/>
+                    <a:lstStyle/>
+                    <a:p>
+                      <a:r>
+                        <a:rPr sz="1200" b="0">
+                          <a:solidFill>
+                            <a:srgbClr val="334155"/>
+                          </a:solidFill>
+                          <a:latin typeface="Calibri"/>
+                        </a:rPr>
+                        <a:t>Slower</a:t>
+                      </a:r>
+                    </a:p>
+                  </a:txBody>
+                  <a:tcPr/>
+                </a:tc>
+              </a:tr>
+              <a:tr h="384048">
+                <a:tc>
+                  <a:txBody>
+                    <a:bodyPr/>
+                    <a:lstStyle/>
+                    <a:p>
+                      <a:r>
+                        <a:rPr sz="1200" b="0">
+                          <a:solidFill>
+                            <a:srgbClr val="334155"/>
+                          </a:solidFill>
+                          <a:latin typeface="Calibri"/>
+                        </a:rPr>
+                        <a:t>Best for</a:t>
+                      </a:r>
+                    </a:p>
+                  </a:txBody>
+                  <a:tcPr>
+                    <a:solidFill>
+                      <a:srgbClr val="F1F5F9"/>
+                    </a:solidFill>
+                  </a:tcPr>
+                </a:tc>
+                <a:tc>
+                  <a:txBody>
+                    <a:bodyPr/>
+                    <a:lstStyle/>
+                    <a:p>
+                      <a:r>
+                        <a:rPr sz="1200" b="0">
+                          <a:solidFill>
+                            <a:srgbClr val="334155"/>
+                          </a:solidFill>
+                          <a:latin typeface="Calibri"/>
+                        </a:rPr>
+                        <a:t>PM fast clean</a:t>
+                      </a:r>
+                    </a:p>
+                  </a:txBody>
+                  <a:tcPr>
+                    <a:solidFill>
+                      <a:srgbClr val="F1F5F9"/>
+                    </a:solidFill>
+                  </a:tcPr>
+                </a:tc>
+                <a:tc>
+                  <a:txBody>
+                    <a:bodyPr/>
+                    <a:lstStyle/>
+                    <a:p>
+                      <a:r>
+                        <a:rPr sz="1200" b="0">
+                          <a:solidFill>
+                            <a:srgbClr val="334155"/>
+                          </a:solidFill>
+                          <a:latin typeface="Calibri"/>
+                        </a:rPr>
+                        <a:t>Higher flash needs</a:t>
+                      </a:r>
+                    </a:p>
+                  </a:txBody>
+                  <a:tcPr>
+                    <a:solidFill>
+                      <a:srgbClr val="F1F5F9"/>
+                    </a:solidFill>
+                  </a:tcPr>
+                </a:tc>
+              </a:tr>
+            </a:tbl>
+          </a:graphicData>
+        </a:graphic>
+      </p:graphicFrame>
+      <p:sp>
+        <p:nvSpPr>
+          <p:cNvPr id="6" name="TextBox 5"/>
+          <p:cNvSpPr txBox="1"/>
+          <p:nvPr/>
+        </p:nvSpPr>
+        <p:spPr>
+          <a:xfrm>
+            <a:off x="365760" y="6473952"/>
+            <a:ext cx="8412480" cy="256032"/>
+          </a:xfrm>
+          <a:prstGeom prst="rect">
+            <a:avLst/>
+          </a:prstGeom>
+          <a:noFill/>
+        </p:spPr>
+        <p:txBody>
+          <a:bodyPr wrap="none">
+            <a:spAutoFit/>
+          </a:bodyPr>
+          <a:lstStyle/>
+          <a:p>
+            <a:pPr algn="r"/>
+            <a:r>
+              <a:rPr sz="1000" b="0">
+                <a:solidFill>
+                  <a:srgbClr val="64748B"/>
+                </a:solidFill>
+                <a:latin typeface="Calibri"/>
+              </a:rPr>
+              <a:t>Confidential — Risk Committee | Exxsol D40</a:t>
             </a:r>
           </a:p>
         </p:txBody>
@@ -10837,7 +9401,7 @@
         <p:spPr>
           <a:xfrm>
             <a:off x="0" y="0"/>
-            <a:ext cx="9144000" cy="1051560"/>
+            <a:ext cx="9144000" cy="1097280"/>
           </a:xfrm>
           <a:prstGeom prst="rect">
             <a:avLst/>
@@ -10879,8 +9443,8 @@
         </p:nvSpPr>
         <p:spPr>
           <a:xfrm>
-            <a:off x="502920" y="201168"/>
-            <a:ext cx="8046720" cy="502920"/>
+            <a:off x="411480" y="164592"/>
+            <a:ext cx="8321040" cy="566928"/>
           </a:xfrm>
           <a:prstGeom prst="rect">
             <a:avLst/>
@@ -10894,27 +9458,51 @@
           <a:lstStyle/>
           <a:p>
             <a:r>
-              <a:rPr sz="2800" b="1">
+              <a:rPr sz="3400" b="1">
                 <a:solidFill>
                   <a:srgbClr val="FFFFFF"/>
                 </a:solidFill>
                 <a:latin typeface="Calibri"/>
               </a:rPr>
-              <a:t>Supply Chain Risk Landscape</a:t>
-            </a:r>
-          </a:p>
-        </p:txBody>
-      </p:sp>
-      <p:sp>
-        <p:nvSpPr>
-          <p:cNvPr id="4" name="TextBox 3"/>
+              <a:t>Supply Chain Risk</a:t>
+            </a:r>
+          </a:p>
+        </p:txBody>
+      </p:sp>
+      <p:pic>
+        <p:nvPicPr>
+          <p:cNvPr id="4" name="Picture 3" descr="09_supply.png"/>
+          <p:cNvPicPr>
+            <a:picLocks noChangeAspect="1"/>
+          </p:cNvPicPr>
+          <p:nvPr/>
+        </p:nvPicPr>
+        <p:blipFill>
+          <a:blip r:embed="rId2"/>
+          <a:stretch>
+            <a:fillRect/>
+          </a:stretch>
+        </p:blipFill>
+        <p:spPr>
+          <a:xfrm>
+            <a:off x="5806440" y="1234440"/>
+            <a:ext cx="3063240" cy="4892040"/>
+          </a:xfrm>
+          <a:prstGeom prst="rect">
+            <a:avLst/>
+          </a:prstGeom>
+        </p:spPr>
+      </p:pic>
+      <p:sp>
+        <p:nvSpPr>
+          <p:cNvPr id="5" name="TextBox 4"/>
           <p:cNvSpPr txBox="1"/>
           <p:nvPr/>
         </p:nvSpPr>
         <p:spPr>
           <a:xfrm>
-            <a:off x="594360" y="1325880"/>
-            <a:ext cx="7955279" cy="5029200"/>
+            <a:off x="411480" y="1234440"/>
+            <a:ext cx="5166360" cy="5120640"/>
           </a:xfrm>
           <a:prstGeom prst="rect">
             <a:avLst/>
@@ -10929,129 +9517,145 @@
           <a:p>
             <a:pPr>
               <a:spcBef>
-                <a:spcPts val="200"/>
+                <a:spcPts val="400"/>
               </a:spcBef>
               <a:spcAft>
-                <a:spcPts val="885"/>
+                <a:spcPts val="1400"/>
               </a:spcAft>
             </a:pPr>
             <a:r>
-              <a:rPr sz="1400" b="0">
+              <a:rPr sz="2400" b="0">
                 <a:solidFill>
                   <a:srgbClr val="334155"/>
                 </a:solidFill>
                 <a:latin typeface="Calibri"/>
               </a:rPr>
-              <a:t>Geopolitical driver: Middle East conflict (Iran region) has elevated crude and petrochemical feedstock uncertainty.</a:t>
+              <a:t>• Middle East conflict → feedstock stress</a:t>
             </a:r>
           </a:p>
           <a:p>
             <a:pPr>
               <a:spcBef>
-                <a:spcPts val="200"/>
+                <a:spcPts val="400"/>
               </a:spcBef>
               <a:spcAft>
-                <a:spcPts val="885"/>
+                <a:spcPts val="1400"/>
               </a:spcAft>
             </a:pPr>
             <a:r>
-              <a:rPr sz="1400" b="0">
+              <a:rPr sz="2400" b="0">
                 <a:solidFill>
                   <a:srgbClr val="334155"/>
                 </a:solidFill>
                 <a:latin typeface="Calibri"/>
               </a:rPr>
-              <a:t>Manufacturer action: ExxonMobil announced +$0.06/lb price increase for Exxsol D40 (March 2026).</a:t>
+              <a:t>• ExxonMobil +$0.06/lb (Mar 2026)</a:t>
             </a:r>
           </a:p>
           <a:p>
             <a:pPr>
               <a:spcBef>
-                <a:spcPts val="200"/>
+                <a:spcPts val="400"/>
               </a:spcBef>
               <a:spcAft>
-                <a:spcPts val="885"/>
+                <a:spcPts val="1400"/>
               </a:spcAft>
             </a:pPr>
             <a:r>
-              <a:rPr sz="1400" b="0">
+              <a:rPr sz="2400" b="0">
                 <a:solidFill>
                   <a:srgbClr val="334155"/>
                 </a:solidFill>
                 <a:latin typeface="Calibri"/>
               </a:rPr>
-              <a:t>Market transmission: China terminal reference rose ~5.4% (Apr 2026) and continued upward through mid-2026 (~RMB 9,283/t).</a:t>
+              <a:t>• China price +5% and rising</a:t>
             </a:r>
           </a:p>
           <a:p>
             <a:pPr>
               <a:spcBef>
-                <a:spcPts val="200"/>
+                <a:spcPts val="400"/>
               </a:spcBef>
               <a:spcAft>
-                <a:spcPts val="885"/>
+                <a:spcPts val="1400"/>
               </a:spcAft>
             </a:pPr>
             <a:r>
-              <a:rPr sz="1400" b="0">
+              <a:rPr sz="2400" b="0">
                 <a:solidFill>
                   <a:srgbClr val="334155"/>
                 </a:solidFill>
                 <a:latin typeface="Calibri"/>
               </a:rPr>
-              <a:t>Upstream pressure signal: WD-40 reported up to 100% specialty chemical procurement cost spikes — indicating severe feedstock stress.</a:t>
-            </a:r>
-          </a:p>
-          <a:p>
-            <a:pPr>
-              <a:spcBef>
-                <a:spcPts val="200"/>
-              </a:spcBef>
-              <a:spcAft>
-                <a:spcPts val="885"/>
-              </a:spcAft>
-            </a:pPr>
-            <a:r>
-              <a:rPr sz="1400" b="0">
-                <a:solidFill>
-                  <a:srgbClr val="334155"/>
-                </a:solidFill>
-                <a:latin typeface="Calibri"/>
-              </a:rPr>
-              <a:t>Risk implication: widening price spreads between genuine D40 and adulterants (MC, methanol, white spirit) increase fraud incentive.</a:t>
-            </a:r>
-          </a:p>
-          <a:p>
-            <a:pPr>
-              <a:spcBef>
-                <a:spcPts val="200"/>
-              </a:spcBef>
-              <a:spcAft>
-                <a:spcPts val="885"/>
-              </a:spcAft>
-            </a:pPr>
-            <a:r>
-              <a:rPr sz="1400" b="0">
-                <a:solidFill>
-                  <a:srgbClr val="334155"/>
-                </a:solidFill>
-                <a:latin typeface="Calibri"/>
-              </a:rPr>
-              <a:t>Procurement trap: “Isoparaffin D40” and relabeled drums can appear visually identical to authentic Exxsol product.</a:t>
-            </a:r>
-          </a:p>
-        </p:txBody>
-      </p:sp>
-      <p:sp>
-        <p:nvSpPr>
-          <p:cNvPr id="5" name="TextBox 4"/>
+              <a:t>• Wide spread = fraud incentive</a:t>
+            </a:r>
+          </a:p>
+        </p:txBody>
+      </p:sp>
+      <p:sp>
+        <p:nvSpPr>
+          <p:cNvPr id="6" name="Rounded Rectangle 5"/>
+          <p:cNvSpPr/>
+          <p:nvPr/>
+        </p:nvSpPr>
+        <p:spPr>
+          <a:xfrm>
+            <a:off x="411480" y="5623560"/>
+            <a:ext cx="5166360" cy="658368"/>
+          </a:xfrm>
+          <a:prstGeom prst="roundRect">
+            <a:avLst/>
+          </a:prstGeom>
+          <a:solidFill>
+            <a:srgbClr val="FEF3C7"/>
+          </a:solidFill>
+          <a:ln w="19050">
+            <a:solidFill>
+              <a:srgbClr val="B45309"/>
+            </a:solidFill>
+          </a:ln>
+        </p:spPr>
+        <p:style>
+          <a:lnRef idx="1">
+            <a:schemeClr val="accent1"/>
+          </a:lnRef>
+          <a:fillRef idx="3">
+            <a:schemeClr val="accent1"/>
+          </a:fillRef>
+          <a:effectRef idx="2">
+            <a:schemeClr val="accent1"/>
+          </a:effectRef>
+          <a:fontRef idx="minor">
+            <a:schemeClr val="lt1"/>
+          </a:fontRef>
+        </p:style>
+        <p:txBody>
+          <a:bodyPr rtlCol="0" anchor="ctr" wrap="square" lIns="109728" rIns="109728"/>
+          <a:lstStyle/>
+          <a:p>
+            <a:pPr algn="ctr"/>
+            <a:r>
+              <a:rPr sz="1600" b="1">
+                <a:solidFill>
+                  <a:srgbClr val="002B5C"/>
+                </a:solidFill>
+                <a:latin typeface="Calibri"/>
+              </a:rPr>
+              <a:t>Verify — don't buy on price alone.</a:t>
+            </a:r>
+          </a:p>
+        </p:txBody>
+      </p:sp>
+      <p:sp>
+        <p:nvSpPr>
+          <p:cNvPr id="7" name="TextBox 6"/>
           <p:cNvSpPr txBox="1"/>
           <p:nvPr/>
         </p:nvSpPr>
         <p:spPr>
           <a:xfrm>
-            <a:off x="457200" y="6446520"/>
-            <a:ext cx="8229600" cy="274320"/>
+            <a:off x="365760" y="6473952"/>
+            <a:ext cx="8412480" cy="256032"/>
           </a:xfrm>
           <a:prstGeom prst="rect">
             <a:avLst/>
@@ -11066,13 +9670,13 @@
           <a:p>
             <a:pPr algn="r"/>
             <a:r>
-              <a:rPr sz="900" b="0">
+              <a:rPr sz="1000" b="0">
                 <a:solidFill>
                   <a:srgbClr val="64748B"/>
                 </a:solidFill>
                 <a:latin typeface="Calibri"/>
               </a:rPr>
-              <a:t>Confidential — Risk Committee | Exxsol D40 Supply Chain Integrity</a:t>
+              <a:t>Confidential — Risk Committee | Exxsol D40</a:t>
             </a:r>
           </a:p>
         </p:txBody>
